--- a/output/wordlabs-communicate-3day.pptx
+++ b/output/wordlabs-communicate-3day.pptx
@@ -4240,7 +4240,7 @@
                 <a:ea typeface="Calibri" pitchFamily="34" charset="-122"/>
                 <a:cs typeface="Calibri" pitchFamily="34" charset="-120"/>
               </a:rPr>
-              <a:t>"to share or exchange information"</a:t>
+              <a:t>"share or exchange information"</a:t>
             </a:r>
             <a:endParaRPr lang="en-US" sz="2200" dirty="0"/>
           </a:p>
@@ -5288,7 +5288,7 @@
                 <a:ea typeface="Calibri" pitchFamily="34" charset="-122"/>
                 <a:cs typeface="Calibri" pitchFamily="34" charset="-120"/>
               </a:rPr>
-              <a:t>Word Labs  •  wordlabs.app  •  Root: 'communicate' = to share or exchange information</a:t>
+              <a:t>Word Labs  •  wordlabs.app  •  Root: 'communicate' = share or exchange information</a:t>
             </a:r>
             <a:endParaRPr lang="en-US" sz="800" dirty="0"/>
           </a:p>
@@ -5928,7 +5928,7 @@
                 <a:ea typeface="Calibri" pitchFamily="34" charset="-122"/>
                 <a:cs typeface="Calibri" pitchFamily="34" charset="-120"/>
               </a:rPr>
-              <a:t>Word Labs  •  wordlabs.app  •  Root: 'communicate' = to share or exchange information</a:t>
+              <a:t>Word Labs  •  wordlabs.app  •  Root: 'communicate' = share or exchange information</a:t>
             </a:r>
             <a:endParaRPr lang="en-US" sz="800" dirty="0"/>
           </a:p>
@@ -6040,7 +6040,7 @@
                 <a:ea typeface="Calibri" pitchFamily="34" charset="-122"/>
                 <a:cs typeface="Calibri" pitchFamily="34" charset="-120"/>
               </a:rPr>
-              <a:t>Good </a:t>
+              <a:t>Strong </a:t>
             </a:r>
             <a:pPr algn="l" indent="0" marL="0">
               <a:buNone/>
@@ -6071,7 +6071,7 @@
                 <a:ea typeface="Calibri" pitchFamily="34" charset="-122"/>
                 <a:cs typeface="Calibri" pitchFamily="34" charset="-120"/>
               </a:rPr>
-              <a:t> helps us avoid </a:t>
+              <a:t> skills help us become better </a:t>
             </a:r>
             <a:pPr algn="l" indent="0" marL="0">
               <a:buNone/>
@@ -6088,7 +6088,7 @@
                 <a:ea typeface="Calibri" pitchFamily="34" charset="-122"/>
                 <a:cs typeface="Calibri" pitchFamily="34" charset="-120"/>
               </a:rPr>
-              <a:t>miscommunication</a:t>
+              <a:t>communicators</a:t>
             </a:r>
             <a:pPr algn="l" indent="0" marL="0">
               <a:buNone/>
@@ -6102,7 +6102,7 @@
                 <a:ea typeface="Calibri" pitchFamily="34" charset="-122"/>
                 <a:cs typeface="Calibri" pitchFamily="34" charset="-120"/>
               </a:rPr>
-              <a:t> when we work together.</a:t>
+              <a:t> in everyday life.</a:t>
             </a:r>
             <a:endParaRPr lang="en-US" sz="1800" dirty="0"/>
           </a:p>
@@ -6385,7 +6385,7 @@
                 <a:ea typeface="Trebuchet MS" pitchFamily="34" charset="-122"/>
                 <a:cs typeface="Trebuchet MS" pitchFamily="34" charset="-120"/>
               </a:rPr>
-              <a:t>miscommunication</a:t>
+              <a:t>communicators</a:t>
             </a:r>
             <a:endParaRPr lang="en-US" sz="1400" dirty="0"/>
           </a:p>
@@ -6716,7 +6716,7 @@
                 <a:ea typeface="Calibri" pitchFamily="34" charset="-122"/>
                 <a:cs typeface="Calibri" pitchFamily="34" charset="-120"/>
               </a:rPr>
-              <a:t>Word Labs  •  wordlabs.app  •  Root: 'communicate' = to share or exchange information</a:t>
+              <a:t>Word Labs  •  wordlabs.app  •  Root: 'communicate' = share or exchange information</a:t>
             </a:r>
             <a:endParaRPr lang="en-US" sz="800" dirty="0"/>
           </a:p>
@@ -7543,7 +7543,7 @@
                 <a:ea typeface="Calibri" pitchFamily="34" charset="-122"/>
                 <a:cs typeface="Calibri" pitchFamily="34" charset="-120"/>
               </a:rPr>
-              <a:t>Word Labs  •  wordlabs.app  •  Root: 'communicate' = to share or exchange information</a:t>
+              <a:t>Word Labs  •  wordlabs.app  •  Root: 'communicate' = share or exchange information</a:t>
             </a:r>
             <a:endParaRPr lang="en-US" sz="800" dirty="0"/>
           </a:p>
@@ -7860,7 +7860,7 @@
                 <a:ea typeface="Calibri" pitchFamily="34" charset="-122"/>
                 <a:cs typeface="Calibri" pitchFamily="34" charset="-120"/>
               </a:rPr>
-              <a:t>to share or exchange information</a:t>
+              <a:t>share or exchange information</a:t>
             </a:r>
             <a:endParaRPr lang="en-US" sz="850" dirty="0"/>
           </a:p>
@@ -8567,7 +8567,7 @@
                 <a:ea typeface="Calibri" pitchFamily="34" charset="-122"/>
                 <a:cs typeface="Calibri" pitchFamily="34" charset="-120"/>
               </a:rPr>
-              <a:t>Word Labs  •  wordlabs.app  •  Root: 'communicate' = to share or exchange information</a:t>
+              <a:t>Word Labs  •  wordlabs.app  •  Root: 'communicate' = share or exchange information</a:t>
             </a:r>
             <a:endParaRPr lang="en-US" sz="800" dirty="0"/>
           </a:p>
@@ -8884,7 +8884,7 @@
                 <a:ea typeface="Calibri" pitchFamily="34" charset="-122"/>
                 <a:cs typeface="Calibri" pitchFamily="34" charset="-120"/>
               </a:rPr>
-              <a:t>to share or exchange information</a:t>
+              <a:t>share or exchange information</a:t>
             </a:r>
             <a:endParaRPr lang="en-US" sz="850" dirty="0"/>
           </a:p>
@@ -10038,7 +10038,7 @@
                 <a:ea typeface="Calibri" pitchFamily="34" charset="-122"/>
                 <a:cs typeface="Calibri" pitchFamily="34" charset="-120"/>
               </a:rPr>
-              <a:t>Word Labs  •  wordlabs.app  •  Root: 'communicate' = to share or exchange information</a:t>
+              <a:t>Word Labs  •  wordlabs.app  •  Root: 'communicate' = share or exchange information</a:t>
             </a:r>
             <a:endParaRPr lang="en-US" sz="800" dirty="0"/>
           </a:p>
@@ -10355,7 +10355,7 @@
                 <a:ea typeface="Calibri" pitchFamily="34" charset="-122"/>
                 <a:cs typeface="Calibri" pitchFamily="34" charset="-120"/>
               </a:rPr>
-              <a:t>to share or exchange information</a:t>
+              <a:t>share or exchange information</a:t>
             </a:r>
             <a:endParaRPr lang="en-US" sz="850" dirty="0"/>
           </a:p>
@@ -11415,7 +11415,7 @@
                 <a:ea typeface="Trebuchet MS" pitchFamily="34" charset="-122"/>
                 <a:cs typeface="Trebuchet MS" pitchFamily="34" charset="-120"/>
               </a:rPr>
-              <a:t>mm</a:t>
+              <a:t>m</a:t>
             </a:r>
             <a:endParaRPr lang="en-US" sz="900" dirty="0"/>
           </a:p>
@@ -11858,13 +11858,79 @@
       </p:sp>
       <p:sp>
         <p:nvSpPr>
-          <p:cNvPr id="63" name="Text 61"/>
-          <p:cNvSpPr/>
-          <p:nvPr/>
-        </p:nvSpPr>
-        <p:spPr>
-          <a:xfrm>
-            <a:off x="6703799" y="4572000"/>
+          <p:cNvPr id="63" name="Shape 61"/>
+          <p:cNvSpPr/>
+          <p:nvPr/>
+        </p:nvSpPr>
+        <p:spPr>
+          <a:xfrm>
+            <a:off x="7297743" y="4169664"/>
+            <a:ext cx="543652" cy="384048"/>
+          </a:xfrm>
+          <a:prstGeom prst="rect">
+            <a:avLst>
+              <a:gd name="adj" fmla="val 9524"/>
+            </a:avLst>
+          </a:prstGeom>
+          <a:solidFill>
+            <a:srgbClr val="FFFFFF"/>
+          </a:solidFill>
+          <a:ln w="12700">
+            <a:solidFill>
+              <a:srgbClr val="DB2777"/>
+            </a:solidFill>
+            <a:prstDash val="solid"/>
+          </a:ln>
+        </p:spPr>
+      </p:sp>
+      <p:sp>
+        <p:nvSpPr>
+          <p:cNvPr id="64" name="Text 62"/>
+          <p:cNvSpPr/>
+          <p:nvPr/>
+        </p:nvSpPr>
+        <p:spPr>
+          <a:xfrm>
+            <a:off x="7297743" y="4169664"/>
+            <a:ext cx="543652" cy="384048"/>
+          </a:xfrm>
+          <a:prstGeom prst="rect">
+            <a:avLst/>
+          </a:prstGeom>
+          <a:noFill/>
+          <a:ln/>
+        </p:spPr>
+        <p:txBody>
+          <a:bodyPr wrap="square" lIns="0" tIns="0" rIns="0" bIns="0" rtlCol="0" anchor="ctr"/>
+          <a:lstStyle/>
+          <a:p>
+            <a:pPr algn="ctr" indent="0" marL="0">
+              <a:buNone/>
+            </a:pPr>
+            <a:r>
+              <a:rPr lang="en-US" sz="900" b="1" dirty="0">
+                <a:solidFill>
+                  <a:srgbClr val="9D174D"/>
+                </a:solidFill>
+                <a:latin typeface="Trebuchet MS" pitchFamily="34" charset="0"/>
+                <a:ea typeface="Trebuchet MS" pitchFamily="34" charset="-122"/>
+                <a:cs typeface="Trebuchet MS" pitchFamily="34" charset="-120"/>
+              </a:rPr>
+              <a:t>io</a:t>
+            </a:r>
+            <a:endParaRPr lang="en-US" sz="900" dirty="0"/>
+          </a:p>
+        </p:txBody>
+      </p:sp>
+      <p:sp>
+        <p:nvSpPr>
+          <p:cNvPr id="65" name="Text 63"/>
+          <p:cNvSpPr/>
+          <p:nvPr/>
+        </p:nvSpPr>
+        <p:spPr>
+          <a:xfrm>
+            <a:off x="7297743" y="4572000"/>
             <a:ext cx="543652" cy="219456"/>
           </a:xfrm>
           <a:prstGeom prst="rect">
@@ -11892,72 +11958,6 @@
               <a:t>/sh/</a:t>
             </a:r>
             <a:endParaRPr lang="en-US" sz="750" dirty="0"/>
-          </a:p>
-        </p:txBody>
-      </p:sp>
-      <p:sp>
-        <p:nvSpPr>
-          <p:cNvPr id="64" name="Shape 62"/>
-          <p:cNvSpPr/>
-          <p:nvPr/>
-        </p:nvSpPr>
-        <p:spPr>
-          <a:xfrm>
-            <a:off x="7297743" y="4169664"/>
-            <a:ext cx="543652" cy="384048"/>
-          </a:xfrm>
-          <a:prstGeom prst="rect">
-            <a:avLst>
-              <a:gd name="adj" fmla="val 9524"/>
-            </a:avLst>
-          </a:prstGeom>
-          <a:solidFill>
-            <a:srgbClr val="FFFFFF"/>
-          </a:solidFill>
-          <a:ln w="12700">
-            <a:solidFill>
-              <a:srgbClr val="DB2777"/>
-            </a:solidFill>
-            <a:prstDash val="solid"/>
-          </a:ln>
-        </p:spPr>
-      </p:sp>
-      <p:sp>
-        <p:nvSpPr>
-          <p:cNvPr id="65" name="Text 63"/>
-          <p:cNvSpPr/>
-          <p:nvPr/>
-        </p:nvSpPr>
-        <p:spPr>
-          <a:xfrm>
-            <a:off x="7297743" y="4169664"/>
-            <a:ext cx="543652" cy="384048"/>
-          </a:xfrm>
-          <a:prstGeom prst="rect">
-            <a:avLst/>
-          </a:prstGeom>
-          <a:noFill/>
-          <a:ln/>
-        </p:spPr>
-        <p:txBody>
-          <a:bodyPr wrap="square" lIns="0" tIns="0" rIns="0" bIns="0" rtlCol="0" anchor="ctr"/>
-          <a:lstStyle/>
-          <a:p>
-            <a:pPr algn="ctr" indent="0" marL="0">
-              <a:buNone/>
-            </a:pPr>
-            <a:r>
-              <a:rPr lang="en-US" sz="900" b="1" dirty="0">
-                <a:solidFill>
-                  <a:srgbClr val="9D174D"/>
-                </a:solidFill>
-                <a:latin typeface="Trebuchet MS" pitchFamily="34" charset="0"/>
-                <a:ea typeface="Trebuchet MS" pitchFamily="34" charset="-122"/>
-                <a:cs typeface="Trebuchet MS" pitchFamily="34" charset="-120"/>
-              </a:rPr>
-              <a:t>io</a:t>
-            </a:r>
-            <a:endParaRPr lang="en-US" sz="900" dirty="0"/>
           </a:p>
         </p:txBody>
       </p:sp>
@@ -12313,7 +12313,7 @@
                 <a:ea typeface="Calibri" pitchFamily="34" charset="-122"/>
                 <a:cs typeface="Calibri" pitchFamily="34" charset="-120"/>
               </a:rPr>
-              <a:t>Word Labs  •  wordlabs.app  •  Root: 'communicate' = to share or exchange information</a:t>
+              <a:t>Word Labs  •  wordlabs.app  •  Root: 'communicate' = share or exchange information</a:t>
             </a:r>
             <a:endParaRPr lang="en-US" sz="800" dirty="0"/>
           </a:p>
@@ -12452,7 +12452,7 @@
                 <a:ea typeface="Trebuchet MS" pitchFamily="34" charset="-122"/>
                 <a:cs typeface="Trebuchet MS" pitchFamily="34" charset="-120"/>
               </a:rPr>
-              <a:t>miscommunication</a:t>
+              <a:t>communicators</a:t>
             </a:r>
             <a:endParaRPr lang="en-US" sz="2800" dirty="0"/>
           </a:p>
@@ -13140,7 +13140,7 @@
                 <a:ea typeface="Calibri" pitchFamily="34" charset="-122"/>
                 <a:cs typeface="Calibri" pitchFamily="34" charset="-120"/>
               </a:rPr>
-              <a:t>Word Labs  •  wordlabs.app  •  Root: 'communicate' = to share or exchange information</a:t>
+              <a:t>Word Labs  •  wordlabs.app  •  Root: 'communicate' = share or exchange information</a:t>
             </a:r>
             <a:endParaRPr lang="en-US" sz="800" dirty="0"/>
           </a:p>
@@ -13279,7 +13279,7 @@
                 <a:ea typeface="Trebuchet MS" pitchFamily="34" charset="-122"/>
                 <a:cs typeface="Trebuchet MS" pitchFamily="34" charset="-120"/>
               </a:rPr>
-              <a:t>miscommunication</a:t>
+              <a:t>communicators</a:t>
             </a:r>
             <a:endParaRPr lang="en-US" sz="2800" dirty="0"/>
           </a:p>
@@ -13368,11 +13368,11 @@
             </a:avLst>
           </a:prstGeom>
           <a:solidFill>
-            <a:srgbClr val="DDD6FE"/>
+            <a:srgbClr val="CCFBF1"/>
           </a:solidFill>
           <a:ln w="19050">
             <a:solidFill>
-              <a:srgbClr val="7C3AED"/>
+              <a:srgbClr val="0D9488"/>
             </a:solidFill>
             <a:prstDash val="solid"/>
           </a:ln>
@@ -13412,13 +13412,13 @@
             <a:r>
               <a:rPr lang="en-US" sz="1300" b="1" dirty="0">
                 <a:solidFill>
-                  <a:srgbClr val="4C1D95"/>
+                  <a:srgbClr val="0F766E"/>
                 </a:solidFill>
                 <a:latin typeface="Trebuchet MS" pitchFamily="34" charset="0"/>
                 <a:ea typeface="Trebuchet MS" pitchFamily="34" charset="-122"/>
                 <a:cs typeface="Trebuchet MS" pitchFamily="34" charset="-120"/>
               </a:rPr>
-              <a:t>mis</a:t>
+              <a:t>communicate</a:t>
             </a:r>
             <a:endParaRPr lang="en-US" sz="1300" dirty="0"/>
           </a:p>
@@ -13457,7 +13457,7 @@
                 <a:ea typeface="Calibri" pitchFamily="34" charset="-122"/>
                 <a:cs typeface="Calibri" pitchFamily="34" charset="-120"/>
               </a:rPr>
-              <a:t>wrongly or badly</a:t>
+              <a:t>share or exchange information</a:t>
             </a:r>
             <a:endParaRPr lang="en-US" sz="850" dirty="0"/>
           </a:p>
@@ -13465,7 +13465,46 @@
       </p:sp>
       <p:sp>
         <p:nvSpPr>
-          <p:cNvPr id="19" name="Shape 17"/>
+          <p:cNvPr id="19" name="Text 17"/>
+          <p:cNvSpPr/>
+          <p:nvPr/>
+        </p:nvSpPr>
+        <p:spPr>
+          <a:xfrm>
+            <a:off x="2221992" y="2752344"/>
+            <a:ext cx="1828800" cy="182880"/>
+          </a:xfrm>
+          <a:prstGeom prst="rect">
+            <a:avLst/>
+          </a:prstGeom>
+          <a:noFill/>
+          <a:ln/>
+        </p:spPr>
+        <p:txBody>
+          <a:bodyPr wrap="square" lIns="0" tIns="0" rIns="0" bIns="0" rtlCol="0" anchor="t"/>
+          <a:lstStyle/>
+          <a:p>
+            <a:pPr algn="ctr" indent="0" marL="0">
+              <a:buNone/>
+            </a:pPr>
+            <a:r>
+              <a:rPr lang="en-US" sz="700" i="1" dirty="0">
+                <a:solidFill>
+                  <a:srgbClr val="94A3B8"/>
+                </a:solidFill>
+                <a:latin typeface="Calibri" pitchFamily="34" charset="0"/>
+                <a:ea typeface="Calibri" pitchFamily="34" charset="-122"/>
+                <a:cs typeface="Calibri" pitchFamily="34" charset="-120"/>
+              </a:rPr>
+              <a:t>'e' dropped before vowel suffix</a:t>
+            </a:r>
+            <a:endParaRPr lang="en-US" sz="700" dirty="0"/>
+          </a:p>
+        </p:txBody>
+      </p:sp>
+      <p:sp>
+        <p:nvSpPr>
+          <p:cNvPr id="20" name="Shape 18"/>
           <p:cNvSpPr/>
           <p:nvPr/>
         </p:nvSpPr>
@@ -13480,11 +13519,11 @@
             </a:avLst>
           </a:prstGeom>
           <a:solidFill>
-            <a:srgbClr val="CCFBF1"/>
+            <a:srgbClr val="FCE7F3"/>
           </a:solidFill>
           <a:ln w="19050">
             <a:solidFill>
-              <a:srgbClr val="0D9488"/>
+              <a:srgbClr val="DB2777"/>
             </a:solidFill>
             <a:prstDash val="solid"/>
           </a:ln>
@@ -13499,7 +13538,7 @@
       </p:sp>
       <p:sp>
         <p:nvSpPr>
-          <p:cNvPr id="20" name="Text 18"/>
+          <p:cNvPr id="21" name="Text 19"/>
           <p:cNvSpPr/>
           <p:nvPr/>
         </p:nvSpPr>
@@ -13524,13 +13563,13 @@
             <a:r>
               <a:rPr lang="en-US" sz="1300" b="1" dirty="0">
                 <a:solidFill>
-                  <a:srgbClr val="0F766E"/>
+                  <a:srgbClr val="9D174D"/>
                 </a:solidFill>
                 <a:latin typeface="Trebuchet MS" pitchFamily="34" charset="0"/>
                 <a:ea typeface="Trebuchet MS" pitchFamily="34" charset="-122"/>
                 <a:cs typeface="Trebuchet MS" pitchFamily="34" charset="-120"/>
               </a:rPr>
-              <a:t>communicate</a:t>
+              <a:t>or</a:t>
             </a:r>
             <a:endParaRPr lang="en-US" sz="1300" dirty="0"/>
           </a:p>
@@ -13538,7 +13577,7 @@
       </p:sp>
       <p:sp>
         <p:nvSpPr>
-          <p:cNvPr id="21" name="Text 19"/>
+          <p:cNvPr id="22" name="Text 20"/>
           <p:cNvSpPr/>
           <p:nvPr/>
         </p:nvSpPr>
@@ -13569,48 +13608,9 @@
                 <a:ea typeface="Calibri" pitchFamily="34" charset="-122"/>
                 <a:cs typeface="Calibri" pitchFamily="34" charset="-120"/>
               </a:rPr>
-              <a:t>to share or exchange information</a:t>
+              <a:t>person who does</a:t>
             </a:r>
             <a:endParaRPr lang="en-US" sz="850" dirty="0"/>
-          </a:p>
-        </p:txBody>
-      </p:sp>
-      <p:sp>
-        <p:nvSpPr>
-          <p:cNvPr id="22" name="Text 20"/>
-          <p:cNvSpPr/>
-          <p:nvPr/>
-        </p:nvSpPr>
-        <p:spPr>
-          <a:xfrm>
-            <a:off x="4370832" y="2752344"/>
-            <a:ext cx="1828800" cy="182880"/>
-          </a:xfrm>
-          <a:prstGeom prst="rect">
-            <a:avLst/>
-          </a:prstGeom>
-          <a:noFill/>
-          <a:ln/>
-        </p:spPr>
-        <p:txBody>
-          <a:bodyPr wrap="square" lIns="0" tIns="0" rIns="0" bIns="0" rtlCol="0" anchor="t"/>
-          <a:lstStyle/>
-          <a:p>
-            <a:pPr algn="ctr" indent="0" marL="0">
-              <a:buNone/>
-            </a:pPr>
-            <a:r>
-              <a:rPr lang="en-US" sz="700" i="1" dirty="0">
-                <a:solidFill>
-                  <a:srgbClr val="94A3B8"/>
-                </a:solidFill>
-                <a:latin typeface="Calibri" pitchFamily="34" charset="0"/>
-                <a:ea typeface="Calibri" pitchFamily="34" charset="-122"/>
-                <a:cs typeface="Calibri" pitchFamily="34" charset="-120"/>
-              </a:rPr>
-              <a:t>'e' dropped before vowel suffix</a:t>
-            </a:r>
-            <a:endParaRPr lang="en-US" sz="700" dirty="0"/>
           </a:p>
         </p:txBody>
       </p:sp>
@@ -13681,7 +13681,7 @@
                 <a:ea typeface="Trebuchet MS" pitchFamily="34" charset="-122"/>
                 <a:cs typeface="Trebuchet MS" pitchFamily="34" charset="-120"/>
               </a:rPr>
-              <a:t>ion</a:t>
+              <a:t>s</a:t>
             </a:r>
             <a:endParaRPr lang="en-US" sz="1300" dirty="0"/>
           </a:p>
@@ -13720,7 +13720,7 @@
                 <a:ea typeface="Calibri" pitchFamily="34" charset="-122"/>
                 <a:cs typeface="Calibri" pitchFamily="34" charset="-120"/>
               </a:rPr>
-              <a:t>act or process of</a:t>
+              <a:t>more than one</a:t>
             </a:r>
             <a:endParaRPr lang="en-US" sz="850" dirty="0"/>
           </a:p>
@@ -14276,7 +14276,7 @@
                 <a:ea typeface="Calibri" pitchFamily="34" charset="-122"/>
                 <a:cs typeface="Calibri" pitchFamily="34" charset="-120"/>
               </a:rPr>
-              <a:t>Word Labs  •  wordlabs.app  •  Root: 'communicate' = to share or exchange information</a:t>
+              <a:t>Word Labs  •  wordlabs.app  •  Root: 'communicate' = share or exchange information</a:t>
             </a:r>
             <a:endParaRPr lang="en-US" sz="800" dirty="0"/>
           </a:p>
@@ -14415,7 +14415,7 @@
                 <a:ea typeface="Trebuchet MS" pitchFamily="34" charset="-122"/>
                 <a:cs typeface="Trebuchet MS" pitchFamily="34" charset="-120"/>
               </a:rPr>
-              <a:t>miscommunication</a:t>
+              <a:t>communicators</a:t>
             </a:r>
             <a:endParaRPr lang="en-US" sz="2800" dirty="0"/>
           </a:p>
@@ -14504,11 +14504,11 @@
             </a:avLst>
           </a:prstGeom>
           <a:solidFill>
-            <a:srgbClr val="DDD6FE"/>
+            <a:srgbClr val="CCFBF1"/>
           </a:solidFill>
           <a:ln w="19050">
             <a:solidFill>
-              <a:srgbClr val="7C3AED"/>
+              <a:srgbClr val="0D9488"/>
             </a:solidFill>
             <a:prstDash val="solid"/>
           </a:ln>
@@ -14548,13 +14548,13 @@
             <a:r>
               <a:rPr lang="en-US" sz="1300" b="1" dirty="0">
                 <a:solidFill>
-                  <a:srgbClr val="4C1D95"/>
+                  <a:srgbClr val="0F766E"/>
                 </a:solidFill>
                 <a:latin typeface="Trebuchet MS" pitchFamily="34" charset="0"/>
                 <a:ea typeface="Trebuchet MS" pitchFamily="34" charset="-122"/>
                 <a:cs typeface="Trebuchet MS" pitchFamily="34" charset="-120"/>
               </a:rPr>
-              <a:t>mis</a:t>
+              <a:t>communicate</a:t>
             </a:r>
             <a:endParaRPr lang="en-US" sz="1300" dirty="0"/>
           </a:p>
@@ -14593,7 +14593,7 @@
                 <a:ea typeface="Calibri" pitchFamily="34" charset="-122"/>
                 <a:cs typeface="Calibri" pitchFamily="34" charset="-120"/>
               </a:rPr>
-              <a:t>wrongly or badly</a:t>
+              <a:t>share or exchange information</a:t>
             </a:r>
             <a:endParaRPr lang="en-US" sz="850" dirty="0"/>
           </a:p>
@@ -14601,7 +14601,46 @@
       </p:sp>
       <p:sp>
         <p:nvSpPr>
-          <p:cNvPr id="19" name="Shape 17"/>
+          <p:cNvPr id="19" name="Text 17"/>
+          <p:cNvSpPr/>
+          <p:nvPr/>
+        </p:nvSpPr>
+        <p:spPr>
+          <a:xfrm>
+            <a:off x="2221992" y="2752344"/>
+            <a:ext cx="1828800" cy="182880"/>
+          </a:xfrm>
+          <a:prstGeom prst="rect">
+            <a:avLst/>
+          </a:prstGeom>
+          <a:noFill/>
+          <a:ln/>
+        </p:spPr>
+        <p:txBody>
+          <a:bodyPr wrap="square" lIns="0" tIns="0" rIns="0" bIns="0" rtlCol="0" anchor="t"/>
+          <a:lstStyle/>
+          <a:p>
+            <a:pPr algn="ctr" indent="0" marL="0">
+              <a:buNone/>
+            </a:pPr>
+            <a:r>
+              <a:rPr lang="en-US" sz="700" i="1" dirty="0">
+                <a:solidFill>
+                  <a:srgbClr val="94A3B8"/>
+                </a:solidFill>
+                <a:latin typeface="Calibri" pitchFamily="34" charset="0"/>
+                <a:ea typeface="Calibri" pitchFamily="34" charset="-122"/>
+                <a:cs typeface="Calibri" pitchFamily="34" charset="-120"/>
+              </a:rPr>
+              <a:t>'e' dropped before vowel suffix</a:t>
+            </a:r>
+            <a:endParaRPr lang="en-US" sz="700" dirty="0"/>
+          </a:p>
+        </p:txBody>
+      </p:sp>
+      <p:sp>
+        <p:nvSpPr>
+          <p:cNvPr id="20" name="Shape 18"/>
           <p:cNvSpPr/>
           <p:nvPr/>
         </p:nvSpPr>
@@ -14616,11 +14655,11 @@
             </a:avLst>
           </a:prstGeom>
           <a:solidFill>
-            <a:srgbClr val="CCFBF1"/>
+            <a:srgbClr val="FCE7F3"/>
           </a:solidFill>
           <a:ln w="19050">
             <a:solidFill>
-              <a:srgbClr val="0D9488"/>
+              <a:srgbClr val="DB2777"/>
             </a:solidFill>
             <a:prstDash val="solid"/>
           </a:ln>
@@ -14635,7 +14674,7 @@
       </p:sp>
       <p:sp>
         <p:nvSpPr>
-          <p:cNvPr id="20" name="Text 18"/>
+          <p:cNvPr id="21" name="Text 19"/>
           <p:cNvSpPr/>
           <p:nvPr/>
         </p:nvSpPr>
@@ -14660,13 +14699,13 @@
             <a:r>
               <a:rPr lang="en-US" sz="1300" b="1" dirty="0">
                 <a:solidFill>
-                  <a:srgbClr val="0F766E"/>
+                  <a:srgbClr val="9D174D"/>
                 </a:solidFill>
                 <a:latin typeface="Trebuchet MS" pitchFamily="34" charset="0"/>
                 <a:ea typeface="Trebuchet MS" pitchFamily="34" charset="-122"/>
                 <a:cs typeface="Trebuchet MS" pitchFamily="34" charset="-120"/>
               </a:rPr>
-              <a:t>communicate</a:t>
+              <a:t>or</a:t>
             </a:r>
             <a:endParaRPr lang="en-US" sz="1300" dirty="0"/>
           </a:p>
@@ -14674,7 +14713,7 @@
       </p:sp>
       <p:sp>
         <p:nvSpPr>
-          <p:cNvPr id="21" name="Text 19"/>
+          <p:cNvPr id="22" name="Text 20"/>
           <p:cNvSpPr/>
           <p:nvPr/>
         </p:nvSpPr>
@@ -14705,48 +14744,9 @@
                 <a:ea typeface="Calibri" pitchFamily="34" charset="-122"/>
                 <a:cs typeface="Calibri" pitchFamily="34" charset="-120"/>
               </a:rPr>
-              <a:t>to share or exchange information</a:t>
+              <a:t>person who does</a:t>
             </a:r>
             <a:endParaRPr lang="en-US" sz="850" dirty="0"/>
-          </a:p>
-        </p:txBody>
-      </p:sp>
-      <p:sp>
-        <p:nvSpPr>
-          <p:cNvPr id="22" name="Text 20"/>
-          <p:cNvSpPr/>
-          <p:nvPr/>
-        </p:nvSpPr>
-        <p:spPr>
-          <a:xfrm>
-            <a:off x="4370832" y="2752344"/>
-            <a:ext cx="1828800" cy="182880"/>
-          </a:xfrm>
-          <a:prstGeom prst="rect">
-            <a:avLst/>
-          </a:prstGeom>
-          <a:noFill/>
-          <a:ln/>
-        </p:spPr>
-        <p:txBody>
-          <a:bodyPr wrap="square" lIns="0" tIns="0" rIns="0" bIns="0" rtlCol="0" anchor="t"/>
-          <a:lstStyle/>
-          <a:p>
-            <a:pPr algn="ctr" indent="0" marL="0">
-              <a:buNone/>
-            </a:pPr>
-            <a:r>
-              <a:rPr lang="en-US" sz="700" i="1" dirty="0">
-                <a:solidFill>
-                  <a:srgbClr val="94A3B8"/>
-                </a:solidFill>
-                <a:latin typeface="Calibri" pitchFamily="34" charset="0"/>
-                <a:ea typeface="Calibri" pitchFamily="34" charset="-122"/>
-                <a:cs typeface="Calibri" pitchFamily="34" charset="-120"/>
-              </a:rPr>
-              <a:t>'e' dropped before vowel suffix</a:t>
-            </a:r>
-            <a:endParaRPr lang="en-US" sz="700" dirty="0"/>
           </a:p>
         </p:txBody>
       </p:sp>
@@ -14817,7 +14817,7 @@
                 <a:ea typeface="Trebuchet MS" pitchFamily="34" charset="-122"/>
                 <a:cs typeface="Trebuchet MS" pitchFamily="34" charset="-120"/>
               </a:rPr>
-              <a:t>ion</a:t>
+              <a:t>s</a:t>
             </a:r>
             <a:endParaRPr lang="en-US" sz="1300" dirty="0"/>
           </a:p>
@@ -14856,7 +14856,7 @@
                 <a:ea typeface="Calibri" pitchFamily="34" charset="-122"/>
                 <a:cs typeface="Calibri" pitchFamily="34" charset="-120"/>
               </a:rPr>
-              <a:t>act or process of</a:t>
+              <a:t>more than one</a:t>
             </a:r>
             <a:endParaRPr lang="en-US" sz="850" dirty="0"/>
           </a:p>
@@ -14963,8 +14963,8 @@
         </p:nvSpPr>
         <p:spPr>
           <a:xfrm>
-            <a:off x="1980329" y="3364992"/>
-            <a:ext cx="1005840" cy="475488"/>
+            <a:off x="1978152" y="3364992"/>
+            <a:ext cx="1225296" cy="475488"/>
           </a:xfrm>
           <a:prstGeom prst="rect">
             <a:avLst>
@@ -14990,8 +14990,8 @@
         </p:nvSpPr>
         <p:spPr>
           <a:xfrm>
-            <a:off x="1980329" y="3364992"/>
-            <a:ext cx="1005840" cy="475488"/>
+            <a:off x="1978152" y="3364992"/>
+            <a:ext cx="1225296" cy="475488"/>
           </a:xfrm>
           <a:prstGeom prst="rect">
             <a:avLst/>
@@ -15015,7 +15015,7 @@
                 <a:ea typeface="Trebuchet MS" pitchFamily="34" charset="-122"/>
                 <a:cs typeface="Trebuchet MS" pitchFamily="34" charset="-120"/>
               </a:rPr>
-              <a:t>mis</a:t>
+              <a:t>com</a:t>
             </a:r>
             <a:endParaRPr lang="en-US" sz="1400" dirty="0"/>
           </a:p>
@@ -15029,8 +15029,8 @@
         </p:nvSpPr>
         <p:spPr>
           <a:xfrm>
-            <a:off x="2986169" y="3364992"/>
-            <a:ext cx="78377" cy="475488"/>
+            <a:off x="3203448" y="3364992"/>
+            <a:ext cx="76200" cy="475488"/>
           </a:xfrm>
           <a:prstGeom prst="rect">
             <a:avLst/>
@@ -15068,8 +15068,8 @@
         </p:nvSpPr>
         <p:spPr>
           <a:xfrm>
-            <a:off x="3064546" y="3364992"/>
-            <a:ext cx="1005840" cy="475488"/>
+            <a:off x="3279648" y="3364992"/>
+            <a:ext cx="1225296" cy="475488"/>
           </a:xfrm>
           <a:prstGeom prst="rect">
             <a:avLst>
@@ -15095,8 +15095,8 @@
         </p:nvSpPr>
         <p:spPr>
           <a:xfrm>
-            <a:off x="3064546" y="3364992"/>
-            <a:ext cx="1005840" cy="475488"/>
+            <a:off x="3279648" y="3364992"/>
+            <a:ext cx="1225296" cy="475488"/>
           </a:xfrm>
           <a:prstGeom prst="rect">
             <a:avLst/>
@@ -15120,7 +15120,7 @@
                 <a:ea typeface="Trebuchet MS" pitchFamily="34" charset="-122"/>
                 <a:cs typeface="Trebuchet MS" pitchFamily="34" charset="-120"/>
               </a:rPr>
-              <a:t>com</a:t>
+              <a:t>mu</a:t>
             </a:r>
             <a:endParaRPr lang="en-US" sz="1400" dirty="0"/>
           </a:p>
@@ -15134,8 +15134,8 @@
         </p:nvSpPr>
         <p:spPr>
           <a:xfrm>
-            <a:off x="4070386" y="3364992"/>
-            <a:ext cx="78377" cy="475488"/>
+            <a:off x="4504944" y="3364992"/>
+            <a:ext cx="76200" cy="475488"/>
           </a:xfrm>
           <a:prstGeom prst="rect">
             <a:avLst/>
@@ -15173,8 +15173,8 @@
         </p:nvSpPr>
         <p:spPr>
           <a:xfrm>
-            <a:off x="4148763" y="3364992"/>
-            <a:ext cx="1005840" cy="475488"/>
+            <a:off x="4581144" y="3364992"/>
+            <a:ext cx="1225296" cy="475488"/>
           </a:xfrm>
           <a:prstGeom prst="rect">
             <a:avLst>
@@ -15200,8 +15200,8 @@
         </p:nvSpPr>
         <p:spPr>
           <a:xfrm>
-            <a:off x="4148763" y="3364992"/>
-            <a:ext cx="1005840" cy="475488"/>
+            <a:off x="4581144" y="3364992"/>
+            <a:ext cx="1225296" cy="475488"/>
           </a:xfrm>
           <a:prstGeom prst="rect">
             <a:avLst/>
@@ -15225,7 +15225,7 @@
                 <a:ea typeface="Trebuchet MS" pitchFamily="34" charset="-122"/>
                 <a:cs typeface="Trebuchet MS" pitchFamily="34" charset="-120"/>
               </a:rPr>
-              <a:t>mu</a:t>
+              <a:t>ni</a:t>
             </a:r>
             <a:endParaRPr lang="en-US" sz="1400" dirty="0"/>
           </a:p>
@@ -15239,8 +15239,8 @@
         </p:nvSpPr>
         <p:spPr>
           <a:xfrm>
-            <a:off x="5154603" y="3364992"/>
-            <a:ext cx="78377" cy="475488"/>
+            <a:off x="5806440" y="3364992"/>
+            <a:ext cx="76200" cy="475488"/>
           </a:xfrm>
           <a:prstGeom prst="rect">
             <a:avLst/>
@@ -15278,8 +15278,8 @@
         </p:nvSpPr>
         <p:spPr>
           <a:xfrm>
-            <a:off x="5232981" y="3364992"/>
-            <a:ext cx="1005840" cy="475488"/>
+            <a:off x="5882640" y="3364992"/>
+            <a:ext cx="1225296" cy="475488"/>
           </a:xfrm>
           <a:prstGeom prst="rect">
             <a:avLst>
@@ -15305,8 +15305,8 @@
         </p:nvSpPr>
         <p:spPr>
           <a:xfrm>
-            <a:off x="5232981" y="3364992"/>
-            <a:ext cx="1005840" cy="475488"/>
+            <a:off x="5882640" y="3364992"/>
+            <a:ext cx="1225296" cy="475488"/>
           </a:xfrm>
           <a:prstGeom prst="rect">
             <a:avLst/>
@@ -15330,7 +15330,7 @@
                 <a:ea typeface="Trebuchet MS" pitchFamily="34" charset="-122"/>
                 <a:cs typeface="Trebuchet MS" pitchFamily="34" charset="-120"/>
               </a:rPr>
-              <a:t>ni</a:t>
+              <a:t>ca</a:t>
             </a:r>
             <a:endParaRPr lang="en-US" sz="1400" dirty="0"/>
           </a:p>
@@ -15344,8 +15344,8 @@
         </p:nvSpPr>
         <p:spPr>
           <a:xfrm>
-            <a:off x="6238821" y="3364992"/>
-            <a:ext cx="78377" cy="475488"/>
+            <a:off x="7107936" y="3364992"/>
+            <a:ext cx="76200" cy="475488"/>
           </a:xfrm>
           <a:prstGeom prst="rect">
             <a:avLst/>
@@ -15383,8 +15383,8 @@
         </p:nvSpPr>
         <p:spPr>
           <a:xfrm>
-            <a:off x="6317198" y="3364992"/>
-            <a:ext cx="1005840" cy="475488"/>
+            <a:off x="7184136" y="3364992"/>
+            <a:ext cx="1225296" cy="475488"/>
           </a:xfrm>
           <a:prstGeom prst="rect">
             <a:avLst>
@@ -15410,8 +15410,8 @@
         </p:nvSpPr>
         <p:spPr>
           <a:xfrm>
-            <a:off x="6317198" y="3364992"/>
-            <a:ext cx="1005840" cy="475488"/>
+            <a:off x="7184136" y="3364992"/>
+            <a:ext cx="1225296" cy="475488"/>
           </a:xfrm>
           <a:prstGeom prst="rect">
             <a:avLst/>
@@ -15435,7 +15435,7 @@
                 <a:ea typeface="Trebuchet MS" pitchFamily="34" charset="-122"/>
                 <a:cs typeface="Trebuchet MS" pitchFamily="34" charset="-120"/>
               </a:rPr>
-              <a:t>ca</a:t>
+              <a:t>tors</a:t>
             </a:r>
             <a:endParaRPr lang="en-US" sz="1400" dirty="0"/>
           </a:p>
@@ -15443,119 +15443,80 @@
       </p:sp>
       <p:sp>
         <p:nvSpPr>
-          <p:cNvPr id="43" name="Text 41"/>
-          <p:cNvSpPr/>
-          <p:nvPr/>
-        </p:nvSpPr>
-        <p:spPr>
-          <a:xfrm>
-            <a:off x="7323038" y="3364992"/>
-            <a:ext cx="78377" cy="475488"/>
-          </a:xfrm>
-          <a:prstGeom prst="rect">
-            <a:avLst/>
-          </a:prstGeom>
-          <a:noFill/>
-          <a:ln/>
-        </p:spPr>
-        <p:txBody>
-          <a:bodyPr wrap="square" lIns="0" tIns="0" rIns="0" bIns="0" rtlCol="0" anchor="ctr"/>
-          <a:lstStyle/>
-          <a:p>
-            <a:pPr algn="ctr" indent="0" marL="0">
-              <a:buNone/>
-            </a:pPr>
-            <a:r>
-              <a:rPr lang="en-US" sz="1600" b="1" dirty="0">
-                <a:solidFill>
-                  <a:srgbClr val="0D9488"/>
+          <p:cNvPr id="43" name="Shape 41"/>
+          <p:cNvSpPr/>
+          <p:nvPr/>
+        </p:nvSpPr>
+        <p:spPr>
+          <a:xfrm>
+            <a:off x="365760" y="4096512"/>
+            <a:ext cx="1371600" cy="804672"/>
+          </a:xfrm>
+          <a:prstGeom prst="rect">
+            <a:avLst>
+              <a:gd name="adj" fmla="val 6818"/>
+            </a:avLst>
+          </a:prstGeom>
+          <a:solidFill>
+            <a:srgbClr val="E2E8F0"/>
+          </a:solidFill>
+          <a:ln w="12700">
+            <a:solidFill>
+              <a:srgbClr val="E2E8F0"/>
+            </a:solidFill>
+            <a:prstDash val="solid"/>
+          </a:ln>
+        </p:spPr>
+      </p:sp>
+      <p:sp>
+        <p:nvSpPr>
+          <p:cNvPr id="44" name="Text 42"/>
+          <p:cNvSpPr/>
+          <p:nvPr/>
+        </p:nvSpPr>
+        <p:spPr>
+          <a:xfrm>
+            <a:off x="365760" y="4096512"/>
+            <a:ext cx="1371600" cy="804672"/>
+          </a:xfrm>
+          <a:prstGeom prst="rect">
+            <a:avLst/>
+          </a:prstGeom>
+          <a:noFill/>
+          <a:ln/>
+        </p:spPr>
+        <p:txBody>
+          <a:bodyPr wrap="square" lIns="0" tIns="0" rIns="0" bIns="0" rtlCol="0" anchor="ctr"/>
+          <a:lstStyle/>
+          <a:p>
+            <a:pPr algn="ctr" indent="0" marL="0">
+              <a:buNone/>
+            </a:pPr>
+            <a:r>
+              <a:rPr lang="en-US" sz="1100" b="1" dirty="0">
+                <a:solidFill>
+                  <a:srgbClr val="475569"/>
                 </a:solidFill>
                 <a:latin typeface="Trebuchet MS" pitchFamily="34" charset="0"/>
                 <a:ea typeface="Trebuchet MS" pitchFamily="34" charset="-122"/>
                 <a:cs typeface="Trebuchet MS" pitchFamily="34" charset="-120"/>
               </a:rPr>
-              <a:t>·</a:t>
-            </a:r>
-            <a:endParaRPr lang="en-US" sz="1600" dirty="0"/>
-          </a:p>
-        </p:txBody>
-      </p:sp>
-      <p:sp>
-        <p:nvSpPr>
-          <p:cNvPr id="44" name="Shape 42"/>
-          <p:cNvSpPr/>
-          <p:nvPr/>
-        </p:nvSpPr>
-        <p:spPr>
-          <a:xfrm>
-            <a:off x="7401415" y="3364992"/>
-            <a:ext cx="1005840" cy="475488"/>
-          </a:xfrm>
-          <a:prstGeom prst="rect">
-            <a:avLst>
-              <a:gd name="adj" fmla="val 9615"/>
-            </a:avLst>
-          </a:prstGeom>
-          <a:solidFill>
-            <a:srgbClr val="FFFFFF"/>
-          </a:solidFill>
-          <a:ln w="12700">
-            <a:solidFill>
-              <a:srgbClr val="0D9488"/>
-            </a:solidFill>
-            <a:prstDash val="solid"/>
-          </a:ln>
-        </p:spPr>
-      </p:sp>
-      <p:sp>
-        <p:nvSpPr>
-          <p:cNvPr id="45" name="Text 43"/>
-          <p:cNvSpPr/>
-          <p:nvPr/>
-        </p:nvSpPr>
-        <p:spPr>
-          <a:xfrm>
-            <a:off x="7401415" y="3364992"/>
-            <a:ext cx="1005840" cy="475488"/>
-          </a:xfrm>
-          <a:prstGeom prst="rect">
-            <a:avLst/>
-          </a:prstGeom>
-          <a:noFill/>
-          <a:ln/>
-        </p:spPr>
-        <p:txBody>
-          <a:bodyPr wrap="square" lIns="0" tIns="0" rIns="0" bIns="0" rtlCol="0" anchor="ctr"/>
-          <a:lstStyle/>
-          <a:p>
-            <a:pPr algn="ctr" indent="0" marL="0">
-              <a:buNone/>
-            </a:pPr>
-            <a:r>
-              <a:rPr lang="en-US" sz="1400" b="1" dirty="0">
-                <a:solidFill>
-                  <a:srgbClr val="0D9488"/>
-                </a:solidFill>
-                <a:latin typeface="Trebuchet MS" pitchFamily="34" charset="0"/>
-                <a:ea typeface="Trebuchet MS" pitchFamily="34" charset="-122"/>
-                <a:cs typeface="Trebuchet MS" pitchFamily="34" charset="-120"/>
-              </a:rPr>
-              <a:t>tion</a:t>
-            </a:r>
-            <a:endParaRPr lang="en-US" sz="1400" dirty="0"/>
-          </a:p>
-        </p:txBody>
-      </p:sp>
-      <p:sp>
-        <p:nvSpPr>
-          <p:cNvPr id="46" name="Shape 44"/>
-          <p:cNvSpPr/>
-          <p:nvPr/>
-        </p:nvSpPr>
-        <p:spPr>
-          <a:xfrm>
-            <a:off x="365760" y="4096512"/>
-            <a:ext cx="1371600" cy="804672"/>
+              <a:t>Phonemes</a:t>
+            </a:r>
+            <a:endParaRPr lang="en-US" sz="1100" dirty="0"/>
+          </a:p>
+        </p:txBody>
+      </p:sp>
+      <p:sp>
+        <p:nvSpPr>
+          <p:cNvPr id="45" name="Shape 43"/>
+          <p:cNvSpPr/>
+          <p:nvPr/>
+        </p:nvSpPr>
+        <p:spPr>
+          <a:xfrm>
+            <a:off x="1874520" y="4096512"/>
+            <a:ext cx="6903720" cy="804672"/>
           </a:xfrm>
           <a:prstGeom prst="rect">
             <a:avLst>
@@ -15563,85 +15524,19 @@
             </a:avLst>
           </a:prstGeom>
           <a:solidFill>
-            <a:srgbClr val="E2E8F0"/>
+            <a:srgbClr val="F8FAFC"/>
           </a:solidFill>
           <a:ln w="12700">
             <a:solidFill>
               <a:srgbClr val="E2E8F0"/>
             </a:solidFill>
-            <a:prstDash val="solid"/>
-          </a:ln>
-        </p:spPr>
-      </p:sp>
-      <p:sp>
-        <p:nvSpPr>
-          <p:cNvPr id="47" name="Text 45"/>
-          <p:cNvSpPr/>
-          <p:nvPr/>
-        </p:nvSpPr>
-        <p:spPr>
-          <a:xfrm>
-            <a:off x="365760" y="4096512"/>
-            <a:ext cx="1371600" cy="804672"/>
-          </a:xfrm>
-          <a:prstGeom prst="rect">
-            <a:avLst/>
-          </a:prstGeom>
-          <a:noFill/>
-          <a:ln/>
-        </p:spPr>
-        <p:txBody>
-          <a:bodyPr wrap="square" lIns="0" tIns="0" rIns="0" bIns="0" rtlCol="0" anchor="ctr"/>
-          <a:lstStyle/>
-          <a:p>
-            <a:pPr algn="ctr" indent="0" marL="0">
-              <a:buNone/>
-            </a:pPr>
-            <a:r>
-              <a:rPr lang="en-US" sz="1100" b="1" dirty="0">
-                <a:solidFill>
-                  <a:srgbClr val="475569"/>
-                </a:solidFill>
-                <a:latin typeface="Trebuchet MS" pitchFamily="34" charset="0"/>
-                <a:ea typeface="Trebuchet MS" pitchFamily="34" charset="-122"/>
-                <a:cs typeface="Trebuchet MS" pitchFamily="34" charset="-120"/>
-              </a:rPr>
-              <a:t>Phonemes</a:t>
-            </a:r>
-            <a:endParaRPr lang="en-US" sz="1100" dirty="0"/>
-          </a:p>
-        </p:txBody>
-      </p:sp>
-      <p:sp>
-        <p:nvSpPr>
-          <p:cNvPr id="48" name="Shape 46"/>
-          <p:cNvSpPr/>
-          <p:nvPr/>
-        </p:nvSpPr>
-        <p:spPr>
-          <a:xfrm>
-            <a:off x="1874520" y="4096512"/>
-            <a:ext cx="6903720" cy="804672"/>
-          </a:xfrm>
-          <a:prstGeom prst="rect">
-            <a:avLst>
-              <a:gd name="adj" fmla="val 6818"/>
-            </a:avLst>
-          </a:prstGeom>
-          <a:solidFill>
-            <a:srgbClr val="F8FAFC"/>
-          </a:solidFill>
-          <a:ln w="12700">
-            <a:solidFill>
-              <a:srgbClr val="E2E8F0"/>
-            </a:solidFill>
             <a:prstDash val="dash"/>
           </a:ln>
         </p:spPr>
       </p:sp>
       <p:sp>
         <p:nvSpPr>
-          <p:cNvPr id="49" name="Text 47"/>
+          <p:cNvPr id="46" name="Text 44"/>
           <p:cNvSpPr/>
           <p:nvPr/>
         </p:nvSpPr>
@@ -15873,7 +15768,7 @@
                 <a:ea typeface="Calibri" pitchFamily="34" charset="-122"/>
                 <a:cs typeface="Calibri" pitchFamily="34" charset="-120"/>
               </a:rPr>
-              <a:t>Root 'communicate' — to share or exchange information</a:t>
+              <a:t>Root 'communicate' — share or exchange information</a:t>
             </a:r>
             <a:endParaRPr lang="en-US" sz="1600" dirty="0"/>
           </a:p>
@@ -16229,7 +16124,7 @@
                 <a:ea typeface="Calibri" pitchFamily="34" charset="-122"/>
                 <a:cs typeface="Calibri" pitchFamily="34" charset="-120"/>
               </a:rPr>
-              <a:t>Word Labs  •  wordlabs.app  •  Root: 'communicate' = to share or exchange information</a:t>
+              <a:t>Word Labs  •  wordlabs.app  •  Root: 'communicate' = share or exchange information</a:t>
             </a:r>
             <a:endParaRPr lang="en-US" sz="800" dirty="0"/>
           </a:p>
@@ -16368,7 +16263,7 @@
                 <a:ea typeface="Trebuchet MS" pitchFamily="34" charset="-122"/>
                 <a:cs typeface="Trebuchet MS" pitchFamily="34" charset="-120"/>
               </a:rPr>
-              <a:t>miscommunication</a:t>
+              <a:t>communicators</a:t>
             </a:r>
             <a:endParaRPr lang="en-US" sz="2800" dirty="0"/>
           </a:p>
@@ -16457,11 +16352,11 @@
             </a:avLst>
           </a:prstGeom>
           <a:solidFill>
-            <a:srgbClr val="DDD6FE"/>
+            <a:srgbClr val="CCFBF1"/>
           </a:solidFill>
           <a:ln w="19050">
             <a:solidFill>
-              <a:srgbClr val="7C3AED"/>
+              <a:srgbClr val="0D9488"/>
             </a:solidFill>
             <a:prstDash val="solid"/>
           </a:ln>
@@ -16501,13 +16396,13 @@
             <a:r>
               <a:rPr lang="en-US" sz="1300" b="1" dirty="0">
                 <a:solidFill>
-                  <a:srgbClr val="4C1D95"/>
+                  <a:srgbClr val="0F766E"/>
                 </a:solidFill>
                 <a:latin typeface="Trebuchet MS" pitchFamily="34" charset="0"/>
                 <a:ea typeface="Trebuchet MS" pitchFamily="34" charset="-122"/>
                 <a:cs typeface="Trebuchet MS" pitchFamily="34" charset="-120"/>
               </a:rPr>
-              <a:t>mis</a:t>
+              <a:t>communicate</a:t>
             </a:r>
             <a:endParaRPr lang="en-US" sz="1300" dirty="0"/>
           </a:p>
@@ -16546,7 +16441,7 @@
                 <a:ea typeface="Calibri" pitchFamily="34" charset="-122"/>
                 <a:cs typeface="Calibri" pitchFamily="34" charset="-120"/>
               </a:rPr>
-              <a:t>wrongly or badly</a:t>
+              <a:t>share or exchange information</a:t>
             </a:r>
             <a:endParaRPr lang="en-US" sz="850" dirty="0"/>
           </a:p>
@@ -16554,7 +16449,46 @@
       </p:sp>
       <p:sp>
         <p:nvSpPr>
-          <p:cNvPr id="19" name="Shape 17"/>
+          <p:cNvPr id="19" name="Text 17"/>
+          <p:cNvSpPr/>
+          <p:nvPr/>
+        </p:nvSpPr>
+        <p:spPr>
+          <a:xfrm>
+            <a:off x="2221992" y="2752344"/>
+            <a:ext cx="1828800" cy="182880"/>
+          </a:xfrm>
+          <a:prstGeom prst="rect">
+            <a:avLst/>
+          </a:prstGeom>
+          <a:noFill/>
+          <a:ln/>
+        </p:spPr>
+        <p:txBody>
+          <a:bodyPr wrap="square" lIns="0" tIns="0" rIns="0" bIns="0" rtlCol="0" anchor="t"/>
+          <a:lstStyle/>
+          <a:p>
+            <a:pPr algn="ctr" indent="0" marL="0">
+              <a:buNone/>
+            </a:pPr>
+            <a:r>
+              <a:rPr lang="en-US" sz="700" i="1" dirty="0">
+                <a:solidFill>
+                  <a:srgbClr val="94A3B8"/>
+                </a:solidFill>
+                <a:latin typeface="Calibri" pitchFamily="34" charset="0"/>
+                <a:ea typeface="Calibri" pitchFamily="34" charset="-122"/>
+                <a:cs typeface="Calibri" pitchFamily="34" charset="-120"/>
+              </a:rPr>
+              <a:t>'e' dropped before vowel suffix</a:t>
+            </a:r>
+            <a:endParaRPr lang="en-US" sz="700" dirty="0"/>
+          </a:p>
+        </p:txBody>
+      </p:sp>
+      <p:sp>
+        <p:nvSpPr>
+          <p:cNvPr id="20" name="Shape 18"/>
           <p:cNvSpPr/>
           <p:nvPr/>
         </p:nvSpPr>
@@ -16569,11 +16503,11 @@
             </a:avLst>
           </a:prstGeom>
           <a:solidFill>
-            <a:srgbClr val="CCFBF1"/>
+            <a:srgbClr val="FCE7F3"/>
           </a:solidFill>
           <a:ln w="19050">
             <a:solidFill>
-              <a:srgbClr val="0D9488"/>
+              <a:srgbClr val="DB2777"/>
             </a:solidFill>
             <a:prstDash val="solid"/>
           </a:ln>
@@ -16588,7 +16522,7 @@
       </p:sp>
       <p:sp>
         <p:nvSpPr>
-          <p:cNvPr id="20" name="Text 18"/>
+          <p:cNvPr id="21" name="Text 19"/>
           <p:cNvSpPr/>
           <p:nvPr/>
         </p:nvSpPr>
@@ -16613,13 +16547,13 @@
             <a:r>
               <a:rPr lang="en-US" sz="1300" b="1" dirty="0">
                 <a:solidFill>
-                  <a:srgbClr val="0F766E"/>
+                  <a:srgbClr val="9D174D"/>
                 </a:solidFill>
                 <a:latin typeface="Trebuchet MS" pitchFamily="34" charset="0"/>
                 <a:ea typeface="Trebuchet MS" pitchFamily="34" charset="-122"/>
                 <a:cs typeface="Trebuchet MS" pitchFamily="34" charset="-120"/>
               </a:rPr>
-              <a:t>communicate</a:t>
+              <a:t>or</a:t>
             </a:r>
             <a:endParaRPr lang="en-US" sz="1300" dirty="0"/>
           </a:p>
@@ -16627,7 +16561,7 @@
       </p:sp>
       <p:sp>
         <p:nvSpPr>
-          <p:cNvPr id="21" name="Text 19"/>
+          <p:cNvPr id="22" name="Text 20"/>
           <p:cNvSpPr/>
           <p:nvPr/>
         </p:nvSpPr>
@@ -16658,48 +16592,9 @@
                 <a:ea typeface="Calibri" pitchFamily="34" charset="-122"/>
                 <a:cs typeface="Calibri" pitchFamily="34" charset="-120"/>
               </a:rPr>
-              <a:t>to share or exchange information</a:t>
+              <a:t>person who does</a:t>
             </a:r>
             <a:endParaRPr lang="en-US" sz="850" dirty="0"/>
-          </a:p>
-        </p:txBody>
-      </p:sp>
-      <p:sp>
-        <p:nvSpPr>
-          <p:cNvPr id="22" name="Text 20"/>
-          <p:cNvSpPr/>
-          <p:nvPr/>
-        </p:nvSpPr>
-        <p:spPr>
-          <a:xfrm>
-            <a:off x="4370832" y="2752344"/>
-            <a:ext cx="1828800" cy="182880"/>
-          </a:xfrm>
-          <a:prstGeom prst="rect">
-            <a:avLst/>
-          </a:prstGeom>
-          <a:noFill/>
-          <a:ln/>
-        </p:spPr>
-        <p:txBody>
-          <a:bodyPr wrap="square" lIns="0" tIns="0" rIns="0" bIns="0" rtlCol="0" anchor="t"/>
-          <a:lstStyle/>
-          <a:p>
-            <a:pPr algn="ctr" indent="0" marL="0">
-              <a:buNone/>
-            </a:pPr>
-            <a:r>
-              <a:rPr lang="en-US" sz="700" i="1" dirty="0">
-                <a:solidFill>
-                  <a:srgbClr val="94A3B8"/>
-                </a:solidFill>
-                <a:latin typeface="Calibri" pitchFamily="34" charset="0"/>
-                <a:ea typeface="Calibri" pitchFamily="34" charset="-122"/>
-                <a:cs typeface="Calibri" pitchFamily="34" charset="-120"/>
-              </a:rPr>
-              <a:t>'e' dropped before vowel suffix</a:t>
-            </a:r>
-            <a:endParaRPr lang="en-US" sz="700" dirty="0"/>
           </a:p>
         </p:txBody>
       </p:sp>
@@ -16770,7 +16665,7 @@
                 <a:ea typeface="Trebuchet MS" pitchFamily="34" charset="-122"/>
                 <a:cs typeface="Trebuchet MS" pitchFamily="34" charset="-120"/>
               </a:rPr>
-              <a:t>ion</a:t>
+              <a:t>s</a:t>
             </a:r>
             <a:endParaRPr lang="en-US" sz="1300" dirty="0"/>
           </a:p>
@@ -16809,7 +16704,7 @@
                 <a:ea typeface="Calibri" pitchFamily="34" charset="-122"/>
                 <a:cs typeface="Calibri" pitchFamily="34" charset="-120"/>
               </a:rPr>
-              <a:t>act or process of</a:t>
+              <a:t>more than one</a:t>
             </a:r>
             <a:endParaRPr lang="en-US" sz="850" dirty="0"/>
           </a:p>
@@ -16916,8 +16811,8 @@
         </p:nvSpPr>
         <p:spPr>
           <a:xfrm>
-            <a:off x="1980329" y="3364992"/>
-            <a:ext cx="1005840" cy="475488"/>
+            <a:off x="1978152" y="3364992"/>
+            <a:ext cx="1225296" cy="475488"/>
           </a:xfrm>
           <a:prstGeom prst="rect">
             <a:avLst>
@@ -16943,8 +16838,8 @@
         </p:nvSpPr>
         <p:spPr>
           <a:xfrm>
-            <a:off x="1980329" y="3364992"/>
-            <a:ext cx="1005840" cy="475488"/>
+            <a:off x="1978152" y="3364992"/>
+            <a:ext cx="1225296" cy="475488"/>
           </a:xfrm>
           <a:prstGeom prst="rect">
             <a:avLst/>
@@ -16968,7 +16863,7 @@
                 <a:ea typeface="Trebuchet MS" pitchFamily="34" charset="-122"/>
                 <a:cs typeface="Trebuchet MS" pitchFamily="34" charset="-120"/>
               </a:rPr>
-              <a:t>mis</a:t>
+              <a:t>com</a:t>
             </a:r>
             <a:endParaRPr lang="en-US" sz="1400" dirty="0"/>
           </a:p>
@@ -16982,8 +16877,8 @@
         </p:nvSpPr>
         <p:spPr>
           <a:xfrm>
-            <a:off x="2986169" y="3364992"/>
-            <a:ext cx="78377" cy="475488"/>
+            <a:off x="3203448" y="3364992"/>
+            <a:ext cx="76200" cy="475488"/>
           </a:xfrm>
           <a:prstGeom prst="rect">
             <a:avLst/>
@@ -17021,8 +16916,8 @@
         </p:nvSpPr>
         <p:spPr>
           <a:xfrm>
-            <a:off x="3064546" y="3364992"/>
-            <a:ext cx="1005840" cy="475488"/>
+            <a:off x="3279648" y="3364992"/>
+            <a:ext cx="1225296" cy="475488"/>
           </a:xfrm>
           <a:prstGeom prst="rect">
             <a:avLst>
@@ -17048,8 +16943,8 @@
         </p:nvSpPr>
         <p:spPr>
           <a:xfrm>
-            <a:off x="3064546" y="3364992"/>
-            <a:ext cx="1005840" cy="475488"/>
+            <a:off x="3279648" y="3364992"/>
+            <a:ext cx="1225296" cy="475488"/>
           </a:xfrm>
           <a:prstGeom prst="rect">
             <a:avLst/>
@@ -17073,7 +16968,7 @@
                 <a:ea typeface="Trebuchet MS" pitchFamily="34" charset="-122"/>
                 <a:cs typeface="Trebuchet MS" pitchFamily="34" charset="-120"/>
               </a:rPr>
-              <a:t>com</a:t>
+              <a:t>mu</a:t>
             </a:r>
             <a:endParaRPr lang="en-US" sz="1400" dirty="0"/>
           </a:p>
@@ -17087,8 +16982,8 @@
         </p:nvSpPr>
         <p:spPr>
           <a:xfrm>
-            <a:off x="4070386" y="3364992"/>
-            <a:ext cx="78377" cy="475488"/>
+            <a:off x="4504944" y="3364992"/>
+            <a:ext cx="76200" cy="475488"/>
           </a:xfrm>
           <a:prstGeom prst="rect">
             <a:avLst/>
@@ -17126,8 +17021,8 @@
         </p:nvSpPr>
         <p:spPr>
           <a:xfrm>
-            <a:off x="4148763" y="3364992"/>
-            <a:ext cx="1005840" cy="475488"/>
+            <a:off x="4581144" y="3364992"/>
+            <a:ext cx="1225296" cy="475488"/>
           </a:xfrm>
           <a:prstGeom prst="rect">
             <a:avLst>
@@ -17153,8 +17048,8 @@
         </p:nvSpPr>
         <p:spPr>
           <a:xfrm>
-            <a:off x="4148763" y="3364992"/>
-            <a:ext cx="1005840" cy="475488"/>
+            <a:off x="4581144" y="3364992"/>
+            <a:ext cx="1225296" cy="475488"/>
           </a:xfrm>
           <a:prstGeom prst="rect">
             <a:avLst/>
@@ -17178,7 +17073,7 @@
                 <a:ea typeface="Trebuchet MS" pitchFamily="34" charset="-122"/>
                 <a:cs typeface="Trebuchet MS" pitchFamily="34" charset="-120"/>
               </a:rPr>
-              <a:t>mu</a:t>
+              <a:t>ni</a:t>
             </a:r>
             <a:endParaRPr lang="en-US" sz="1400" dirty="0"/>
           </a:p>
@@ -17192,8 +17087,8 @@
         </p:nvSpPr>
         <p:spPr>
           <a:xfrm>
-            <a:off x="5154603" y="3364992"/>
-            <a:ext cx="78377" cy="475488"/>
+            <a:off x="5806440" y="3364992"/>
+            <a:ext cx="76200" cy="475488"/>
           </a:xfrm>
           <a:prstGeom prst="rect">
             <a:avLst/>
@@ -17231,8 +17126,8 @@
         </p:nvSpPr>
         <p:spPr>
           <a:xfrm>
-            <a:off x="5232981" y="3364992"/>
-            <a:ext cx="1005840" cy="475488"/>
+            <a:off x="5882640" y="3364992"/>
+            <a:ext cx="1225296" cy="475488"/>
           </a:xfrm>
           <a:prstGeom prst="rect">
             <a:avLst>
@@ -17258,8 +17153,8 @@
         </p:nvSpPr>
         <p:spPr>
           <a:xfrm>
-            <a:off x="5232981" y="3364992"/>
-            <a:ext cx="1005840" cy="475488"/>
+            <a:off x="5882640" y="3364992"/>
+            <a:ext cx="1225296" cy="475488"/>
           </a:xfrm>
           <a:prstGeom prst="rect">
             <a:avLst/>
@@ -17283,7 +17178,7 @@
                 <a:ea typeface="Trebuchet MS" pitchFamily="34" charset="-122"/>
                 <a:cs typeface="Trebuchet MS" pitchFamily="34" charset="-120"/>
               </a:rPr>
-              <a:t>ni</a:t>
+              <a:t>ca</a:t>
             </a:r>
             <a:endParaRPr lang="en-US" sz="1400" dirty="0"/>
           </a:p>
@@ -17297,8 +17192,8 @@
         </p:nvSpPr>
         <p:spPr>
           <a:xfrm>
-            <a:off x="6238821" y="3364992"/>
-            <a:ext cx="78377" cy="475488"/>
+            <a:off x="7107936" y="3364992"/>
+            <a:ext cx="76200" cy="475488"/>
           </a:xfrm>
           <a:prstGeom prst="rect">
             <a:avLst/>
@@ -17336,8 +17231,8 @@
         </p:nvSpPr>
         <p:spPr>
           <a:xfrm>
-            <a:off x="6317198" y="3364992"/>
-            <a:ext cx="1005840" cy="475488"/>
+            <a:off x="7184136" y="3364992"/>
+            <a:ext cx="1225296" cy="475488"/>
           </a:xfrm>
           <a:prstGeom prst="rect">
             <a:avLst>
@@ -17363,8 +17258,8 @@
         </p:nvSpPr>
         <p:spPr>
           <a:xfrm>
-            <a:off x="6317198" y="3364992"/>
-            <a:ext cx="1005840" cy="475488"/>
+            <a:off x="7184136" y="3364992"/>
+            <a:ext cx="1225296" cy="475488"/>
           </a:xfrm>
           <a:prstGeom prst="rect">
             <a:avLst/>
@@ -17388,7 +17283,7 @@
                 <a:ea typeface="Trebuchet MS" pitchFamily="34" charset="-122"/>
                 <a:cs typeface="Trebuchet MS" pitchFamily="34" charset="-120"/>
               </a:rPr>
-              <a:t>ca</a:t>
+              <a:t>tors</a:t>
             </a:r>
             <a:endParaRPr lang="en-US" sz="1400" dirty="0"/>
           </a:p>
@@ -17396,212 +17291,278 @@
       </p:sp>
       <p:sp>
         <p:nvSpPr>
-          <p:cNvPr id="43" name="Text 41"/>
-          <p:cNvSpPr/>
-          <p:nvPr/>
-        </p:nvSpPr>
-        <p:spPr>
-          <a:xfrm>
-            <a:off x="7323038" y="3364992"/>
-            <a:ext cx="78377" cy="475488"/>
-          </a:xfrm>
-          <a:prstGeom prst="rect">
-            <a:avLst/>
-          </a:prstGeom>
-          <a:noFill/>
-          <a:ln/>
-        </p:spPr>
-        <p:txBody>
-          <a:bodyPr wrap="square" lIns="0" tIns="0" rIns="0" bIns="0" rtlCol="0" anchor="ctr"/>
-          <a:lstStyle/>
-          <a:p>
-            <a:pPr algn="ctr" indent="0" marL="0">
-              <a:buNone/>
-            </a:pPr>
-            <a:r>
-              <a:rPr lang="en-US" sz="1600" b="1" dirty="0">
-                <a:solidFill>
-                  <a:srgbClr val="0D9488"/>
+          <p:cNvPr id="43" name="Shape 41"/>
+          <p:cNvSpPr/>
+          <p:nvPr/>
+        </p:nvSpPr>
+        <p:spPr>
+          <a:xfrm>
+            <a:off x="365760" y="4096512"/>
+            <a:ext cx="1371600" cy="804672"/>
+          </a:xfrm>
+          <a:prstGeom prst="rect">
+            <a:avLst>
+              <a:gd name="adj" fmla="val 6818"/>
+            </a:avLst>
+          </a:prstGeom>
+          <a:solidFill>
+            <a:srgbClr val="E2E8F0"/>
+          </a:solidFill>
+          <a:ln w="12700">
+            <a:solidFill>
+              <a:srgbClr val="E2E8F0"/>
+            </a:solidFill>
+            <a:prstDash val="solid"/>
+          </a:ln>
+        </p:spPr>
+      </p:sp>
+      <p:sp>
+        <p:nvSpPr>
+          <p:cNvPr id="44" name="Text 42"/>
+          <p:cNvSpPr/>
+          <p:nvPr/>
+        </p:nvSpPr>
+        <p:spPr>
+          <a:xfrm>
+            <a:off x="365760" y="4096512"/>
+            <a:ext cx="1371600" cy="804672"/>
+          </a:xfrm>
+          <a:prstGeom prst="rect">
+            <a:avLst/>
+          </a:prstGeom>
+          <a:noFill/>
+          <a:ln/>
+        </p:spPr>
+        <p:txBody>
+          <a:bodyPr wrap="square" lIns="0" tIns="0" rIns="0" bIns="0" rtlCol="0" anchor="ctr"/>
+          <a:lstStyle/>
+          <a:p>
+            <a:pPr algn="ctr" indent="0" marL="0">
+              <a:buNone/>
+            </a:pPr>
+            <a:r>
+              <a:rPr lang="en-US" sz="1100" b="1" dirty="0">
+                <a:solidFill>
+                  <a:srgbClr val="475569"/>
                 </a:solidFill>
                 <a:latin typeface="Trebuchet MS" pitchFamily="34" charset="0"/>
                 <a:ea typeface="Trebuchet MS" pitchFamily="34" charset="-122"/>
                 <a:cs typeface="Trebuchet MS" pitchFamily="34" charset="-120"/>
               </a:rPr>
-              <a:t>·</a:t>
-            </a:r>
-            <a:endParaRPr lang="en-US" sz="1600" dirty="0"/>
-          </a:p>
-        </p:txBody>
-      </p:sp>
-      <p:sp>
-        <p:nvSpPr>
-          <p:cNvPr id="44" name="Shape 42"/>
-          <p:cNvSpPr/>
-          <p:nvPr/>
-        </p:nvSpPr>
-        <p:spPr>
-          <a:xfrm>
-            <a:off x="7401415" y="3364992"/>
-            <a:ext cx="1005840" cy="475488"/>
+              <a:t>Phonemes</a:t>
+            </a:r>
+            <a:endParaRPr lang="en-US" sz="1100" dirty="0"/>
+          </a:p>
+        </p:txBody>
+      </p:sp>
+      <p:sp>
+        <p:nvSpPr>
+          <p:cNvPr id="45" name="Shape 43"/>
+          <p:cNvSpPr/>
+          <p:nvPr/>
+        </p:nvSpPr>
+        <p:spPr>
+          <a:xfrm>
+            <a:off x="1874520" y="4096512"/>
+            <a:ext cx="6903720" cy="804672"/>
           </a:xfrm>
           <a:prstGeom prst="rect">
             <a:avLst>
-              <a:gd name="adj" fmla="val 9615"/>
+              <a:gd name="adj" fmla="val 6818"/>
             </a:avLst>
           </a:prstGeom>
           <a:solidFill>
+            <a:srgbClr val="FCE7F3"/>
+          </a:solidFill>
+          <a:ln w="12700">
+            <a:solidFill>
+              <a:srgbClr val="DB2777"/>
+            </a:solidFill>
+            <a:prstDash val="solid"/>
+          </a:ln>
+        </p:spPr>
+      </p:sp>
+      <p:sp>
+        <p:nvSpPr>
+          <p:cNvPr id="46" name="Shape 44"/>
+          <p:cNvSpPr/>
+          <p:nvPr/>
+        </p:nvSpPr>
+        <p:spPr>
+          <a:xfrm>
+            <a:off x="1952244" y="4169664"/>
+            <a:ext cx="543652" cy="384048"/>
+          </a:xfrm>
+          <a:prstGeom prst="rect">
+            <a:avLst>
+              <a:gd name="adj" fmla="val 9524"/>
+            </a:avLst>
+          </a:prstGeom>
+          <a:solidFill>
             <a:srgbClr val="FFFFFF"/>
           </a:solidFill>
           <a:ln w="12700">
             <a:solidFill>
-              <a:srgbClr val="0D9488"/>
-            </a:solidFill>
-            <a:prstDash val="solid"/>
-          </a:ln>
-        </p:spPr>
-      </p:sp>
-      <p:sp>
-        <p:nvSpPr>
-          <p:cNvPr id="45" name="Text 43"/>
-          <p:cNvSpPr/>
-          <p:nvPr/>
-        </p:nvSpPr>
-        <p:spPr>
-          <a:xfrm>
-            <a:off x="7401415" y="3364992"/>
-            <a:ext cx="1005840" cy="475488"/>
-          </a:xfrm>
-          <a:prstGeom prst="rect">
-            <a:avLst/>
-          </a:prstGeom>
-          <a:noFill/>
-          <a:ln/>
-        </p:spPr>
-        <p:txBody>
-          <a:bodyPr wrap="square" lIns="0" tIns="0" rIns="0" bIns="0" rtlCol="0" anchor="ctr"/>
-          <a:lstStyle/>
-          <a:p>
-            <a:pPr algn="ctr" indent="0" marL="0">
-              <a:buNone/>
-            </a:pPr>
-            <a:r>
-              <a:rPr lang="en-US" sz="1400" b="1" dirty="0">
-                <a:solidFill>
-                  <a:srgbClr val="0D9488"/>
+              <a:srgbClr val="DB2777"/>
+            </a:solidFill>
+            <a:prstDash val="solid"/>
+          </a:ln>
+        </p:spPr>
+      </p:sp>
+      <p:sp>
+        <p:nvSpPr>
+          <p:cNvPr id="47" name="Text 45"/>
+          <p:cNvSpPr/>
+          <p:nvPr/>
+        </p:nvSpPr>
+        <p:spPr>
+          <a:xfrm>
+            <a:off x="1952244" y="4169664"/>
+            <a:ext cx="543652" cy="384048"/>
+          </a:xfrm>
+          <a:prstGeom prst="rect">
+            <a:avLst/>
+          </a:prstGeom>
+          <a:noFill/>
+          <a:ln/>
+        </p:spPr>
+        <p:txBody>
+          <a:bodyPr wrap="square" lIns="0" tIns="0" rIns="0" bIns="0" rtlCol="0" anchor="ctr"/>
+          <a:lstStyle/>
+          <a:p>
+            <a:pPr algn="ctr" indent="0" marL="0">
+              <a:buNone/>
+            </a:pPr>
+            <a:r>
+              <a:rPr lang="en-US" sz="900" b="1" dirty="0">
+                <a:solidFill>
+                  <a:srgbClr val="9D174D"/>
                 </a:solidFill>
                 <a:latin typeface="Trebuchet MS" pitchFamily="34" charset="0"/>
                 <a:ea typeface="Trebuchet MS" pitchFamily="34" charset="-122"/>
                 <a:cs typeface="Trebuchet MS" pitchFamily="34" charset="-120"/>
               </a:rPr>
-              <a:t>tion</a:t>
-            </a:r>
-            <a:endParaRPr lang="en-US" sz="1400" dirty="0"/>
-          </a:p>
-        </p:txBody>
-      </p:sp>
-      <p:sp>
-        <p:nvSpPr>
-          <p:cNvPr id="46" name="Shape 44"/>
-          <p:cNvSpPr/>
-          <p:nvPr/>
-        </p:nvSpPr>
-        <p:spPr>
-          <a:xfrm>
-            <a:off x="365760" y="4096512"/>
-            <a:ext cx="1371600" cy="804672"/>
+              <a:t>c</a:t>
+            </a:r>
+            <a:endParaRPr lang="en-US" sz="900" dirty="0"/>
+          </a:p>
+        </p:txBody>
+      </p:sp>
+      <p:sp>
+        <p:nvSpPr>
+          <p:cNvPr id="48" name="Text 46"/>
+          <p:cNvSpPr/>
+          <p:nvPr/>
+        </p:nvSpPr>
+        <p:spPr>
+          <a:xfrm>
+            <a:off x="1952244" y="4572000"/>
+            <a:ext cx="543652" cy="219456"/>
+          </a:xfrm>
+          <a:prstGeom prst="rect">
+            <a:avLst/>
+          </a:prstGeom>
+          <a:noFill/>
+          <a:ln/>
+        </p:spPr>
+        <p:txBody>
+          <a:bodyPr wrap="square" lIns="0" tIns="0" rIns="0" bIns="0" rtlCol="0" anchor="t"/>
+          <a:lstStyle/>
+          <a:p>
+            <a:pPr algn="ctr" indent="0" marL="0">
+              <a:buNone/>
+            </a:pPr>
+            <a:r>
+              <a:rPr lang="en-US" sz="750" i="1" dirty="0">
+                <a:solidFill>
+                  <a:srgbClr val="94A3B8"/>
+                </a:solidFill>
+                <a:latin typeface="Calibri" pitchFamily="34" charset="0"/>
+                <a:ea typeface="Calibri" pitchFamily="34" charset="-122"/>
+                <a:cs typeface="Calibri" pitchFamily="34" charset="-120"/>
+              </a:rPr>
+              <a:t>/k/</a:t>
+            </a:r>
+            <a:endParaRPr lang="en-US" sz="750" dirty="0"/>
+          </a:p>
+        </p:txBody>
+      </p:sp>
+      <p:sp>
+        <p:nvSpPr>
+          <p:cNvPr id="49" name="Shape 47"/>
+          <p:cNvSpPr/>
+          <p:nvPr/>
+        </p:nvSpPr>
+        <p:spPr>
+          <a:xfrm>
+            <a:off x="2546188" y="4169664"/>
+            <a:ext cx="543652" cy="384048"/>
           </a:xfrm>
           <a:prstGeom prst="rect">
             <a:avLst>
-              <a:gd name="adj" fmla="val 6818"/>
+              <a:gd name="adj" fmla="val 9524"/>
             </a:avLst>
           </a:prstGeom>
           <a:solidFill>
-            <a:srgbClr val="E2E8F0"/>
-          </a:solidFill>
-          <a:ln w="12700">
-            <a:solidFill>
-              <a:srgbClr val="E2E8F0"/>
-            </a:solidFill>
-            <a:prstDash val="solid"/>
-          </a:ln>
-        </p:spPr>
-      </p:sp>
-      <p:sp>
-        <p:nvSpPr>
-          <p:cNvPr id="47" name="Text 45"/>
-          <p:cNvSpPr/>
-          <p:nvPr/>
-        </p:nvSpPr>
-        <p:spPr>
-          <a:xfrm>
-            <a:off x="365760" y="4096512"/>
-            <a:ext cx="1371600" cy="804672"/>
-          </a:xfrm>
-          <a:prstGeom prst="rect">
-            <a:avLst/>
-          </a:prstGeom>
-          <a:noFill/>
-          <a:ln/>
-        </p:spPr>
-        <p:txBody>
-          <a:bodyPr wrap="square" lIns="0" tIns="0" rIns="0" bIns="0" rtlCol="0" anchor="ctr"/>
-          <a:lstStyle/>
-          <a:p>
-            <a:pPr algn="ctr" indent="0" marL="0">
-              <a:buNone/>
-            </a:pPr>
-            <a:r>
-              <a:rPr lang="en-US" sz="1100" b="1" dirty="0">
-                <a:solidFill>
-                  <a:srgbClr val="475569"/>
+            <a:srgbClr val="FFFFFF"/>
+          </a:solidFill>
+          <a:ln w="12700">
+            <a:solidFill>
+              <a:srgbClr val="DB2777"/>
+            </a:solidFill>
+            <a:prstDash val="solid"/>
+          </a:ln>
+        </p:spPr>
+      </p:sp>
+      <p:sp>
+        <p:nvSpPr>
+          <p:cNvPr id="50" name="Text 48"/>
+          <p:cNvSpPr/>
+          <p:nvPr/>
+        </p:nvSpPr>
+        <p:spPr>
+          <a:xfrm>
+            <a:off x="2546188" y="4169664"/>
+            <a:ext cx="543652" cy="384048"/>
+          </a:xfrm>
+          <a:prstGeom prst="rect">
+            <a:avLst/>
+          </a:prstGeom>
+          <a:noFill/>
+          <a:ln/>
+        </p:spPr>
+        <p:txBody>
+          <a:bodyPr wrap="square" lIns="0" tIns="0" rIns="0" bIns="0" rtlCol="0" anchor="ctr"/>
+          <a:lstStyle/>
+          <a:p>
+            <a:pPr algn="ctr" indent="0" marL="0">
+              <a:buNone/>
+            </a:pPr>
+            <a:r>
+              <a:rPr lang="en-US" sz="900" b="1" dirty="0">
+                <a:solidFill>
+                  <a:srgbClr val="9D174D"/>
                 </a:solidFill>
                 <a:latin typeface="Trebuchet MS" pitchFamily="34" charset="0"/>
                 <a:ea typeface="Trebuchet MS" pitchFamily="34" charset="-122"/>
                 <a:cs typeface="Trebuchet MS" pitchFamily="34" charset="-120"/>
               </a:rPr>
-              <a:t>Phonemes</a:t>
-            </a:r>
-            <a:endParaRPr lang="en-US" sz="1100" dirty="0"/>
-          </a:p>
-        </p:txBody>
-      </p:sp>
-      <p:sp>
-        <p:nvSpPr>
-          <p:cNvPr id="48" name="Shape 46"/>
-          <p:cNvSpPr/>
-          <p:nvPr/>
-        </p:nvSpPr>
-        <p:spPr>
-          <a:xfrm>
-            <a:off x="1874520" y="4096512"/>
-            <a:ext cx="6903720" cy="804672"/>
-          </a:xfrm>
-          <a:prstGeom prst="rect">
-            <a:avLst>
-              <a:gd name="adj" fmla="val 6818"/>
-            </a:avLst>
-          </a:prstGeom>
-          <a:solidFill>
-            <a:srgbClr val="FCE7F3"/>
-          </a:solidFill>
-          <a:ln w="12700">
-            <a:solidFill>
-              <a:srgbClr val="DB2777"/>
-            </a:solidFill>
-            <a:prstDash val="solid"/>
-          </a:ln>
-        </p:spPr>
-      </p:sp>
-      <p:sp>
-        <p:nvSpPr>
-          <p:cNvPr id="49" name="Shape 47"/>
-          <p:cNvSpPr/>
-          <p:nvPr/>
-        </p:nvSpPr>
-        <p:spPr>
-          <a:xfrm>
-            <a:off x="1953158" y="4169664"/>
-            <a:ext cx="415399" cy="384048"/>
+              <a:t>o</a:t>
+            </a:r>
+            <a:endParaRPr lang="en-US" sz="900" dirty="0"/>
+          </a:p>
+        </p:txBody>
+      </p:sp>
+      <p:sp>
+        <p:nvSpPr>
+          <p:cNvPr id="51" name="Shape 49"/>
+          <p:cNvSpPr/>
+          <p:nvPr/>
+        </p:nvSpPr>
+        <p:spPr>
+          <a:xfrm>
+            <a:off x="3140133" y="4169664"/>
+            <a:ext cx="543652" cy="384048"/>
           </a:xfrm>
           <a:prstGeom prst="rect">
             <a:avLst>
@@ -17621,14 +17582,14 @@
       </p:sp>
       <p:sp>
         <p:nvSpPr>
-          <p:cNvPr id="50" name="Text 48"/>
-          <p:cNvSpPr/>
-          <p:nvPr/>
-        </p:nvSpPr>
-        <p:spPr>
-          <a:xfrm>
-            <a:off x="1953158" y="4169664"/>
-            <a:ext cx="415399" cy="384048"/>
+          <p:cNvPr id="52" name="Text 50"/>
+          <p:cNvSpPr/>
+          <p:nvPr/>
+        </p:nvSpPr>
+        <p:spPr>
+          <a:xfrm>
+            <a:off x="3140133" y="4169664"/>
+            <a:ext cx="543652" cy="384048"/>
           </a:xfrm>
           <a:prstGeom prst="rect">
             <a:avLst/>
@@ -17660,14 +17621,14 @@
       </p:sp>
       <p:sp>
         <p:nvSpPr>
-          <p:cNvPr id="51" name="Shape 49"/>
-          <p:cNvSpPr/>
-          <p:nvPr/>
-        </p:nvSpPr>
-        <p:spPr>
-          <a:xfrm>
-            <a:off x="2419764" y="4169664"/>
-            <a:ext cx="415399" cy="384048"/>
+          <p:cNvPr id="53" name="Shape 51"/>
+          <p:cNvSpPr/>
+          <p:nvPr/>
+        </p:nvSpPr>
+        <p:spPr>
+          <a:xfrm>
+            <a:off x="3734077" y="4169664"/>
+            <a:ext cx="543652" cy="384048"/>
           </a:xfrm>
           <a:prstGeom prst="rect">
             <a:avLst>
@@ -17687,14 +17648,14 @@
       </p:sp>
       <p:sp>
         <p:nvSpPr>
-          <p:cNvPr id="52" name="Text 50"/>
-          <p:cNvSpPr/>
-          <p:nvPr/>
-        </p:nvSpPr>
-        <p:spPr>
-          <a:xfrm>
-            <a:off x="2419764" y="4169664"/>
-            <a:ext cx="415399" cy="384048"/>
+          <p:cNvPr id="54" name="Text 52"/>
+          <p:cNvSpPr/>
+          <p:nvPr/>
+        </p:nvSpPr>
+        <p:spPr>
+          <a:xfrm>
+            <a:off x="3734077" y="4169664"/>
+            <a:ext cx="543652" cy="384048"/>
           </a:xfrm>
           <a:prstGeom prst="rect">
             <a:avLst/>
@@ -17718,7 +17679,7 @@
                 <a:ea typeface="Trebuchet MS" pitchFamily="34" charset="-122"/>
                 <a:cs typeface="Trebuchet MS" pitchFamily="34" charset="-120"/>
               </a:rPr>
-              <a:t>i</a:t>
+              <a:t>u</a:t>
             </a:r>
             <a:endParaRPr lang="en-US" sz="900" dirty="0"/>
           </a:p>
@@ -17726,14 +17687,14 @@
       </p:sp>
       <p:sp>
         <p:nvSpPr>
-          <p:cNvPr id="53" name="Shape 51"/>
-          <p:cNvSpPr/>
-          <p:nvPr/>
-        </p:nvSpPr>
-        <p:spPr>
-          <a:xfrm>
-            <a:off x="2886369" y="4169664"/>
-            <a:ext cx="415399" cy="384048"/>
+          <p:cNvPr id="55" name="Shape 53"/>
+          <p:cNvSpPr/>
+          <p:nvPr/>
+        </p:nvSpPr>
+        <p:spPr>
+          <a:xfrm>
+            <a:off x="4328021" y="4169664"/>
+            <a:ext cx="543652" cy="384048"/>
           </a:xfrm>
           <a:prstGeom prst="rect">
             <a:avLst>
@@ -17753,14 +17714,14 @@
       </p:sp>
       <p:sp>
         <p:nvSpPr>
-          <p:cNvPr id="54" name="Text 52"/>
-          <p:cNvSpPr/>
-          <p:nvPr/>
-        </p:nvSpPr>
-        <p:spPr>
-          <a:xfrm>
-            <a:off x="2886369" y="4169664"/>
-            <a:ext cx="415399" cy="384048"/>
+          <p:cNvPr id="56" name="Text 54"/>
+          <p:cNvSpPr/>
+          <p:nvPr/>
+        </p:nvSpPr>
+        <p:spPr>
+          <a:xfrm>
+            <a:off x="4328021" y="4169664"/>
+            <a:ext cx="543652" cy="384048"/>
           </a:xfrm>
           <a:prstGeom prst="rect">
             <a:avLst/>
@@ -17784,7 +17745,7 @@
                 <a:ea typeface="Trebuchet MS" pitchFamily="34" charset="-122"/>
                 <a:cs typeface="Trebuchet MS" pitchFamily="34" charset="-120"/>
               </a:rPr>
-              <a:t>s</a:t>
+              <a:t>n</a:t>
             </a:r>
             <a:endParaRPr lang="en-US" sz="900" dirty="0"/>
           </a:p>
@@ -17792,14 +17753,14 @@
       </p:sp>
       <p:sp>
         <p:nvSpPr>
-          <p:cNvPr id="55" name="Shape 53"/>
-          <p:cNvSpPr/>
-          <p:nvPr/>
-        </p:nvSpPr>
-        <p:spPr>
-          <a:xfrm>
-            <a:off x="3352974" y="4169664"/>
-            <a:ext cx="415399" cy="384048"/>
+          <p:cNvPr id="57" name="Shape 55"/>
+          <p:cNvSpPr/>
+          <p:nvPr/>
+        </p:nvSpPr>
+        <p:spPr>
+          <a:xfrm>
+            <a:off x="4921966" y="4169664"/>
+            <a:ext cx="543652" cy="384048"/>
           </a:xfrm>
           <a:prstGeom prst="rect">
             <a:avLst>
@@ -17819,14 +17780,14 @@
       </p:sp>
       <p:sp>
         <p:nvSpPr>
-          <p:cNvPr id="56" name="Text 54"/>
-          <p:cNvSpPr/>
-          <p:nvPr/>
-        </p:nvSpPr>
-        <p:spPr>
-          <a:xfrm>
-            <a:off x="3352974" y="4169664"/>
-            <a:ext cx="415399" cy="384048"/>
+          <p:cNvPr id="58" name="Text 56"/>
+          <p:cNvSpPr/>
+          <p:nvPr/>
+        </p:nvSpPr>
+        <p:spPr>
+          <a:xfrm>
+            <a:off x="4921966" y="4169664"/>
+            <a:ext cx="543652" cy="384048"/>
           </a:xfrm>
           <a:prstGeom prst="rect">
             <a:avLst/>
@@ -17850,6 +17811,72 @@
                 <a:ea typeface="Trebuchet MS" pitchFamily="34" charset="-122"/>
                 <a:cs typeface="Trebuchet MS" pitchFamily="34" charset="-120"/>
               </a:rPr>
+              <a:t>i</a:t>
+            </a:r>
+            <a:endParaRPr lang="en-US" sz="900" dirty="0"/>
+          </a:p>
+        </p:txBody>
+      </p:sp>
+      <p:sp>
+        <p:nvSpPr>
+          <p:cNvPr id="59" name="Shape 57"/>
+          <p:cNvSpPr/>
+          <p:nvPr/>
+        </p:nvSpPr>
+        <p:spPr>
+          <a:xfrm>
+            <a:off x="5515910" y="4169664"/>
+            <a:ext cx="543652" cy="384048"/>
+          </a:xfrm>
+          <a:prstGeom prst="rect">
+            <a:avLst>
+              <a:gd name="adj" fmla="val 9524"/>
+            </a:avLst>
+          </a:prstGeom>
+          <a:solidFill>
+            <a:srgbClr val="FFFFFF"/>
+          </a:solidFill>
+          <a:ln w="12700">
+            <a:solidFill>
+              <a:srgbClr val="DB2777"/>
+            </a:solidFill>
+            <a:prstDash val="solid"/>
+          </a:ln>
+        </p:spPr>
+      </p:sp>
+      <p:sp>
+        <p:nvSpPr>
+          <p:cNvPr id="60" name="Text 58"/>
+          <p:cNvSpPr/>
+          <p:nvPr/>
+        </p:nvSpPr>
+        <p:spPr>
+          <a:xfrm>
+            <a:off x="5515910" y="4169664"/>
+            <a:ext cx="543652" cy="384048"/>
+          </a:xfrm>
+          <a:prstGeom prst="rect">
+            <a:avLst/>
+          </a:prstGeom>
+          <a:noFill/>
+          <a:ln/>
+        </p:spPr>
+        <p:txBody>
+          <a:bodyPr wrap="square" lIns="0" tIns="0" rIns="0" bIns="0" rtlCol="0" anchor="ctr"/>
+          <a:lstStyle/>
+          <a:p>
+            <a:pPr algn="ctr" indent="0" marL="0">
+              <a:buNone/>
+            </a:pPr>
+            <a:r>
+              <a:rPr lang="en-US" sz="900" b="1" dirty="0">
+                <a:solidFill>
+                  <a:srgbClr val="9D174D"/>
+                </a:solidFill>
+                <a:latin typeface="Trebuchet MS" pitchFamily="34" charset="0"/>
+                <a:ea typeface="Trebuchet MS" pitchFamily="34" charset="-122"/>
+                <a:cs typeface="Trebuchet MS" pitchFamily="34" charset="-120"/>
+              </a:rPr>
               <a:t>c</a:t>
             </a:r>
             <a:endParaRPr lang="en-US" sz="900" dirty="0"/>
@@ -17858,14 +17885,14 @@
       </p:sp>
       <p:sp>
         <p:nvSpPr>
-          <p:cNvPr id="57" name="Text 55"/>
-          <p:cNvSpPr/>
-          <p:nvPr/>
-        </p:nvSpPr>
-        <p:spPr>
-          <a:xfrm>
-            <a:off x="3352974" y="4572000"/>
-            <a:ext cx="415399" cy="219456"/>
+          <p:cNvPr id="61" name="Text 59"/>
+          <p:cNvSpPr/>
+          <p:nvPr/>
+        </p:nvSpPr>
+        <p:spPr>
+          <a:xfrm>
+            <a:off x="5515910" y="4572000"/>
+            <a:ext cx="543652" cy="219456"/>
           </a:xfrm>
           <a:prstGeom prst="rect">
             <a:avLst/>
@@ -17897,14 +17924,14 @@
       </p:sp>
       <p:sp>
         <p:nvSpPr>
-          <p:cNvPr id="58" name="Shape 56"/>
-          <p:cNvSpPr/>
-          <p:nvPr/>
-        </p:nvSpPr>
-        <p:spPr>
-          <a:xfrm>
-            <a:off x="3819579" y="4169664"/>
-            <a:ext cx="415399" cy="384048"/>
+          <p:cNvPr id="62" name="Shape 60"/>
+          <p:cNvSpPr/>
+          <p:nvPr/>
+        </p:nvSpPr>
+        <p:spPr>
+          <a:xfrm>
+            <a:off x="6109855" y="4169664"/>
+            <a:ext cx="543652" cy="384048"/>
           </a:xfrm>
           <a:prstGeom prst="rect">
             <a:avLst>
@@ -17924,14 +17951,14 @@
       </p:sp>
       <p:sp>
         <p:nvSpPr>
-          <p:cNvPr id="59" name="Text 57"/>
-          <p:cNvSpPr/>
-          <p:nvPr/>
-        </p:nvSpPr>
-        <p:spPr>
-          <a:xfrm>
-            <a:off x="3819579" y="4169664"/>
-            <a:ext cx="415399" cy="384048"/>
+          <p:cNvPr id="63" name="Text 61"/>
+          <p:cNvSpPr/>
+          <p:nvPr/>
+        </p:nvSpPr>
+        <p:spPr>
+          <a:xfrm>
+            <a:off x="6109855" y="4169664"/>
+            <a:ext cx="543652" cy="384048"/>
           </a:xfrm>
           <a:prstGeom prst="rect">
             <a:avLst/>
@@ -17955,7 +17982,7 @@
                 <a:ea typeface="Trebuchet MS" pitchFamily="34" charset="-122"/>
                 <a:cs typeface="Trebuchet MS" pitchFamily="34" charset="-120"/>
               </a:rPr>
-              <a:t>o</a:t>
+              <a:t>a</a:t>
             </a:r>
             <a:endParaRPr lang="en-US" sz="900" dirty="0"/>
           </a:p>
@@ -17963,14 +17990,14 @@
       </p:sp>
       <p:sp>
         <p:nvSpPr>
-          <p:cNvPr id="60" name="Shape 58"/>
-          <p:cNvSpPr/>
-          <p:nvPr/>
-        </p:nvSpPr>
-        <p:spPr>
-          <a:xfrm>
-            <a:off x="4286185" y="4169664"/>
-            <a:ext cx="415399" cy="384048"/>
+          <p:cNvPr id="64" name="Shape 62"/>
+          <p:cNvSpPr/>
+          <p:nvPr/>
+        </p:nvSpPr>
+        <p:spPr>
+          <a:xfrm>
+            <a:off x="6703799" y="4169664"/>
+            <a:ext cx="543652" cy="384048"/>
           </a:xfrm>
           <a:prstGeom prst="rect">
             <a:avLst>
@@ -17990,14 +18017,14 @@
       </p:sp>
       <p:sp>
         <p:nvSpPr>
-          <p:cNvPr id="61" name="Text 59"/>
-          <p:cNvSpPr/>
-          <p:nvPr/>
-        </p:nvSpPr>
-        <p:spPr>
-          <a:xfrm>
-            <a:off x="4286185" y="4169664"/>
-            <a:ext cx="415399" cy="384048"/>
+          <p:cNvPr id="65" name="Text 63"/>
+          <p:cNvSpPr/>
+          <p:nvPr/>
+        </p:nvSpPr>
+        <p:spPr>
+          <a:xfrm>
+            <a:off x="6703799" y="4169664"/>
+            <a:ext cx="543652" cy="384048"/>
           </a:xfrm>
           <a:prstGeom prst="rect">
             <a:avLst/>
@@ -18021,7 +18048,7 @@
                 <a:ea typeface="Trebuchet MS" pitchFamily="34" charset="-122"/>
                 <a:cs typeface="Trebuchet MS" pitchFamily="34" charset="-120"/>
               </a:rPr>
-              <a:t>mm</a:t>
+              <a:t>t</a:t>
             </a:r>
             <a:endParaRPr lang="en-US" sz="900" dirty="0"/>
           </a:p>
@@ -18029,14 +18056,14 @@
       </p:sp>
       <p:sp>
         <p:nvSpPr>
-          <p:cNvPr id="62" name="Shape 60"/>
-          <p:cNvSpPr/>
-          <p:nvPr/>
-        </p:nvSpPr>
-        <p:spPr>
-          <a:xfrm>
-            <a:off x="4752790" y="4169664"/>
-            <a:ext cx="415399" cy="384048"/>
+          <p:cNvPr id="66" name="Shape 64"/>
+          <p:cNvSpPr/>
+          <p:nvPr/>
+        </p:nvSpPr>
+        <p:spPr>
+          <a:xfrm>
+            <a:off x="7297743" y="4169664"/>
+            <a:ext cx="543652" cy="384048"/>
           </a:xfrm>
           <a:prstGeom prst="rect">
             <a:avLst>
@@ -18056,14 +18083,14 @@
       </p:sp>
       <p:sp>
         <p:nvSpPr>
-          <p:cNvPr id="63" name="Text 61"/>
-          <p:cNvSpPr/>
-          <p:nvPr/>
-        </p:nvSpPr>
-        <p:spPr>
-          <a:xfrm>
-            <a:off x="4752790" y="4169664"/>
-            <a:ext cx="415399" cy="384048"/>
+          <p:cNvPr id="67" name="Text 65"/>
+          <p:cNvSpPr/>
+          <p:nvPr/>
+        </p:nvSpPr>
+        <p:spPr>
+          <a:xfrm>
+            <a:off x="7297743" y="4169664"/>
+            <a:ext cx="543652" cy="384048"/>
           </a:xfrm>
           <a:prstGeom prst="rect">
             <a:avLst/>
@@ -18087,7 +18114,7 @@
                 <a:ea typeface="Trebuchet MS" pitchFamily="34" charset="-122"/>
                 <a:cs typeface="Trebuchet MS" pitchFamily="34" charset="-120"/>
               </a:rPr>
-              <a:t>u</a:t>
+              <a:t>or</a:t>
             </a:r>
             <a:endParaRPr lang="en-US" sz="900" dirty="0"/>
           </a:p>
@@ -18095,14 +18122,14 @@
       </p:sp>
       <p:sp>
         <p:nvSpPr>
-          <p:cNvPr id="64" name="Shape 62"/>
-          <p:cNvSpPr/>
-          <p:nvPr/>
-        </p:nvSpPr>
-        <p:spPr>
-          <a:xfrm>
-            <a:off x="5219395" y="4169664"/>
-            <a:ext cx="415399" cy="384048"/>
+          <p:cNvPr id="68" name="Shape 66"/>
+          <p:cNvSpPr/>
+          <p:nvPr/>
+        </p:nvSpPr>
+        <p:spPr>
+          <a:xfrm>
+            <a:off x="7891688" y="4169664"/>
+            <a:ext cx="543652" cy="384048"/>
           </a:xfrm>
           <a:prstGeom prst="rect">
             <a:avLst>
@@ -18122,14 +18149,14 @@
       </p:sp>
       <p:sp>
         <p:nvSpPr>
-          <p:cNvPr id="65" name="Text 63"/>
-          <p:cNvSpPr/>
-          <p:nvPr/>
-        </p:nvSpPr>
-        <p:spPr>
-          <a:xfrm>
-            <a:off x="5219395" y="4169664"/>
-            <a:ext cx="415399" cy="384048"/>
+          <p:cNvPr id="69" name="Text 67"/>
+          <p:cNvSpPr/>
+          <p:nvPr/>
+        </p:nvSpPr>
+        <p:spPr>
+          <a:xfrm>
+            <a:off x="7891688" y="4169664"/>
+            <a:ext cx="543652" cy="384048"/>
           </a:xfrm>
           <a:prstGeom prst="rect">
             <a:avLst/>
@@ -18153,481 +18180,7 @@
                 <a:ea typeface="Trebuchet MS" pitchFamily="34" charset="-122"/>
                 <a:cs typeface="Trebuchet MS" pitchFamily="34" charset="-120"/>
               </a:rPr>
-              <a:t>n</a:t>
-            </a:r>
-            <a:endParaRPr lang="en-US" sz="900" dirty="0"/>
-          </a:p>
-        </p:txBody>
-      </p:sp>
-      <p:sp>
-        <p:nvSpPr>
-          <p:cNvPr id="66" name="Shape 64"/>
-          <p:cNvSpPr/>
-          <p:nvPr/>
-        </p:nvSpPr>
-        <p:spPr>
-          <a:xfrm>
-            <a:off x="5686000" y="4169664"/>
-            <a:ext cx="415399" cy="384048"/>
-          </a:xfrm>
-          <a:prstGeom prst="rect">
-            <a:avLst>
-              <a:gd name="adj" fmla="val 9524"/>
-            </a:avLst>
-          </a:prstGeom>
-          <a:solidFill>
-            <a:srgbClr val="FFFFFF"/>
-          </a:solidFill>
-          <a:ln w="12700">
-            <a:solidFill>
-              <a:srgbClr val="DB2777"/>
-            </a:solidFill>
-            <a:prstDash val="solid"/>
-          </a:ln>
-        </p:spPr>
-      </p:sp>
-      <p:sp>
-        <p:nvSpPr>
-          <p:cNvPr id="67" name="Text 65"/>
-          <p:cNvSpPr/>
-          <p:nvPr/>
-        </p:nvSpPr>
-        <p:spPr>
-          <a:xfrm>
-            <a:off x="5686000" y="4169664"/>
-            <a:ext cx="415399" cy="384048"/>
-          </a:xfrm>
-          <a:prstGeom prst="rect">
-            <a:avLst/>
-          </a:prstGeom>
-          <a:noFill/>
-          <a:ln/>
-        </p:spPr>
-        <p:txBody>
-          <a:bodyPr wrap="square" lIns="0" tIns="0" rIns="0" bIns="0" rtlCol="0" anchor="ctr"/>
-          <a:lstStyle/>
-          <a:p>
-            <a:pPr algn="ctr" indent="0" marL="0">
-              <a:buNone/>
-            </a:pPr>
-            <a:r>
-              <a:rPr lang="en-US" sz="900" b="1" dirty="0">
-                <a:solidFill>
-                  <a:srgbClr val="9D174D"/>
-                </a:solidFill>
-                <a:latin typeface="Trebuchet MS" pitchFamily="34" charset="0"/>
-                <a:ea typeface="Trebuchet MS" pitchFamily="34" charset="-122"/>
-                <a:cs typeface="Trebuchet MS" pitchFamily="34" charset="-120"/>
-              </a:rPr>
-              <a:t>i</a:t>
-            </a:r>
-            <a:endParaRPr lang="en-US" sz="900" dirty="0"/>
-          </a:p>
-        </p:txBody>
-      </p:sp>
-      <p:sp>
-        <p:nvSpPr>
-          <p:cNvPr id="68" name="Shape 66"/>
-          <p:cNvSpPr/>
-          <p:nvPr/>
-        </p:nvSpPr>
-        <p:spPr>
-          <a:xfrm>
-            <a:off x="6152606" y="4169664"/>
-            <a:ext cx="415399" cy="384048"/>
-          </a:xfrm>
-          <a:prstGeom prst="rect">
-            <a:avLst>
-              <a:gd name="adj" fmla="val 9524"/>
-            </a:avLst>
-          </a:prstGeom>
-          <a:solidFill>
-            <a:srgbClr val="FFFFFF"/>
-          </a:solidFill>
-          <a:ln w="12700">
-            <a:solidFill>
-              <a:srgbClr val="DB2777"/>
-            </a:solidFill>
-            <a:prstDash val="solid"/>
-          </a:ln>
-        </p:spPr>
-      </p:sp>
-      <p:sp>
-        <p:nvSpPr>
-          <p:cNvPr id="69" name="Text 67"/>
-          <p:cNvSpPr/>
-          <p:nvPr/>
-        </p:nvSpPr>
-        <p:spPr>
-          <a:xfrm>
-            <a:off x="6152606" y="4169664"/>
-            <a:ext cx="415399" cy="384048"/>
-          </a:xfrm>
-          <a:prstGeom prst="rect">
-            <a:avLst/>
-          </a:prstGeom>
-          <a:noFill/>
-          <a:ln/>
-        </p:spPr>
-        <p:txBody>
-          <a:bodyPr wrap="square" lIns="0" tIns="0" rIns="0" bIns="0" rtlCol="0" anchor="ctr"/>
-          <a:lstStyle/>
-          <a:p>
-            <a:pPr algn="ctr" indent="0" marL="0">
-              <a:buNone/>
-            </a:pPr>
-            <a:r>
-              <a:rPr lang="en-US" sz="900" b="1" dirty="0">
-                <a:solidFill>
-                  <a:srgbClr val="9D174D"/>
-                </a:solidFill>
-                <a:latin typeface="Trebuchet MS" pitchFamily="34" charset="0"/>
-                <a:ea typeface="Trebuchet MS" pitchFamily="34" charset="-122"/>
-                <a:cs typeface="Trebuchet MS" pitchFamily="34" charset="-120"/>
-              </a:rPr>
-              <a:t>c</a:t>
-            </a:r>
-            <a:endParaRPr lang="en-US" sz="900" dirty="0"/>
-          </a:p>
-        </p:txBody>
-      </p:sp>
-      <p:sp>
-        <p:nvSpPr>
-          <p:cNvPr id="70" name="Text 68"/>
-          <p:cNvSpPr/>
-          <p:nvPr/>
-        </p:nvSpPr>
-        <p:spPr>
-          <a:xfrm>
-            <a:off x="6152606" y="4572000"/>
-            <a:ext cx="415399" cy="219456"/>
-          </a:xfrm>
-          <a:prstGeom prst="rect">
-            <a:avLst/>
-          </a:prstGeom>
-          <a:noFill/>
-          <a:ln/>
-        </p:spPr>
-        <p:txBody>
-          <a:bodyPr wrap="square" lIns="0" tIns="0" rIns="0" bIns="0" rtlCol="0" anchor="t"/>
-          <a:lstStyle/>
-          <a:p>
-            <a:pPr algn="ctr" indent="0" marL="0">
-              <a:buNone/>
-            </a:pPr>
-            <a:r>
-              <a:rPr lang="en-US" sz="750" i="1" dirty="0">
-                <a:solidFill>
-                  <a:srgbClr val="94A3B8"/>
-                </a:solidFill>
-                <a:latin typeface="Calibri" pitchFamily="34" charset="0"/>
-                <a:ea typeface="Calibri" pitchFamily="34" charset="-122"/>
-                <a:cs typeface="Calibri" pitchFamily="34" charset="-120"/>
-              </a:rPr>
-              <a:t>/k/</a:t>
-            </a:r>
-            <a:endParaRPr lang="en-US" sz="750" dirty="0"/>
-          </a:p>
-        </p:txBody>
-      </p:sp>
-      <p:sp>
-        <p:nvSpPr>
-          <p:cNvPr id="71" name="Shape 69"/>
-          <p:cNvSpPr/>
-          <p:nvPr/>
-        </p:nvSpPr>
-        <p:spPr>
-          <a:xfrm>
-            <a:off x="6619211" y="4169664"/>
-            <a:ext cx="415399" cy="384048"/>
-          </a:xfrm>
-          <a:prstGeom prst="rect">
-            <a:avLst>
-              <a:gd name="adj" fmla="val 9524"/>
-            </a:avLst>
-          </a:prstGeom>
-          <a:solidFill>
-            <a:srgbClr val="FFFFFF"/>
-          </a:solidFill>
-          <a:ln w="12700">
-            <a:solidFill>
-              <a:srgbClr val="DB2777"/>
-            </a:solidFill>
-            <a:prstDash val="solid"/>
-          </a:ln>
-        </p:spPr>
-      </p:sp>
-      <p:sp>
-        <p:nvSpPr>
-          <p:cNvPr id="72" name="Text 70"/>
-          <p:cNvSpPr/>
-          <p:nvPr/>
-        </p:nvSpPr>
-        <p:spPr>
-          <a:xfrm>
-            <a:off x="6619211" y="4169664"/>
-            <a:ext cx="415399" cy="384048"/>
-          </a:xfrm>
-          <a:prstGeom prst="rect">
-            <a:avLst/>
-          </a:prstGeom>
-          <a:noFill/>
-          <a:ln/>
-        </p:spPr>
-        <p:txBody>
-          <a:bodyPr wrap="square" lIns="0" tIns="0" rIns="0" bIns="0" rtlCol="0" anchor="ctr"/>
-          <a:lstStyle/>
-          <a:p>
-            <a:pPr algn="ctr" indent="0" marL="0">
-              <a:buNone/>
-            </a:pPr>
-            <a:r>
-              <a:rPr lang="en-US" sz="900" b="1" dirty="0">
-                <a:solidFill>
-                  <a:srgbClr val="9D174D"/>
-                </a:solidFill>
-                <a:latin typeface="Trebuchet MS" pitchFamily="34" charset="0"/>
-                <a:ea typeface="Trebuchet MS" pitchFamily="34" charset="-122"/>
-                <a:cs typeface="Trebuchet MS" pitchFamily="34" charset="-120"/>
-              </a:rPr>
-              <a:t>a</a:t>
-            </a:r>
-            <a:endParaRPr lang="en-US" sz="900" dirty="0"/>
-          </a:p>
-        </p:txBody>
-      </p:sp>
-      <p:sp>
-        <p:nvSpPr>
-          <p:cNvPr id="73" name="Shape 71"/>
-          <p:cNvSpPr/>
-          <p:nvPr/>
-        </p:nvSpPr>
-        <p:spPr>
-          <a:xfrm>
-            <a:off x="7085816" y="4169664"/>
-            <a:ext cx="415399" cy="384048"/>
-          </a:xfrm>
-          <a:prstGeom prst="rect">
-            <a:avLst>
-              <a:gd name="adj" fmla="val 9524"/>
-            </a:avLst>
-          </a:prstGeom>
-          <a:solidFill>
-            <a:srgbClr val="FFFFFF"/>
-          </a:solidFill>
-          <a:ln w="12700">
-            <a:solidFill>
-              <a:srgbClr val="DB2777"/>
-            </a:solidFill>
-            <a:prstDash val="solid"/>
-          </a:ln>
-        </p:spPr>
-      </p:sp>
-      <p:sp>
-        <p:nvSpPr>
-          <p:cNvPr id="74" name="Text 72"/>
-          <p:cNvSpPr/>
-          <p:nvPr/>
-        </p:nvSpPr>
-        <p:spPr>
-          <a:xfrm>
-            <a:off x="7085816" y="4169664"/>
-            <a:ext cx="415399" cy="384048"/>
-          </a:xfrm>
-          <a:prstGeom prst="rect">
-            <a:avLst/>
-          </a:prstGeom>
-          <a:noFill/>
-          <a:ln/>
-        </p:spPr>
-        <p:txBody>
-          <a:bodyPr wrap="square" lIns="0" tIns="0" rIns="0" bIns="0" rtlCol="0" anchor="ctr"/>
-          <a:lstStyle/>
-          <a:p>
-            <a:pPr algn="ctr" indent="0" marL="0">
-              <a:buNone/>
-            </a:pPr>
-            <a:r>
-              <a:rPr lang="en-US" sz="900" b="1" dirty="0">
-                <a:solidFill>
-                  <a:srgbClr val="9D174D"/>
-                </a:solidFill>
-                <a:latin typeface="Trebuchet MS" pitchFamily="34" charset="0"/>
-                <a:ea typeface="Trebuchet MS" pitchFamily="34" charset="-122"/>
-                <a:cs typeface="Trebuchet MS" pitchFamily="34" charset="-120"/>
-              </a:rPr>
-              <a:t>t</a:t>
-            </a:r>
-            <a:endParaRPr lang="en-US" sz="900" dirty="0"/>
-          </a:p>
-        </p:txBody>
-      </p:sp>
-      <p:sp>
-        <p:nvSpPr>
-          <p:cNvPr id="75" name="Text 73"/>
-          <p:cNvSpPr/>
-          <p:nvPr/>
-        </p:nvSpPr>
-        <p:spPr>
-          <a:xfrm>
-            <a:off x="7085816" y="4572000"/>
-            <a:ext cx="415399" cy="219456"/>
-          </a:xfrm>
-          <a:prstGeom prst="rect">
-            <a:avLst/>
-          </a:prstGeom>
-          <a:noFill/>
-          <a:ln/>
-        </p:spPr>
-        <p:txBody>
-          <a:bodyPr wrap="square" lIns="0" tIns="0" rIns="0" bIns="0" rtlCol="0" anchor="t"/>
-          <a:lstStyle/>
-          <a:p>
-            <a:pPr algn="ctr" indent="0" marL="0">
-              <a:buNone/>
-            </a:pPr>
-            <a:r>
-              <a:rPr lang="en-US" sz="750" i="1" dirty="0">
-                <a:solidFill>
-                  <a:srgbClr val="94A3B8"/>
-                </a:solidFill>
-                <a:latin typeface="Calibri" pitchFamily="34" charset="0"/>
-                <a:ea typeface="Calibri" pitchFamily="34" charset="-122"/>
-                <a:cs typeface="Calibri" pitchFamily="34" charset="-120"/>
-              </a:rPr>
-              <a:t>/sh/</a:t>
-            </a:r>
-            <a:endParaRPr lang="en-US" sz="750" dirty="0"/>
-          </a:p>
-        </p:txBody>
-      </p:sp>
-      <p:sp>
-        <p:nvSpPr>
-          <p:cNvPr id="76" name="Shape 74"/>
-          <p:cNvSpPr/>
-          <p:nvPr/>
-        </p:nvSpPr>
-        <p:spPr>
-          <a:xfrm>
-            <a:off x="7552421" y="4169664"/>
-            <a:ext cx="415399" cy="384048"/>
-          </a:xfrm>
-          <a:prstGeom prst="rect">
-            <a:avLst>
-              <a:gd name="adj" fmla="val 9524"/>
-            </a:avLst>
-          </a:prstGeom>
-          <a:solidFill>
-            <a:srgbClr val="FFFFFF"/>
-          </a:solidFill>
-          <a:ln w="12700">
-            <a:solidFill>
-              <a:srgbClr val="DB2777"/>
-            </a:solidFill>
-            <a:prstDash val="solid"/>
-          </a:ln>
-        </p:spPr>
-      </p:sp>
-      <p:sp>
-        <p:nvSpPr>
-          <p:cNvPr id="77" name="Text 75"/>
-          <p:cNvSpPr/>
-          <p:nvPr/>
-        </p:nvSpPr>
-        <p:spPr>
-          <a:xfrm>
-            <a:off x="7552421" y="4169664"/>
-            <a:ext cx="415399" cy="384048"/>
-          </a:xfrm>
-          <a:prstGeom prst="rect">
-            <a:avLst/>
-          </a:prstGeom>
-          <a:noFill/>
-          <a:ln/>
-        </p:spPr>
-        <p:txBody>
-          <a:bodyPr wrap="square" lIns="0" tIns="0" rIns="0" bIns="0" rtlCol="0" anchor="ctr"/>
-          <a:lstStyle/>
-          <a:p>
-            <a:pPr algn="ctr" indent="0" marL="0">
-              <a:buNone/>
-            </a:pPr>
-            <a:r>
-              <a:rPr lang="en-US" sz="900" b="1" dirty="0">
-                <a:solidFill>
-                  <a:srgbClr val="9D174D"/>
-                </a:solidFill>
-                <a:latin typeface="Trebuchet MS" pitchFamily="34" charset="0"/>
-                <a:ea typeface="Trebuchet MS" pitchFamily="34" charset="-122"/>
-                <a:cs typeface="Trebuchet MS" pitchFamily="34" charset="-120"/>
-              </a:rPr>
-              <a:t>io</a:t>
-            </a:r>
-            <a:endParaRPr lang="en-US" sz="900" dirty="0"/>
-          </a:p>
-        </p:txBody>
-      </p:sp>
-      <p:sp>
-        <p:nvSpPr>
-          <p:cNvPr id="78" name="Shape 76"/>
-          <p:cNvSpPr/>
-          <p:nvPr/>
-        </p:nvSpPr>
-        <p:spPr>
-          <a:xfrm>
-            <a:off x="8019027" y="4169664"/>
-            <a:ext cx="415399" cy="384048"/>
-          </a:xfrm>
-          <a:prstGeom prst="rect">
-            <a:avLst>
-              <a:gd name="adj" fmla="val 9524"/>
-            </a:avLst>
-          </a:prstGeom>
-          <a:solidFill>
-            <a:srgbClr val="FFFFFF"/>
-          </a:solidFill>
-          <a:ln w="12700">
-            <a:solidFill>
-              <a:srgbClr val="DB2777"/>
-            </a:solidFill>
-            <a:prstDash val="solid"/>
-          </a:ln>
-        </p:spPr>
-      </p:sp>
-      <p:sp>
-        <p:nvSpPr>
-          <p:cNvPr id="79" name="Text 77"/>
-          <p:cNvSpPr/>
-          <p:nvPr/>
-        </p:nvSpPr>
-        <p:spPr>
-          <a:xfrm>
-            <a:off x="8019027" y="4169664"/>
-            <a:ext cx="415399" cy="384048"/>
-          </a:xfrm>
-          <a:prstGeom prst="rect">
-            <a:avLst/>
-          </a:prstGeom>
-          <a:noFill/>
-          <a:ln/>
-        </p:spPr>
-        <p:txBody>
-          <a:bodyPr wrap="square" lIns="0" tIns="0" rIns="0" bIns="0" rtlCol="0" anchor="ctr"/>
-          <a:lstStyle/>
-          <a:p>
-            <a:pPr algn="ctr" indent="0" marL="0">
-              <a:buNone/>
-            </a:pPr>
-            <a:r>
-              <a:rPr lang="en-US" sz="900" b="1" dirty="0">
-                <a:solidFill>
-                  <a:srgbClr val="9D174D"/>
-                </a:solidFill>
-                <a:latin typeface="Trebuchet MS" pitchFamily="34" charset="0"/>
-                <a:ea typeface="Trebuchet MS" pitchFamily="34" charset="-122"/>
-                <a:cs typeface="Trebuchet MS" pitchFamily="34" charset="-120"/>
-              </a:rPr>
-              <a:t>n</a:t>
+              <a:t>s</a:t>
             </a:r>
             <a:endParaRPr lang="en-US" sz="900" dirty="0"/>
           </a:p>
@@ -19201,7 +18754,7 @@
                 <a:ea typeface="Calibri" pitchFamily="34" charset="-122"/>
                 <a:cs typeface="Calibri" pitchFamily="34" charset="-120"/>
               </a:rPr>
-              <a:t>Word Labs  •  wordlabs.app  •  Root: 'communicate' = to share or exchange information</a:t>
+              <a:t>Word Labs  •  wordlabs.app  •  Root: 'communicate' = share or exchange information</a:t>
             </a:r>
             <a:endParaRPr lang="en-US" sz="800" dirty="0"/>
           </a:p>
@@ -19841,7 +19394,7 @@
                 <a:ea typeface="Calibri" pitchFamily="34" charset="-122"/>
                 <a:cs typeface="Calibri" pitchFamily="34" charset="-120"/>
               </a:rPr>
-              <a:t>Word Labs  •  wordlabs.app  •  Root: 'communicate' = to share or exchange information</a:t>
+              <a:t>Word Labs  •  wordlabs.app  •  Root: 'communicate' = share or exchange information</a:t>
             </a:r>
             <a:endParaRPr lang="en-US" sz="800" dirty="0"/>
           </a:p>
@@ -19945,20 +19498,6 @@
               <a:buNone/>
             </a:pPr>
             <a:r>
-              <a:rPr lang="en-US" sz="1800" dirty="0">
-                <a:solidFill>
-                  <a:srgbClr val="0F172A"/>
-                </a:solidFill>
-                <a:latin typeface="Calibri" pitchFamily="34" charset="0"/>
-                <a:ea typeface="Calibri" pitchFamily="34" charset="-122"/>
-                <a:cs typeface="Calibri" pitchFamily="34" charset="-120"/>
-              </a:rPr>
-              <a:t>The </a:t>
-            </a:r>
-            <a:pPr algn="l" indent="0" marL="0">
-              <a:buNone/>
-            </a:pPr>
-            <a:r>
               <a:rPr lang="en-US" sz="1800" b="1" dirty="0">
                 <a:solidFill>
                   <a:srgbClr val="0D9488"/>
@@ -19970,7 +19509,7 @@
                 <a:ea typeface="Calibri" pitchFamily="34" charset="-122"/>
                 <a:cs typeface="Calibri" pitchFamily="34" charset="-120"/>
               </a:rPr>
-              <a:t>communicator</a:t>
+              <a:t>Communicative</a:t>
             </a:r>
             <a:pPr algn="l" indent="0" marL="0">
               <a:buNone/>
@@ -19984,7 +19523,7 @@
                 <a:ea typeface="Calibri" pitchFamily="34" charset="-122"/>
                 <a:cs typeface="Calibri" pitchFamily="34" charset="-120"/>
               </a:rPr>
-              <a:t> used </a:t>
+              <a:t> students who </a:t>
             </a:r>
             <a:pPr algn="l" indent="0" marL="0">
               <a:buNone/>
@@ -20001,7 +19540,7 @@
                 <a:ea typeface="Calibri" pitchFamily="34" charset="-122"/>
                 <a:cs typeface="Calibri" pitchFamily="34" charset="-120"/>
               </a:rPr>
-              <a:t>communicative</a:t>
+              <a:t>intercommunicate</a:t>
             </a:r>
             <a:pPr algn="l" indent="0" marL="0">
               <a:buNone/>
@@ -20015,7 +19554,7 @@
                 <a:ea typeface="Calibri" pitchFamily="34" charset="-122"/>
                 <a:cs typeface="Calibri" pitchFamily="34" charset="-120"/>
               </a:rPr>
-              <a:t> skills to fix the </a:t>
+              <a:t> well can avoid </a:t>
             </a:r>
             <a:pPr algn="l" indent="0" marL="0">
               <a:buNone/>
@@ -20046,7 +19585,7 @@
                 <a:ea typeface="Calibri" pitchFamily="34" charset="-122"/>
                 <a:cs typeface="Calibri" pitchFamily="34" charset="-120"/>
               </a:rPr>
-              <a:t> between the two schools.</a:t>
+              <a:t> in group projects.</a:t>
             </a:r>
             <a:endParaRPr lang="en-US" sz="1800" dirty="0"/>
           </a:p>
@@ -20201,7 +19740,7 @@
                 <a:ea typeface="Trebuchet MS" pitchFamily="34" charset="-122"/>
                 <a:cs typeface="Trebuchet MS" pitchFamily="34" charset="-120"/>
               </a:rPr>
-              <a:t>communicator</a:t>
+              <a:t>communicative</a:t>
             </a:r>
             <a:endParaRPr lang="en-US" sz="1400" dirty="0"/>
           </a:p>
@@ -20329,7 +19868,7 @@
                 <a:ea typeface="Trebuchet MS" pitchFamily="34" charset="-122"/>
                 <a:cs typeface="Trebuchet MS" pitchFamily="34" charset="-120"/>
               </a:rPr>
-              <a:t>communicative</a:t>
+              <a:t>intercommunicate</a:t>
             </a:r>
             <a:endParaRPr lang="en-US" sz="1400" dirty="0"/>
           </a:p>
@@ -20788,7 +20327,7 @@
                 <a:ea typeface="Calibri" pitchFamily="34" charset="-122"/>
                 <a:cs typeface="Calibri" pitchFamily="34" charset="-120"/>
               </a:rPr>
-              <a:t>Word Labs  •  wordlabs.app  •  Root: 'communicate' = to share or exchange information</a:t>
+              <a:t>Word Labs  •  wordlabs.app  •  Root: 'communicate' = share or exchange information</a:t>
             </a:r>
             <a:endParaRPr lang="en-US" sz="800" dirty="0"/>
           </a:p>
@@ -20927,7 +20466,7 @@
                 <a:ea typeface="Trebuchet MS" pitchFamily="34" charset="-122"/>
                 <a:cs typeface="Trebuchet MS" pitchFamily="34" charset="-120"/>
               </a:rPr>
-              <a:t>communicator</a:t>
+              <a:t>communicative</a:t>
             </a:r>
             <a:endParaRPr lang="en-US" sz="2800" dirty="0"/>
           </a:p>
@@ -21615,7 +21154,7 @@
                 <a:ea typeface="Calibri" pitchFamily="34" charset="-122"/>
                 <a:cs typeface="Calibri" pitchFamily="34" charset="-120"/>
               </a:rPr>
-              <a:t>Word Labs  •  wordlabs.app  •  Root: 'communicate' = to share or exchange information</a:t>
+              <a:t>Word Labs  •  wordlabs.app  •  Root: 'communicate' = share or exchange information</a:t>
             </a:r>
             <a:endParaRPr lang="en-US" sz="800" dirty="0"/>
           </a:p>
@@ -21754,7 +21293,7 @@
                 <a:ea typeface="Trebuchet MS" pitchFamily="34" charset="-122"/>
                 <a:cs typeface="Trebuchet MS" pitchFamily="34" charset="-120"/>
               </a:rPr>
-              <a:t>communicator</a:t>
+              <a:t>communicative</a:t>
             </a:r>
             <a:endParaRPr lang="en-US" sz="2800" dirty="0"/>
           </a:p>
@@ -21932,7 +21471,7 @@
                 <a:ea typeface="Calibri" pitchFamily="34" charset="-122"/>
                 <a:cs typeface="Calibri" pitchFamily="34" charset="-120"/>
               </a:rPr>
-              <a:t>to share or exchange information</a:t>
+              <a:t>share or exchange information</a:t>
             </a:r>
             <a:endParaRPr lang="en-US" sz="850" dirty="0"/>
           </a:p>
@@ -22044,7 +21583,7 @@
                 <a:ea typeface="Trebuchet MS" pitchFamily="34" charset="-122"/>
                 <a:cs typeface="Trebuchet MS" pitchFamily="34" charset="-120"/>
               </a:rPr>
-              <a:t>or</a:t>
+              <a:t>ive</a:t>
             </a:r>
             <a:endParaRPr lang="en-US" sz="1300" dirty="0"/>
           </a:p>
@@ -22083,7 +21622,7 @@
                 <a:ea typeface="Calibri" pitchFamily="34" charset="-122"/>
                 <a:cs typeface="Calibri" pitchFamily="34" charset="-120"/>
               </a:rPr>
-              <a:t>a person who does something</a:t>
+              <a:t>having the quality of</a:t>
             </a:r>
             <a:endParaRPr lang="en-US" sz="850" dirty="0"/>
           </a:p>
@@ -22639,7 +22178,7 @@
                 <a:ea typeface="Calibri" pitchFamily="34" charset="-122"/>
                 <a:cs typeface="Calibri" pitchFamily="34" charset="-120"/>
               </a:rPr>
-              <a:t>Word Labs  •  wordlabs.app  •  Root: 'communicate' = to share or exchange information</a:t>
+              <a:t>Word Labs  •  wordlabs.app  •  Root: 'communicate' = share or exchange information</a:t>
             </a:r>
             <a:endParaRPr lang="en-US" sz="800" dirty="0"/>
           </a:p>
@@ -22778,7 +22317,7 @@
                 <a:ea typeface="Trebuchet MS" pitchFamily="34" charset="-122"/>
                 <a:cs typeface="Trebuchet MS" pitchFamily="34" charset="-120"/>
               </a:rPr>
-              <a:t>communicator</a:t>
+              <a:t>communicative</a:t>
             </a:r>
             <a:endParaRPr lang="en-US" sz="2800" dirty="0"/>
           </a:p>
@@ -22956,7 +22495,7 @@
                 <a:ea typeface="Calibri" pitchFamily="34" charset="-122"/>
                 <a:cs typeface="Calibri" pitchFamily="34" charset="-120"/>
               </a:rPr>
-              <a:t>to share or exchange information</a:t>
+              <a:t>share or exchange information</a:t>
             </a:r>
             <a:endParaRPr lang="en-US" sz="850" dirty="0"/>
           </a:p>
@@ -23068,7 +22607,7 @@
                 <a:ea typeface="Trebuchet MS" pitchFamily="34" charset="-122"/>
                 <a:cs typeface="Trebuchet MS" pitchFamily="34" charset="-120"/>
               </a:rPr>
-              <a:t>or</a:t>
+              <a:t>ive</a:t>
             </a:r>
             <a:endParaRPr lang="en-US" sz="1300" dirty="0"/>
           </a:p>
@@ -23107,7 +22646,7 @@
                 <a:ea typeface="Calibri" pitchFamily="34" charset="-122"/>
                 <a:cs typeface="Calibri" pitchFamily="34" charset="-120"/>
               </a:rPr>
-              <a:t>a person who does something</a:t>
+              <a:t>having the quality of</a:t>
             </a:r>
             <a:endParaRPr lang="en-US" sz="850" dirty="0"/>
           </a:p>
@@ -23686,7 +23225,7 @@
                 <a:ea typeface="Trebuchet MS" pitchFamily="34" charset="-122"/>
                 <a:cs typeface="Trebuchet MS" pitchFamily="34" charset="-120"/>
               </a:rPr>
-              <a:t>tor</a:t>
+              <a:t>tive</a:t>
             </a:r>
             <a:endParaRPr lang="en-US" sz="1400" dirty="0"/>
           </a:p>
@@ -24110,7 +23649,7 @@
                 <a:ea typeface="Calibri" pitchFamily="34" charset="-122"/>
                 <a:cs typeface="Calibri" pitchFamily="34" charset="-120"/>
               </a:rPr>
-              <a:t>Word Labs  •  wordlabs.app  •  Root: 'communicate' = to share or exchange information</a:t>
+              <a:t>Word Labs  •  wordlabs.app  •  Root: 'communicate' = share or exchange information</a:t>
             </a:r>
             <a:endParaRPr lang="en-US" sz="800" dirty="0"/>
           </a:p>
@@ -24249,7 +23788,7 @@
                 <a:ea typeface="Trebuchet MS" pitchFamily="34" charset="-122"/>
                 <a:cs typeface="Trebuchet MS" pitchFamily="34" charset="-120"/>
               </a:rPr>
-              <a:t>communicator</a:t>
+              <a:t>communicative</a:t>
             </a:r>
             <a:endParaRPr lang="en-US" sz="2800" dirty="0"/>
           </a:p>
@@ -24427,7 +23966,7 @@
                 <a:ea typeface="Calibri" pitchFamily="34" charset="-122"/>
                 <a:cs typeface="Calibri" pitchFamily="34" charset="-120"/>
               </a:rPr>
-              <a:t>to share or exchange information</a:t>
+              <a:t>share or exchange information</a:t>
             </a:r>
             <a:endParaRPr lang="en-US" sz="850" dirty="0"/>
           </a:p>
@@ -24539,7 +24078,7 @@
                 <a:ea typeface="Trebuchet MS" pitchFamily="34" charset="-122"/>
                 <a:cs typeface="Trebuchet MS" pitchFamily="34" charset="-120"/>
               </a:rPr>
-              <a:t>or</a:t>
+              <a:t>ive</a:t>
             </a:r>
             <a:endParaRPr lang="en-US" sz="1300" dirty="0"/>
           </a:p>
@@ -24578,7 +24117,7 @@
                 <a:ea typeface="Calibri" pitchFamily="34" charset="-122"/>
                 <a:cs typeface="Calibri" pitchFamily="34" charset="-120"/>
               </a:rPr>
-              <a:t>a person who does something</a:t>
+              <a:t>having the quality of</a:t>
             </a:r>
             <a:endParaRPr lang="en-US" sz="850" dirty="0"/>
           </a:p>
@@ -25157,7 +24696,7 @@
                 <a:ea typeface="Trebuchet MS" pitchFamily="34" charset="-122"/>
                 <a:cs typeface="Trebuchet MS" pitchFamily="34" charset="-120"/>
               </a:rPr>
-              <a:t>tor</a:t>
+              <a:t>tive</a:t>
             </a:r>
             <a:endParaRPr lang="en-US" sz="1400" dirty="0"/>
           </a:p>
@@ -25487,7 +25026,7 @@
                 <a:ea typeface="Trebuchet MS" pitchFamily="34" charset="-122"/>
                 <a:cs typeface="Trebuchet MS" pitchFamily="34" charset="-120"/>
               </a:rPr>
-              <a:t>mm</a:t>
+              <a:t>m</a:t>
             </a:r>
             <a:endParaRPr lang="en-US" sz="900" dirty="0"/>
           </a:p>
@@ -25988,7 +25527,7 @@
                 <a:ea typeface="Trebuchet MS" pitchFamily="34" charset="-122"/>
                 <a:cs typeface="Trebuchet MS" pitchFamily="34" charset="-120"/>
               </a:rPr>
-              <a:t>or</a:t>
+              <a:t>ive</a:t>
             </a:r>
             <a:endParaRPr lang="en-US" sz="900" dirty="0"/>
           </a:p>
@@ -26280,7 +25819,7 @@
                 <a:ea typeface="Calibri" pitchFamily="34" charset="-122"/>
                 <a:cs typeface="Calibri" pitchFamily="34" charset="-120"/>
               </a:rPr>
-              <a:t>Word Labs  •  wordlabs.app  •  Root: 'communicate' = to share or exchange information</a:t>
+              <a:t>Word Labs  •  wordlabs.app  •  Root: 'communicate' = share or exchange information</a:t>
             </a:r>
             <a:endParaRPr lang="en-US" sz="800" dirty="0"/>
           </a:p>
@@ -26419,7 +25958,7 @@
                 <a:ea typeface="Trebuchet MS" pitchFamily="34" charset="-122"/>
                 <a:cs typeface="Trebuchet MS" pitchFamily="34" charset="-120"/>
               </a:rPr>
-              <a:t>communicative</a:t>
+              <a:t>intercommunicate</a:t>
             </a:r>
             <a:endParaRPr lang="en-US" sz="2800" dirty="0"/>
           </a:p>
@@ -27107,7 +26646,7 @@
                 <a:ea typeface="Calibri" pitchFamily="34" charset="-122"/>
                 <a:cs typeface="Calibri" pitchFamily="34" charset="-120"/>
               </a:rPr>
-              <a:t>Word Labs  •  wordlabs.app  •  Root: 'communicate' = to share or exchange information</a:t>
+              <a:t>Word Labs  •  wordlabs.app  •  Root: 'communicate' = share or exchange information</a:t>
             </a:r>
             <a:endParaRPr lang="en-US" sz="800" dirty="0"/>
           </a:p>
@@ -27246,7 +26785,7 @@
                 <a:ea typeface="Trebuchet MS" pitchFamily="34" charset="-122"/>
                 <a:cs typeface="Trebuchet MS" pitchFamily="34" charset="-120"/>
               </a:rPr>
-              <a:t>communicative</a:t>
+              <a:t>intercommunicate</a:t>
             </a:r>
             <a:endParaRPr lang="en-US" sz="2800" dirty="0"/>
           </a:p>
@@ -27335,11 +26874,11 @@
             </a:avLst>
           </a:prstGeom>
           <a:solidFill>
-            <a:srgbClr val="CCFBF1"/>
+            <a:srgbClr val="DDD6FE"/>
           </a:solidFill>
           <a:ln w="19050">
             <a:solidFill>
-              <a:srgbClr val="0D9488"/>
+              <a:srgbClr val="7C3AED"/>
             </a:solidFill>
             <a:prstDash val="solid"/>
           </a:ln>
@@ -27379,13 +26918,13 @@
             <a:r>
               <a:rPr lang="en-US" sz="1300" b="1" dirty="0">
                 <a:solidFill>
-                  <a:srgbClr val="0F766E"/>
+                  <a:srgbClr val="4C1D95"/>
                 </a:solidFill>
                 <a:latin typeface="Trebuchet MS" pitchFamily="34" charset="0"/>
                 <a:ea typeface="Trebuchet MS" pitchFamily="34" charset="-122"/>
                 <a:cs typeface="Trebuchet MS" pitchFamily="34" charset="-120"/>
               </a:rPr>
-              <a:t>communicate</a:t>
+              <a:t>inter</a:t>
             </a:r>
             <a:endParaRPr lang="en-US" sz="1300" dirty="0"/>
           </a:p>
@@ -27424,7 +26963,7 @@
                 <a:ea typeface="Calibri" pitchFamily="34" charset="-122"/>
                 <a:cs typeface="Calibri" pitchFamily="34" charset="-120"/>
               </a:rPr>
-              <a:t>to share or exchange information</a:t>
+              <a:t>between or among</a:t>
             </a:r>
             <a:endParaRPr lang="en-US" sz="850" dirty="0"/>
           </a:p>
@@ -27432,46 +26971,7 @@
       </p:sp>
       <p:sp>
         <p:nvSpPr>
-          <p:cNvPr id="19" name="Text 17"/>
-          <p:cNvSpPr/>
-          <p:nvPr/>
-        </p:nvSpPr>
-        <p:spPr>
-          <a:xfrm>
-            <a:off x="2938272" y="2752344"/>
-            <a:ext cx="1828800" cy="182880"/>
-          </a:xfrm>
-          <a:prstGeom prst="rect">
-            <a:avLst/>
-          </a:prstGeom>
-          <a:noFill/>
-          <a:ln/>
-        </p:spPr>
-        <p:txBody>
-          <a:bodyPr wrap="square" lIns="0" tIns="0" rIns="0" bIns="0" rtlCol="0" anchor="t"/>
-          <a:lstStyle/>
-          <a:p>
-            <a:pPr algn="ctr" indent="0" marL="0">
-              <a:buNone/>
-            </a:pPr>
-            <a:r>
-              <a:rPr lang="en-US" sz="700" i="1" dirty="0">
-                <a:solidFill>
-                  <a:srgbClr val="94A3B8"/>
-                </a:solidFill>
-                <a:latin typeface="Calibri" pitchFamily="34" charset="0"/>
-                <a:ea typeface="Calibri" pitchFamily="34" charset="-122"/>
-                <a:cs typeface="Calibri" pitchFamily="34" charset="-120"/>
-              </a:rPr>
-              <a:t>'e' dropped before vowel suffix</a:t>
-            </a:r>
-            <a:endParaRPr lang="en-US" sz="700" dirty="0"/>
-          </a:p>
-        </p:txBody>
-      </p:sp>
-      <p:sp>
-        <p:nvSpPr>
-          <p:cNvPr id="20" name="Shape 18"/>
+          <p:cNvPr id="19" name="Shape 17"/>
           <p:cNvSpPr/>
           <p:nvPr/>
         </p:nvSpPr>
@@ -27486,11 +26986,11 @@
             </a:avLst>
           </a:prstGeom>
           <a:solidFill>
-            <a:srgbClr val="FCE7F3"/>
+            <a:srgbClr val="CCFBF1"/>
           </a:solidFill>
           <a:ln w="19050">
             <a:solidFill>
-              <a:srgbClr val="DB2777"/>
+              <a:srgbClr val="0D9488"/>
             </a:solidFill>
             <a:prstDash val="solid"/>
           </a:ln>
@@ -27505,7 +27005,7 @@
       </p:sp>
       <p:sp>
         <p:nvSpPr>
-          <p:cNvPr id="21" name="Text 19"/>
+          <p:cNvPr id="20" name="Text 18"/>
           <p:cNvSpPr/>
           <p:nvPr/>
         </p:nvSpPr>
@@ -27530,13 +27030,13 @@
             <a:r>
               <a:rPr lang="en-US" sz="1300" b="1" dirty="0">
                 <a:solidFill>
-                  <a:srgbClr val="9D174D"/>
+                  <a:srgbClr val="0F766E"/>
                 </a:solidFill>
                 <a:latin typeface="Trebuchet MS" pitchFamily="34" charset="0"/>
                 <a:ea typeface="Trebuchet MS" pitchFamily="34" charset="-122"/>
                 <a:cs typeface="Trebuchet MS" pitchFamily="34" charset="-120"/>
               </a:rPr>
-              <a:t>ive</a:t>
+              <a:t>communicate</a:t>
             </a:r>
             <a:endParaRPr lang="en-US" sz="1300" dirty="0"/>
           </a:p>
@@ -27544,7 +27044,7 @@
       </p:sp>
       <p:sp>
         <p:nvSpPr>
-          <p:cNvPr id="22" name="Text 20"/>
+          <p:cNvPr id="21" name="Text 19"/>
           <p:cNvSpPr/>
           <p:nvPr/>
         </p:nvSpPr>
@@ -27575,7 +27075,7 @@
                 <a:ea typeface="Calibri" pitchFamily="34" charset="-122"/>
                 <a:cs typeface="Calibri" pitchFamily="34" charset="-120"/>
               </a:rPr>
-              <a:t>having the quality of</a:t>
+              <a:t>share or exchange information</a:t>
             </a:r>
             <a:endParaRPr lang="en-US" sz="850" dirty="0"/>
           </a:p>
@@ -27583,7 +27083,7 @@
       </p:sp>
       <p:sp>
         <p:nvSpPr>
-          <p:cNvPr id="23" name="Shape 21"/>
+          <p:cNvPr id="22" name="Shape 20"/>
           <p:cNvSpPr/>
           <p:nvPr/>
         </p:nvSpPr>
@@ -27610,7 +27110,7 @@
       </p:sp>
       <p:sp>
         <p:nvSpPr>
-          <p:cNvPr id="24" name="Text 22"/>
+          <p:cNvPr id="23" name="Text 21"/>
           <p:cNvSpPr/>
           <p:nvPr/>
         </p:nvSpPr>
@@ -27649,7 +27149,7 @@
       </p:sp>
       <p:sp>
         <p:nvSpPr>
-          <p:cNvPr id="25" name="Shape 23"/>
+          <p:cNvPr id="24" name="Shape 22"/>
           <p:cNvSpPr/>
           <p:nvPr/>
         </p:nvSpPr>
@@ -27676,7 +27176,7 @@
       </p:sp>
       <p:sp>
         <p:nvSpPr>
-          <p:cNvPr id="26" name="Text 24"/>
+          <p:cNvPr id="25" name="Text 23"/>
           <p:cNvSpPr/>
           <p:nvPr/>
         </p:nvSpPr>
@@ -27715,7 +27215,7 @@
       </p:sp>
       <p:sp>
         <p:nvSpPr>
-          <p:cNvPr id="27" name="Shape 25"/>
+          <p:cNvPr id="26" name="Shape 24"/>
           <p:cNvSpPr/>
           <p:nvPr/>
         </p:nvSpPr>
@@ -27742,7 +27242,7 @@
       </p:sp>
       <p:sp>
         <p:nvSpPr>
-          <p:cNvPr id="28" name="Text 26"/>
+          <p:cNvPr id="27" name="Text 25"/>
           <p:cNvSpPr/>
           <p:nvPr/>
         </p:nvSpPr>
@@ -27781,7 +27281,7 @@
       </p:sp>
       <p:sp>
         <p:nvSpPr>
-          <p:cNvPr id="29" name="Shape 27"/>
+          <p:cNvPr id="28" name="Shape 26"/>
           <p:cNvSpPr/>
           <p:nvPr/>
         </p:nvSpPr>
@@ -27808,7 +27308,7 @@
       </p:sp>
       <p:sp>
         <p:nvSpPr>
-          <p:cNvPr id="30" name="Text 28"/>
+          <p:cNvPr id="29" name="Text 27"/>
           <p:cNvSpPr/>
           <p:nvPr/>
         </p:nvSpPr>
@@ -28131,7 +27631,7 @@
                 <a:ea typeface="Calibri" pitchFamily="34" charset="-122"/>
                 <a:cs typeface="Calibri" pitchFamily="34" charset="-120"/>
               </a:rPr>
-              <a:t>Word Labs  •  wordlabs.app  •  Root: 'communicate' = to share or exchange information</a:t>
+              <a:t>Word Labs  •  wordlabs.app  •  Root: 'communicate' = share or exchange information</a:t>
             </a:r>
             <a:endParaRPr lang="en-US" sz="800" dirty="0"/>
           </a:p>
@@ -28204,7 +27704,7 @@
                 <a:ea typeface="Trebuchet MS" pitchFamily="34" charset="-122"/>
                 <a:cs typeface="Trebuchet MS" pitchFamily="34" charset="-120"/>
               </a:rPr>
-              <a:t>We are learning that the root 'communicate' means 'to share or exchange information'.</a:t>
+              <a:t>We are learning that the root 'communicate' means 'share or exchange information'.</a:t>
             </a:r>
             <a:endParaRPr lang="en-US" sz="2000" dirty="0"/>
           </a:p>
@@ -28850,7 +28350,7 @@
                 <a:ea typeface="Calibri" pitchFamily="34" charset="-122"/>
                 <a:cs typeface="Calibri" pitchFamily="34" charset="-120"/>
               </a:rPr>
-              <a:t>Word Labs  •  wordlabs.app  •  Root: 'communicate' = to share or exchange information</a:t>
+              <a:t>Word Labs  •  wordlabs.app  •  Root: 'communicate' = share or exchange information</a:t>
             </a:r>
             <a:endParaRPr lang="en-US" sz="800" dirty="0"/>
           </a:p>
@@ -28989,7 +28489,7 @@
                 <a:ea typeface="Trebuchet MS" pitchFamily="34" charset="-122"/>
                 <a:cs typeface="Trebuchet MS" pitchFamily="34" charset="-120"/>
               </a:rPr>
-              <a:t>communicative</a:t>
+              <a:t>intercommunicate</a:t>
             </a:r>
             <a:endParaRPr lang="en-US" sz="2800" dirty="0"/>
           </a:p>
@@ -29078,11 +28578,11 @@
             </a:avLst>
           </a:prstGeom>
           <a:solidFill>
-            <a:srgbClr val="CCFBF1"/>
+            <a:srgbClr val="DDD6FE"/>
           </a:solidFill>
           <a:ln w="19050">
             <a:solidFill>
-              <a:srgbClr val="0D9488"/>
+              <a:srgbClr val="7C3AED"/>
             </a:solidFill>
             <a:prstDash val="solid"/>
           </a:ln>
@@ -29122,13 +28622,13 @@
             <a:r>
               <a:rPr lang="en-US" sz="1300" b="1" dirty="0">
                 <a:solidFill>
-                  <a:srgbClr val="0F766E"/>
+                  <a:srgbClr val="4C1D95"/>
                 </a:solidFill>
                 <a:latin typeface="Trebuchet MS" pitchFamily="34" charset="0"/>
                 <a:ea typeface="Trebuchet MS" pitchFamily="34" charset="-122"/>
                 <a:cs typeface="Trebuchet MS" pitchFamily="34" charset="-120"/>
               </a:rPr>
-              <a:t>communicate</a:t>
+              <a:t>inter</a:t>
             </a:r>
             <a:endParaRPr lang="en-US" sz="1300" dirty="0"/>
           </a:p>
@@ -29167,7 +28667,7 @@
                 <a:ea typeface="Calibri" pitchFamily="34" charset="-122"/>
                 <a:cs typeface="Calibri" pitchFamily="34" charset="-120"/>
               </a:rPr>
-              <a:t>to share or exchange information</a:t>
+              <a:t>between or among</a:t>
             </a:r>
             <a:endParaRPr lang="en-US" sz="850" dirty="0"/>
           </a:p>
@@ -29175,46 +28675,7 @@
       </p:sp>
       <p:sp>
         <p:nvSpPr>
-          <p:cNvPr id="19" name="Text 17"/>
-          <p:cNvSpPr/>
-          <p:nvPr/>
-        </p:nvSpPr>
-        <p:spPr>
-          <a:xfrm>
-            <a:off x="2938272" y="2752344"/>
-            <a:ext cx="1828800" cy="182880"/>
-          </a:xfrm>
-          <a:prstGeom prst="rect">
-            <a:avLst/>
-          </a:prstGeom>
-          <a:noFill/>
-          <a:ln/>
-        </p:spPr>
-        <p:txBody>
-          <a:bodyPr wrap="square" lIns="0" tIns="0" rIns="0" bIns="0" rtlCol="0" anchor="t"/>
-          <a:lstStyle/>
-          <a:p>
-            <a:pPr algn="ctr" indent="0" marL="0">
-              <a:buNone/>
-            </a:pPr>
-            <a:r>
-              <a:rPr lang="en-US" sz="700" i="1" dirty="0">
-                <a:solidFill>
-                  <a:srgbClr val="94A3B8"/>
-                </a:solidFill>
-                <a:latin typeface="Calibri" pitchFamily="34" charset="0"/>
-                <a:ea typeface="Calibri" pitchFamily="34" charset="-122"/>
-                <a:cs typeface="Calibri" pitchFamily="34" charset="-120"/>
-              </a:rPr>
-              <a:t>'e' dropped before vowel suffix</a:t>
-            </a:r>
-            <a:endParaRPr lang="en-US" sz="700" dirty="0"/>
-          </a:p>
-        </p:txBody>
-      </p:sp>
-      <p:sp>
-        <p:nvSpPr>
-          <p:cNvPr id="20" name="Shape 18"/>
+          <p:cNvPr id="19" name="Shape 17"/>
           <p:cNvSpPr/>
           <p:nvPr/>
         </p:nvSpPr>
@@ -29229,11 +28690,11 @@
             </a:avLst>
           </a:prstGeom>
           <a:solidFill>
-            <a:srgbClr val="FCE7F3"/>
+            <a:srgbClr val="CCFBF1"/>
           </a:solidFill>
           <a:ln w="19050">
             <a:solidFill>
-              <a:srgbClr val="DB2777"/>
+              <a:srgbClr val="0D9488"/>
             </a:solidFill>
             <a:prstDash val="solid"/>
           </a:ln>
@@ -29248,7 +28709,7 @@
       </p:sp>
       <p:sp>
         <p:nvSpPr>
-          <p:cNvPr id="21" name="Text 19"/>
+          <p:cNvPr id="20" name="Text 18"/>
           <p:cNvSpPr/>
           <p:nvPr/>
         </p:nvSpPr>
@@ -29273,13 +28734,13 @@
             <a:r>
               <a:rPr lang="en-US" sz="1300" b="1" dirty="0">
                 <a:solidFill>
-                  <a:srgbClr val="9D174D"/>
+                  <a:srgbClr val="0F766E"/>
                 </a:solidFill>
                 <a:latin typeface="Trebuchet MS" pitchFamily="34" charset="0"/>
                 <a:ea typeface="Trebuchet MS" pitchFamily="34" charset="-122"/>
                 <a:cs typeface="Trebuchet MS" pitchFamily="34" charset="-120"/>
               </a:rPr>
-              <a:t>ive</a:t>
+              <a:t>communicate</a:t>
             </a:r>
             <a:endParaRPr lang="en-US" sz="1300" dirty="0"/>
           </a:p>
@@ -29287,7 +28748,7 @@
       </p:sp>
       <p:sp>
         <p:nvSpPr>
-          <p:cNvPr id="22" name="Text 20"/>
+          <p:cNvPr id="21" name="Text 19"/>
           <p:cNvSpPr/>
           <p:nvPr/>
         </p:nvSpPr>
@@ -29318,7 +28779,7 @@
                 <a:ea typeface="Calibri" pitchFamily="34" charset="-122"/>
                 <a:cs typeface="Calibri" pitchFamily="34" charset="-120"/>
               </a:rPr>
-              <a:t>having the quality of</a:t>
+              <a:t>share or exchange information</a:t>
             </a:r>
             <a:endParaRPr lang="en-US" sz="850" dirty="0"/>
           </a:p>
@@ -29326,7 +28787,7 @@
       </p:sp>
       <p:sp>
         <p:nvSpPr>
-          <p:cNvPr id="23" name="Shape 21"/>
+          <p:cNvPr id="22" name="Shape 20"/>
           <p:cNvSpPr/>
           <p:nvPr/>
         </p:nvSpPr>
@@ -29353,7 +28814,7 @@
       </p:sp>
       <p:sp>
         <p:nvSpPr>
-          <p:cNvPr id="24" name="Text 22"/>
+          <p:cNvPr id="23" name="Text 21"/>
           <p:cNvSpPr/>
           <p:nvPr/>
         </p:nvSpPr>
@@ -29392,7 +28853,7 @@
       </p:sp>
       <p:sp>
         <p:nvSpPr>
-          <p:cNvPr id="25" name="Shape 23"/>
+          <p:cNvPr id="24" name="Shape 22"/>
           <p:cNvSpPr/>
           <p:nvPr/>
         </p:nvSpPr>
@@ -29419,14 +28880,14 @@
       </p:sp>
       <p:sp>
         <p:nvSpPr>
-          <p:cNvPr id="26" name="Shape 24"/>
-          <p:cNvSpPr/>
-          <p:nvPr/>
-        </p:nvSpPr>
-        <p:spPr>
-          <a:xfrm>
-            <a:off x="1978152" y="3364992"/>
-            <a:ext cx="1225296" cy="475488"/>
+          <p:cNvPr id="25" name="Shape 23"/>
+          <p:cNvSpPr/>
+          <p:nvPr/>
+        </p:nvSpPr>
+        <p:spPr>
+          <a:xfrm>
+            <a:off x="1980329" y="3364992"/>
+            <a:ext cx="1005840" cy="475488"/>
           </a:xfrm>
           <a:prstGeom prst="rect">
             <a:avLst>
@@ -29446,14 +28907,14 @@
       </p:sp>
       <p:sp>
         <p:nvSpPr>
-          <p:cNvPr id="27" name="Text 25"/>
-          <p:cNvSpPr/>
-          <p:nvPr/>
-        </p:nvSpPr>
-        <p:spPr>
-          <a:xfrm>
-            <a:off x="1978152" y="3364992"/>
-            <a:ext cx="1225296" cy="475488"/>
+          <p:cNvPr id="26" name="Text 24"/>
+          <p:cNvSpPr/>
+          <p:nvPr/>
+        </p:nvSpPr>
+        <p:spPr>
+          <a:xfrm>
+            <a:off x="1980329" y="3364992"/>
+            <a:ext cx="1005840" cy="475488"/>
           </a:xfrm>
           <a:prstGeom prst="rect">
             <a:avLst/>
@@ -29477,7 +28938,7 @@
                 <a:ea typeface="Trebuchet MS" pitchFamily="34" charset="-122"/>
                 <a:cs typeface="Trebuchet MS" pitchFamily="34" charset="-120"/>
               </a:rPr>
-              <a:t>com</a:t>
+              <a:t>in</a:t>
             </a:r>
             <a:endParaRPr lang="en-US" sz="1400" dirty="0"/>
           </a:p>
@@ -29485,14 +28946,14 @@
       </p:sp>
       <p:sp>
         <p:nvSpPr>
-          <p:cNvPr id="28" name="Text 26"/>
-          <p:cNvSpPr/>
-          <p:nvPr/>
-        </p:nvSpPr>
-        <p:spPr>
-          <a:xfrm>
-            <a:off x="3203448" y="3364992"/>
-            <a:ext cx="76200" cy="475488"/>
+          <p:cNvPr id="27" name="Text 25"/>
+          <p:cNvSpPr/>
+          <p:nvPr/>
+        </p:nvSpPr>
+        <p:spPr>
+          <a:xfrm>
+            <a:off x="2986169" y="3364992"/>
+            <a:ext cx="78377" cy="475488"/>
           </a:xfrm>
           <a:prstGeom prst="rect">
             <a:avLst/>
@@ -29524,14 +28985,14 @@
       </p:sp>
       <p:sp>
         <p:nvSpPr>
-          <p:cNvPr id="29" name="Shape 27"/>
-          <p:cNvSpPr/>
-          <p:nvPr/>
-        </p:nvSpPr>
-        <p:spPr>
-          <a:xfrm>
-            <a:off x="3279648" y="3364992"/>
-            <a:ext cx="1225296" cy="475488"/>
+          <p:cNvPr id="28" name="Shape 26"/>
+          <p:cNvSpPr/>
+          <p:nvPr/>
+        </p:nvSpPr>
+        <p:spPr>
+          <a:xfrm>
+            <a:off x="3064546" y="3364992"/>
+            <a:ext cx="1005840" cy="475488"/>
           </a:xfrm>
           <a:prstGeom prst="rect">
             <a:avLst>
@@ -29551,14 +29012,14 @@
       </p:sp>
       <p:sp>
         <p:nvSpPr>
-          <p:cNvPr id="30" name="Text 28"/>
-          <p:cNvSpPr/>
-          <p:nvPr/>
-        </p:nvSpPr>
-        <p:spPr>
-          <a:xfrm>
-            <a:off x="3279648" y="3364992"/>
-            <a:ext cx="1225296" cy="475488"/>
+          <p:cNvPr id="29" name="Text 27"/>
+          <p:cNvSpPr/>
+          <p:nvPr/>
+        </p:nvSpPr>
+        <p:spPr>
+          <a:xfrm>
+            <a:off x="3064546" y="3364992"/>
+            <a:ext cx="1005840" cy="475488"/>
           </a:xfrm>
           <a:prstGeom prst="rect">
             <a:avLst/>
@@ -29582,7 +29043,7 @@
                 <a:ea typeface="Trebuchet MS" pitchFamily="34" charset="-122"/>
                 <a:cs typeface="Trebuchet MS" pitchFamily="34" charset="-120"/>
               </a:rPr>
-              <a:t>mu</a:t>
+              <a:t>ter</a:t>
             </a:r>
             <a:endParaRPr lang="en-US" sz="1400" dirty="0"/>
           </a:p>
@@ -29590,14 +29051,14 @@
       </p:sp>
       <p:sp>
         <p:nvSpPr>
-          <p:cNvPr id="31" name="Text 29"/>
-          <p:cNvSpPr/>
-          <p:nvPr/>
-        </p:nvSpPr>
-        <p:spPr>
-          <a:xfrm>
-            <a:off x="4504944" y="3364992"/>
-            <a:ext cx="76200" cy="475488"/>
+          <p:cNvPr id="30" name="Text 28"/>
+          <p:cNvSpPr/>
+          <p:nvPr/>
+        </p:nvSpPr>
+        <p:spPr>
+          <a:xfrm>
+            <a:off x="4070386" y="3364992"/>
+            <a:ext cx="78377" cy="475488"/>
           </a:xfrm>
           <a:prstGeom prst="rect">
             <a:avLst/>
@@ -29629,14 +29090,14 @@
       </p:sp>
       <p:sp>
         <p:nvSpPr>
-          <p:cNvPr id="32" name="Shape 30"/>
-          <p:cNvSpPr/>
-          <p:nvPr/>
-        </p:nvSpPr>
-        <p:spPr>
-          <a:xfrm>
-            <a:off x="4581144" y="3364992"/>
-            <a:ext cx="1225296" cy="475488"/>
+          <p:cNvPr id="31" name="Shape 29"/>
+          <p:cNvSpPr/>
+          <p:nvPr/>
+        </p:nvSpPr>
+        <p:spPr>
+          <a:xfrm>
+            <a:off x="4148763" y="3364992"/>
+            <a:ext cx="1005840" cy="475488"/>
           </a:xfrm>
           <a:prstGeom prst="rect">
             <a:avLst>
@@ -29656,14 +29117,14 @@
       </p:sp>
       <p:sp>
         <p:nvSpPr>
-          <p:cNvPr id="33" name="Text 31"/>
-          <p:cNvSpPr/>
-          <p:nvPr/>
-        </p:nvSpPr>
-        <p:spPr>
-          <a:xfrm>
-            <a:off x="4581144" y="3364992"/>
-            <a:ext cx="1225296" cy="475488"/>
+          <p:cNvPr id="32" name="Text 30"/>
+          <p:cNvSpPr/>
+          <p:nvPr/>
+        </p:nvSpPr>
+        <p:spPr>
+          <a:xfrm>
+            <a:off x="4148763" y="3364992"/>
+            <a:ext cx="1005840" cy="475488"/>
           </a:xfrm>
           <a:prstGeom prst="rect">
             <a:avLst/>
@@ -29687,7 +29148,7 @@
                 <a:ea typeface="Trebuchet MS" pitchFamily="34" charset="-122"/>
                 <a:cs typeface="Trebuchet MS" pitchFamily="34" charset="-120"/>
               </a:rPr>
-              <a:t>ni</a:t>
+              <a:t>com</a:t>
             </a:r>
             <a:endParaRPr lang="en-US" sz="1400" dirty="0"/>
           </a:p>
@@ -29695,14 +29156,14 @@
       </p:sp>
       <p:sp>
         <p:nvSpPr>
-          <p:cNvPr id="34" name="Text 32"/>
-          <p:cNvSpPr/>
-          <p:nvPr/>
-        </p:nvSpPr>
-        <p:spPr>
-          <a:xfrm>
-            <a:off x="5806440" y="3364992"/>
-            <a:ext cx="76200" cy="475488"/>
+          <p:cNvPr id="33" name="Text 31"/>
+          <p:cNvSpPr/>
+          <p:nvPr/>
+        </p:nvSpPr>
+        <p:spPr>
+          <a:xfrm>
+            <a:off x="5154603" y="3364992"/>
+            <a:ext cx="78377" cy="475488"/>
           </a:xfrm>
           <a:prstGeom prst="rect">
             <a:avLst/>
@@ -29734,14 +29195,14 @@
       </p:sp>
       <p:sp>
         <p:nvSpPr>
-          <p:cNvPr id="35" name="Shape 33"/>
-          <p:cNvSpPr/>
-          <p:nvPr/>
-        </p:nvSpPr>
-        <p:spPr>
-          <a:xfrm>
-            <a:off x="5882640" y="3364992"/>
-            <a:ext cx="1225296" cy="475488"/>
+          <p:cNvPr id="34" name="Shape 32"/>
+          <p:cNvSpPr/>
+          <p:nvPr/>
+        </p:nvSpPr>
+        <p:spPr>
+          <a:xfrm>
+            <a:off x="5232981" y="3364992"/>
+            <a:ext cx="1005840" cy="475488"/>
           </a:xfrm>
           <a:prstGeom prst="rect">
             <a:avLst>
@@ -29761,14 +29222,14 @@
       </p:sp>
       <p:sp>
         <p:nvSpPr>
-          <p:cNvPr id="36" name="Text 34"/>
-          <p:cNvSpPr/>
-          <p:nvPr/>
-        </p:nvSpPr>
-        <p:spPr>
-          <a:xfrm>
-            <a:off x="5882640" y="3364992"/>
-            <a:ext cx="1225296" cy="475488"/>
+          <p:cNvPr id="35" name="Text 33"/>
+          <p:cNvSpPr/>
+          <p:nvPr/>
+        </p:nvSpPr>
+        <p:spPr>
+          <a:xfrm>
+            <a:off x="5232981" y="3364992"/>
+            <a:ext cx="1005840" cy="475488"/>
           </a:xfrm>
           <a:prstGeom prst="rect">
             <a:avLst/>
@@ -29792,7 +29253,7 @@
                 <a:ea typeface="Trebuchet MS" pitchFamily="34" charset="-122"/>
                 <a:cs typeface="Trebuchet MS" pitchFamily="34" charset="-120"/>
               </a:rPr>
-              <a:t>ca</a:t>
+              <a:t>mu</a:t>
             </a:r>
             <a:endParaRPr lang="en-US" sz="1400" dirty="0"/>
           </a:p>
@@ -29800,14 +29261,14 @@
       </p:sp>
       <p:sp>
         <p:nvSpPr>
-          <p:cNvPr id="37" name="Text 35"/>
-          <p:cNvSpPr/>
-          <p:nvPr/>
-        </p:nvSpPr>
-        <p:spPr>
-          <a:xfrm>
-            <a:off x="7107936" y="3364992"/>
-            <a:ext cx="76200" cy="475488"/>
+          <p:cNvPr id="36" name="Text 34"/>
+          <p:cNvSpPr/>
+          <p:nvPr/>
+        </p:nvSpPr>
+        <p:spPr>
+          <a:xfrm>
+            <a:off x="6238821" y="3364992"/>
+            <a:ext cx="78377" cy="475488"/>
           </a:xfrm>
           <a:prstGeom prst="rect">
             <a:avLst/>
@@ -29839,14 +29300,14 @@
       </p:sp>
       <p:sp>
         <p:nvSpPr>
-          <p:cNvPr id="38" name="Shape 36"/>
-          <p:cNvSpPr/>
-          <p:nvPr/>
-        </p:nvSpPr>
-        <p:spPr>
-          <a:xfrm>
-            <a:off x="7184136" y="3364992"/>
-            <a:ext cx="1225296" cy="475488"/>
+          <p:cNvPr id="37" name="Shape 35"/>
+          <p:cNvSpPr/>
+          <p:nvPr/>
+        </p:nvSpPr>
+        <p:spPr>
+          <a:xfrm>
+            <a:off x="6317198" y="3364992"/>
+            <a:ext cx="1005840" cy="475488"/>
           </a:xfrm>
           <a:prstGeom prst="rect">
             <a:avLst>
@@ -29866,14 +29327,14 @@
       </p:sp>
       <p:sp>
         <p:nvSpPr>
-          <p:cNvPr id="39" name="Text 37"/>
-          <p:cNvSpPr/>
-          <p:nvPr/>
-        </p:nvSpPr>
-        <p:spPr>
-          <a:xfrm>
-            <a:off x="7184136" y="3364992"/>
-            <a:ext cx="1225296" cy="475488"/>
+          <p:cNvPr id="38" name="Text 36"/>
+          <p:cNvSpPr/>
+          <p:nvPr/>
+        </p:nvSpPr>
+        <p:spPr>
+          <a:xfrm>
+            <a:off x="6317198" y="3364992"/>
+            <a:ext cx="1005840" cy="475488"/>
           </a:xfrm>
           <a:prstGeom prst="rect">
             <a:avLst/>
@@ -29897,7 +29358,7 @@
                 <a:ea typeface="Trebuchet MS" pitchFamily="34" charset="-122"/>
                 <a:cs typeface="Trebuchet MS" pitchFamily="34" charset="-120"/>
               </a:rPr>
-              <a:t>tive</a:t>
+              <a:t>ni</a:t>
             </a:r>
             <a:endParaRPr lang="en-US" sz="1400" dirty="0"/>
           </a:p>
@@ -29905,7 +29366,112 @@
       </p:sp>
       <p:sp>
         <p:nvSpPr>
+          <p:cNvPr id="39" name="Text 37"/>
+          <p:cNvSpPr/>
+          <p:nvPr/>
+        </p:nvSpPr>
+        <p:spPr>
+          <a:xfrm>
+            <a:off x="7323038" y="3364992"/>
+            <a:ext cx="78377" cy="475488"/>
+          </a:xfrm>
+          <a:prstGeom prst="rect">
+            <a:avLst/>
+          </a:prstGeom>
+          <a:noFill/>
+          <a:ln/>
+        </p:spPr>
+        <p:txBody>
+          <a:bodyPr wrap="square" lIns="0" tIns="0" rIns="0" bIns="0" rtlCol="0" anchor="ctr"/>
+          <a:lstStyle/>
+          <a:p>
+            <a:pPr algn="ctr" indent="0" marL="0">
+              <a:buNone/>
+            </a:pPr>
+            <a:r>
+              <a:rPr lang="en-US" sz="1600" b="1" dirty="0">
+                <a:solidFill>
+                  <a:srgbClr val="0D9488"/>
+                </a:solidFill>
+                <a:latin typeface="Trebuchet MS" pitchFamily="34" charset="0"/>
+                <a:ea typeface="Trebuchet MS" pitchFamily="34" charset="-122"/>
+                <a:cs typeface="Trebuchet MS" pitchFamily="34" charset="-120"/>
+              </a:rPr>
+              <a:t>·</a:t>
+            </a:r>
+            <a:endParaRPr lang="en-US" sz="1600" dirty="0"/>
+          </a:p>
+        </p:txBody>
+      </p:sp>
+      <p:sp>
+        <p:nvSpPr>
           <p:cNvPr id="40" name="Shape 38"/>
+          <p:cNvSpPr/>
+          <p:nvPr/>
+        </p:nvSpPr>
+        <p:spPr>
+          <a:xfrm>
+            <a:off x="7401415" y="3364992"/>
+            <a:ext cx="1005840" cy="475488"/>
+          </a:xfrm>
+          <a:prstGeom prst="rect">
+            <a:avLst>
+              <a:gd name="adj" fmla="val 9615"/>
+            </a:avLst>
+          </a:prstGeom>
+          <a:solidFill>
+            <a:srgbClr val="FFFFFF"/>
+          </a:solidFill>
+          <a:ln w="12700">
+            <a:solidFill>
+              <a:srgbClr val="0D9488"/>
+            </a:solidFill>
+            <a:prstDash val="solid"/>
+          </a:ln>
+        </p:spPr>
+      </p:sp>
+      <p:sp>
+        <p:nvSpPr>
+          <p:cNvPr id="41" name="Text 39"/>
+          <p:cNvSpPr/>
+          <p:nvPr/>
+        </p:nvSpPr>
+        <p:spPr>
+          <a:xfrm>
+            <a:off x="7401415" y="3364992"/>
+            <a:ext cx="1005840" cy="475488"/>
+          </a:xfrm>
+          <a:prstGeom prst="rect">
+            <a:avLst/>
+          </a:prstGeom>
+          <a:noFill/>
+          <a:ln/>
+        </p:spPr>
+        <p:txBody>
+          <a:bodyPr wrap="square" lIns="0" tIns="0" rIns="0" bIns="0" rtlCol="0" anchor="ctr"/>
+          <a:lstStyle/>
+          <a:p>
+            <a:pPr algn="ctr" indent="0" marL="0">
+              <a:buNone/>
+            </a:pPr>
+            <a:r>
+              <a:rPr lang="en-US" sz="1400" b="1" dirty="0">
+                <a:solidFill>
+                  <a:srgbClr val="0D9488"/>
+                </a:solidFill>
+                <a:latin typeface="Trebuchet MS" pitchFamily="34" charset="0"/>
+                <a:ea typeface="Trebuchet MS" pitchFamily="34" charset="-122"/>
+                <a:cs typeface="Trebuchet MS" pitchFamily="34" charset="-120"/>
+              </a:rPr>
+              <a:t>cate</a:t>
+            </a:r>
+            <a:endParaRPr lang="en-US" sz="1400" dirty="0"/>
+          </a:p>
+        </p:txBody>
+      </p:sp>
+      <p:sp>
+        <p:nvSpPr>
+          <p:cNvPr id="42" name="Shape 40"/>
           <p:cNvSpPr/>
           <p:nvPr/>
         </p:nvSpPr>
@@ -29932,7 +29498,7 @@
       </p:sp>
       <p:sp>
         <p:nvSpPr>
-          <p:cNvPr id="41" name="Text 39"/>
+          <p:cNvPr id="43" name="Text 41"/>
           <p:cNvSpPr/>
           <p:nvPr/>
         </p:nvSpPr>
@@ -29971,7 +29537,7 @@
       </p:sp>
       <p:sp>
         <p:nvSpPr>
-          <p:cNvPr id="42" name="Shape 40"/>
+          <p:cNvPr id="44" name="Shape 42"/>
           <p:cNvSpPr/>
           <p:nvPr/>
         </p:nvSpPr>
@@ -29998,7 +29564,7 @@
       </p:sp>
       <p:sp>
         <p:nvSpPr>
-          <p:cNvPr id="43" name="Text 41"/>
+          <p:cNvPr id="45" name="Text 43"/>
           <p:cNvSpPr/>
           <p:nvPr/>
         </p:nvSpPr>
@@ -30321,7 +29887,7 @@
                 <a:ea typeface="Calibri" pitchFamily="34" charset="-122"/>
                 <a:cs typeface="Calibri" pitchFamily="34" charset="-120"/>
               </a:rPr>
-              <a:t>Word Labs  •  wordlabs.app  •  Root: 'communicate' = to share or exchange information</a:t>
+              <a:t>Word Labs  •  wordlabs.app  •  Root: 'communicate' = share or exchange information</a:t>
             </a:r>
             <a:endParaRPr lang="en-US" sz="800" dirty="0"/>
           </a:p>
@@ -30460,7 +30026,7 @@
                 <a:ea typeface="Trebuchet MS" pitchFamily="34" charset="-122"/>
                 <a:cs typeface="Trebuchet MS" pitchFamily="34" charset="-120"/>
               </a:rPr>
-              <a:t>communicative</a:t>
+              <a:t>intercommunicate</a:t>
             </a:r>
             <a:endParaRPr lang="en-US" sz="2800" dirty="0"/>
           </a:p>
@@ -30549,11 +30115,11 @@
             </a:avLst>
           </a:prstGeom>
           <a:solidFill>
-            <a:srgbClr val="CCFBF1"/>
+            <a:srgbClr val="DDD6FE"/>
           </a:solidFill>
           <a:ln w="19050">
             <a:solidFill>
-              <a:srgbClr val="0D9488"/>
+              <a:srgbClr val="7C3AED"/>
             </a:solidFill>
             <a:prstDash val="solid"/>
           </a:ln>
@@ -30593,13 +30159,13 @@
             <a:r>
               <a:rPr lang="en-US" sz="1300" b="1" dirty="0">
                 <a:solidFill>
-                  <a:srgbClr val="0F766E"/>
+                  <a:srgbClr val="4C1D95"/>
                 </a:solidFill>
                 <a:latin typeface="Trebuchet MS" pitchFamily="34" charset="0"/>
                 <a:ea typeface="Trebuchet MS" pitchFamily="34" charset="-122"/>
                 <a:cs typeface="Trebuchet MS" pitchFamily="34" charset="-120"/>
               </a:rPr>
-              <a:t>communicate</a:t>
+              <a:t>inter</a:t>
             </a:r>
             <a:endParaRPr lang="en-US" sz="1300" dirty="0"/>
           </a:p>
@@ -30638,7 +30204,7 @@
                 <a:ea typeface="Calibri" pitchFamily="34" charset="-122"/>
                 <a:cs typeface="Calibri" pitchFamily="34" charset="-120"/>
               </a:rPr>
-              <a:t>to share or exchange information</a:t>
+              <a:t>between or among</a:t>
             </a:r>
             <a:endParaRPr lang="en-US" sz="850" dirty="0"/>
           </a:p>
@@ -30646,46 +30212,7 @@
       </p:sp>
       <p:sp>
         <p:nvSpPr>
-          <p:cNvPr id="19" name="Text 17"/>
-          <p:cNvSpPr/>
-          <p:nvPr/>
-        </p:nvSpPr>
-        <p:spPr>
-          <a:xfrm>
-            <a:off x="2938272" y="2752344"/>
-            <a:ext cx="1828800" cy="182880"/>
-          </a:xfrm>
-          <a:prstGeom prst="rect">
-            <a:avLst/>
-          </a:prstGeom>
-          <a:noFill/>
-          <a:ln/>
-        </p:spPr>
-        <p:txBody>
-          <a:bodyPr wrap="square" lIns="0" tIns="0" rIns="0" bIns="0" rtlCol="0" anchor="t"/>
-          <a:lstStyle/>
-          <a:p>
-            <a:pPr algn="ctr" indent="0" marL="0">
-              <a:buNone/>
-            </a:pPr>
-            <a:r>
-              <a:rPr lang="en-US" sz="700" i="1" dirty="0">
-                <a:solidFill>
-                  <a:srgbClr val="94A3B8"/>
-                </a:solidFill>
-                <a:latin typeface="Calibri" pitchFamily="34" charset="0"/>
-                <a:ea typeface="Calibri" pitchFamily="34" charset="-122"/>
-                <a:cs typeface="Calibri" pitchFamily="34" charset="-120"/>
-              </a:rPr>
-              <a:t>'e' dropped before vowel suffix</a:t>
-            </a:r>
-            <a:endParaRPr lang="en-US" sz="700" dirty="0"/>
-          </a:p>
-        </p:txBody>
-      </p:sp>
-      <p:sp>
-        <p:nvSpPr>
-          <p:cNvPr id="20" name="Shape 18"/>
+          <p:cNvPr id="19" name="Shape 17"/>
           <p:cNvSpPr/>
           <p:nvPr/>
         </p:nvSpPr>
@@ -30700,11 +30227,11 @@
             </a:avLst>
           </a:prstGeom>
           <a:solidFill>
-            <a:srgbClr val="FCE7F3"/>
+            <a:srgbClr val="CCFBF1"/>
           </a:solidFill>
           <a:ln w="19050">
             <a:solidFill>
-              <a:srgbClr val="DB2777"/>
+              <a:srgbClr val="0D9488"/>
             </a:solidFill>
             <a:prstDash val="solid"/>
           </a:ln>
@@ -30719,7 +30246,7 @@
       </p:sp>
       <p:sp>
         <p:nvSpPr>
-          <p:cNvPr id="21" name="Text 19"/>
+          <p:cNvPr id="20" name="Text 18"/>
           <p:cNvSpPr/>
           <p:nvPr/>
         </p:nvSpPr>
@@ -30744,13 +30271,13 @@
             <a:r>
               <a:rPr lang="en-US" sz="1300" b="1" dirty="0">
                 <a:solidFill>
-                  <a:srgbClr val="9D174D"/>
+                  <a:srgbClr val="0F766E"/>
                 </a:solidFill>
                 <a:latin typeface="Trebuchet MS" pitchFamily="34" charset="0"/>
                 <a:ea typeface="Trebuchet MS" pitchFamily="34" charset="-122"/>
                 <a:cs typeface="Trebuchet MS" pitchFamily="34" charset="-120"/>
               </a:rPr>
-              <a:t>ive</a:t>
+              <a:t>communicate</a:t>
             </a:r>
             <a:endParaRPr lang="en-US" sz="1300" dirty="0"/>
           </a:p>
@@ -30758,7 +30285,7 @@
       </p:sp>
       <p:sp>
         <p:nvSpPr>
-          <p:cNvPr id="22" name="Text 20"/>
+          <p:cNvPr id="21" name="Text 19"/>
           <p:cNvSpPr/>
           <p:nvPr/>
         </p:nvSpPr>
@@ -30789,7 +30316,7 @@
                 <a:ea typeface="Calibri" pitchFamily="34" charset="-122"/>
                 <a:cs typeface="Calibri" pitchFamily="34" charset="-120"/>
               </a:rPr>
-              <a:t>having the quality of</a:t>
+              <a:t>share or exchange information</a:t>
             </a:r>
             <a:endParaRPr lang="en-US" sz="850" dirty="0"/>
           </a:p>
@@ -30797,7 +30324,7 @@
       </p:sp>
       <p:sp>
         <p:nvSpPr>
-          <p:cNvPr id="23" name="Shape 21"/>
+          <p:cNvPr id="22" name="Shape 20"/>
           <p:cNvSpPr/>
           <p:nvPr/>
         </p:nvSpPr>
@@ -30824,7 +30351,7 @@
       </p:sp>
       <p:sp>
         <p:nvSpPr>
-          <p:cNvPr id="24" name="Text 22"/>
+          <p:cNvPr id="23" name="Text 21"/>
           <p:cNvSpPr/>
           <p:nvPr/>
         </p:nvSpPr>
@@ -30863,7 +30390,7 @@
       </p:sp>
       <p:sp>
         <p:nvSpPr>
-          <p:cNvPr id="25" name="Shape 23"/>
+          <p:cNvPr id="24" name="Shape 22"/>
           <p:cNvSpPr/>
           <p:nvPr/>
         </p:nvSpPr>
@@ -30890,14 +30417,14 @@
       </p:sp>
       <p:sp>
         <p:nvSpPr>
-          <p:cNvPr id="26" name="Shape 24"/>
-          <p:cNvSpPr/>
-          <p:nvPr/>
-        </p:nvSpPr>
-        <p:spPr>
-          <a:xfrm>
-            <a:off x="1978152" y="3364992"/>
-            <a:ext cx="1225296" cy="475488"/>
+          <p:cNvPr id="25" name="Shape 23"/>
+          <p:cNvSpPr/>
+          <p:nvPr/>
+        </p:nvSpPr>
+        <p:spPr>
+          <a:xfrm>
+            <a:off x="1980329" y="3364992"/>
+            <a:ext cx="1005840" cy="475488"/>
           </a:xfrm>
           <a:prstGeom prst="rect">
             <a:avLst>
@@ -30917,14 +30444,14 @@
       </p:sp>
       <p:sp>
         <p:nvSpPr>
-          <p:cNvPr id="27" name="Text 25"/>
-          <p:cNvSpPr/>
-          <p:nvPr/>
-        </p:nvSpPr>
-        <p:spPr>
-          <a:xfrm>
-            <a:off x="1978152" y="3364992"/>
-            <a:ext cx="1225296" cy="475488"/>
+          <p:cNvPr id="26" name="Text 24"/>
+          <p:cNvSpPr/>
+          <p:nvPr/>
+        </p:nvSpPr>
+        <p:spPr>
+          <a:xfrm>
+            <a:off x="1980329" y="3364992"/>
+            <a:ext cx="1005840" cy="475488"/>
           </a:xfrm>
           <a:prstGeom prst="rect">
             <a:avLst/>
@@ -30948,7 +30475,7 @@
                 <a:ea typeface="Trebuchet MS" pitchFamily="34" charset="-122"/>
                 <a:cs typeface="Trebuchet MS" pitchFamily="34" charset="-120"/>
               </a:rPr>
-              <a:t>com</a:t>
+              <a:t>in</a:t>
             </a:r>
             <a:endParaRPr lang="en-US" sz="1400" dirty="0"/>
           </a:p>
@@ -30956,14 +30483,14 @@
       </p:sp>
       <p:sp>
         <p:nvSpPr>
-          <p:cNvPr id="28" name="Text 26"/>
-          <p:cNvSpPr/>
-          <p:nvPr/>
-        </p:nvSpPr>
-        <p:spPr>
-          <a:xfrm>
-            <a:off x="3203448" y="3364992"/>
-            <a:ext cx="76200" cy="475488"/>
+          <p:cNvPr id="27" name="Text 25"/>
+          <p:cNvSpPr/>
+          <p:nvPr/>
+        </p:nvSpPr>
+        <p:spPr>
+          <a:xfrm>
+            <a:off x="2986169" y="3364992"/>
+            <a:ext cx="78377" cy="475488"/>
           </a:xfrm>
           <a:prstGeom prst="rect">
             <a:avLst/>
@@ -30995,14 +30522,14 @@
       </p:sp>
       <p:sp>
         <p:nvSpPr>
-          <p:cNvPr id="29" name="Shape 27"/>
-          <p:cNvSpPr/>
-          <p:nvPr/>
-        </p:nvSpPr>
-        <p:spPr>
-          <a:xfrm>
-            <a:off x="3279648" y="3364992"/>
-            <a:ext cx="1225296" cy="475488"/>
+          <p:cNvPr id="28" name="Shape 26"/>
+          <p:cNvSpPr/>
+          <p:nvPr/>
+        </p:nvSpPr>
+        <p:spPr>
+          <a:xfrm>
+            <a:off x="3064546" y="3364992"/>
+            <a:ext cx="1005840" cy="475488"/>
           </a:xfrm>
           <a:prstGeom prst="rect">
             <a:avLst>
@@ -31022,14 +30549,14 @@
       </p:sp>
       <p:sp>
         <p:nvSpPr>
-          <p:cNvPr id="30" name="Text 28"/>
-          <p:cNvSpPr/>
-          <p:nvPr/>
-        </p:nvSpPr>
-        <p:spPr>
-          <a:xfrm>
-            <a:off x="3279648" y="3364992"/>
-            <a:ext cx="1225296" cy="475488"/>
+          <p:cNvPr id="29" name="Text 27"/>
+          <p:cNvSpPr/>
+          <p:nvPr/>
+        </p:nvSpPr>
+        <p:spPr>
+          <a:xfrm>
+            <a:off x="3064546" y="3364992"/>
+            <a:ext cx="1005840" cy="475488"/>
           </a:xfrm>
           <a:prstGeom prst="rect">
             <a:avLst/>
@@ -31053,7 +30580,7 @@
                 <a:ea typeface="Trebuchet MS" pitchFamily="34" charset="-122"/>
                 <a:cs typeface="Trebuchet MS" pitchFamily="34" charset="-120"/>
               </a:rPr>
-              <a:t>mu</a:t>
+              <a:t>ter</a:t>
             </a:r>
             <a:endParaRPr lang="en-US" sz="1400" dirty="0"/>
           </a:p>
@@ -31061,14 +30588,14 @@
       </p:sp>
       <p:sp>
         <p:nvSpPr>
-          <p:cNvPr id="31" name="Text 29"/>
-          <p:cNvSpPr/>
-          <p:nvPr/>
-        </p:nvSpPr>
-        <p:spPr>
-          <a:xfrm>
-            <a:off x="4504944" y="3364992"/>
-            <a:ext cx="76200" cy="475488"/>
+          <p:cNvPr id="30" name="Text 28"/>
+          <p:cNvSpPr/>
+          <p:nvPr/>
+        </p:nvSpPr>
+        <p:spPr>
+          <a:xfrm>
+            <a:off x="4070386" y="3364992"/>
+            <a:ext cx="78377" cy="475488"/>
           </a:xfrm>
           <a:prstGeom prst="rect">
             <a:avLst/>
@@ -31100,14 +30627,14 @@
       </p:sp>
       <p:sp>
         <p:nvSpPr>
-          <p:cNvPr id="32" name="Shape 30"/>
-          <p:cNvSpPr/>
-          <p:nvPr/>
-        </p:nvSpPr>
-        <p:spPr>
-          <a:xfrm>
-            <a:off x="4581144" y="3364992"/>
-            <a:ext cx="1225296" cy="475488"/>
+          <p:cNvPr id="31" name="Shape 29"/>
+          <p:cNvSpPr/>
+          <p:nvPr/>
+        </p:nvSpPr>
+        <p:spPr>
+          <a:xfrm>
+            <a:off x="4148763" y="3364992"/>
+            <a:ext cx="1005840" cy="475488"/>
           </a:xfrm>
           <a:prstGeom prst="rect">
             <a:avLst>
@@ -31127,14 +30654,14 @@
       </p:sp>
       <p:sp>
         <p:nvSpPr>
-          <p:cNvPr id="33" name="Text 31"/>
-          <p:cNvSpPr/>
-          <p:nvPr/>
-        </p:nvSpPr>
-        <p:spPr>
-          <a:xfrm>
-            <a:off x="4581144" y="3364992"/>
-            <a:ext cx="1225296" cy="475488"/>
+          <p:cNvPr id="32" name="Text 30"/>
+          <p:cNvSpPr/>
+          <p:nvPr/>
+        </p:nvSpPr>
+        <p:spPr>
+          <a:xfrm>
+            <a:off x="4148763" y="3364992"/>
+            <a:ext cx="1005840" cy="475488"/>
           </a:xfrm>
           <a:prstGeom prst="rect">
             <a:avLst/>
@@ -31158,7 +30685,7 @@
                 <a:ea typeface="Trebuchet MS" pitchFamily="34" charset="-122"/>
                 <a:cs typeface="Trebuchet MS" pitchFamily="34" charset="-120"/>
               </a:rPr>
-              <a:t>ni</a:t>
+              <a:t>com</a:t>
             </a:r>
             <a:endParaRPr lang="en-US" sz="1400" dirty="0"/>
           </a:p>
@@ -31166,14 +30693,14 @@
       </p:sp>
       <p:sp>
         <p:nvSpPr>
-          <p:cNvPr id="34" name="Text 32"/>
-          <p:cNvSpPr/>
-          <p:nvPr/>
-        </p:nvSpPr>
-        <p:spPr>
-          <a:xfrm>
-            <a:off x="5806440" y="3364992"/>
-            <a:ext cx="76200" cy="475488"/>
+          <p:cNvPr id="33" name="Text 31"/>
+          <p:cNvSpPr/>
+          <p:nvPr/>
+        </p:nvSpPr>
+        <p:spPr>
+          <a:xfrm>
+            <a:off x="5154603" y="3364992"/>
+            <a:ext cx="78377" cy="475488"/>
           </a:xfrm>
           <a:prstGeom prst="rect">
             <a:avLst/>
@@ -31205,14 +30732,14 @@
       </p:sp>
       <p:sp>
         <p:nvSpPr>
-          <p:cNvPr id="35" name="Shape 33"/>
-          <p:cNvSpPr/>
-          <p:nvPr/>
-        </p:nvSpPr>
-        <p:spPr>
-          <a:xfrm>
-            <a:off x="5882640" y="3364992"/>
-            <a:ext cx="1225296" cy="475488"/>
+          <p:cNvPr id="34" name="Shape 32"/>
+          <p:cNvSpPr/>
+          <p:nvPr/>
+        </p:nvSpPr>
+        <p:spPr>
+          <a:xfrm>
+            <a:off x="5232981" y="3364992"/>
+            <a:ext cx="1005840" cy="475488"/>
           </a:xfrm>
           <a:prstGeom prst="rect">
             <a:avLst>
@@ -31232,14 +30759,14 @@
       </p:sp>
       <p:sp>
         <p:nvSpPr>
-          <p:cNvPr id="36" name="Text 34"/>
-          <p:cNvSpPr/>
-          <p:nvPr/>
-        </p:nvSpPr>
-        <p:spPr>
-          <a:xfrm>
-            <a:off x="5882640" y="3364992"/>
-            <a:ext cx="1225296" cy="475488"/>
+          <p:cNvPr id="35" name="Text 33"/>
+          <p:cNvSpPr/>
+          <p:nvPr/>
+        </p:nvSpPr>
+        <p:spPr>
+          <a:xfrm>
+            <a:off x="5232981" y="3364992"/>
+            <a:ext cx="1005840" cy="475488"/>
           </a:xfrm>
           <a:prstGeom prst="rect">
             <a:avLst/>
@@ -31263,7 +30790,7 @@
                 <a:ea typeface="Trebuchet MS" pitchFamily="34" charset="-122"/>
                 <a:cs typeface="Trebuchet MS" pitchFamily="34" charset="-120"/>
               </a:rPr>
-              <a:t>ca</a:t>
+              <a:t>mu</a:t>
             </a:r>
             <a:endParaRPr lang="en-US" sz="1400" dirty="0"/>
           </a:p>
@@ -31271,14 +30798,14 @@
       </p:sp>
       <p:sp>
         <p:nvSpPr>
-          <p:cNvPr id="37" name="Text 35"/>
-          <p:cNvSpPr/>
-          <p:nvPr/>
-        </p:nvSpPr>
-        <p:spPr>
-          <a:xfrm>
-            <a:off x="7107936" y="3364992"/>
-            <a:ext cx="76200" cy="475488"/>
+          <p:cNvPr id="36" name="Text 34"/>
+          <p:cNvSpPr/>
+          <p:nvPr/>
+        </p:nvSpPr>
+        <p:spPr>
+          <a:xfrm>
+            <a:off x="6238821" y="3364992"/>
+            <a:ext cx="78377" cy="475488"/>
           </a:xfrm>
           <a:prstGeom prst="rect">
             <a:avLst/>
@@ -31310,14 +30837,14 @@
       </p:sp>
       <p:sp>
         <p:nvSpPr>
-          <p:cNvPr id="38" name="Shape 36"/>
-          <p:cNvSpPr/>
-          <p:nvPr/>
-        </p:nvSpPr>
-        <p:spPr>
-          <a:xfrm>
-            <a:off x="7184136" y="3364992"/>
-            <a:ext cx="1225296" cy="475488"/>
+          <p:cNvPr id="37" name="Shape 35"/>
+          <p:cNvSpPr/>
+          <p:nvPr/>
+        </p:nvSpPr>
+        <p:spPr>
+          <a:xfrm>
+            <a:off x="6317198" y="3364992"/>
+            <a:ext cx="1005840" cy="475488"/>
           </a:xfrm>
           <a:prstGeom prst="rect">
             <a:avLst>
@@ -31337,14 +30864,14 @@
       </p:sp>
       <p:sp>
         <p:nvSpPr>
-          <p:cNvPr id="39" name="Text 37"/>
-          <p:cNvSpPr/>
-          <p:nvPr/>
-        </p:nvSpPr>
-        <p:spPr>
-          <a:xfrm>
-            <a:off x="7184136" y="3364992"/>
-            <a:ext cx="1225296" cy="475488"/>
+          <p:cNvPr id="38" name="Text 36"/>
+          <p:cNvSpPr/>
+          <p:nvPr/>
+        </p:nvSpPr>
+        <p:spPr>
+          <a:xfrm>
+            <a:off x="6317198" y="3364992"/>
+            <a:ext cx="1005840" cy="475488"/>
           </a:xfrm>
           <a:prstGeom prst="rect">
             <a:avLst/>
@@ -31368,7 +30895,7 @@
                 <a:ea typeface="Trebuchet MS" pitchFamily="34" charset="-122"/>
                 <a:cs typeface="Trebuchet MS" pitchFamily="34" charset="-120"/>
               </a:rPr>
-              <a:t>tive</a:t>
+              <a:t>ni</a:t>
             </a:r>
             <a:endParaRPr lang="en-US" sz="1400" dirty="0"/>
           </a:p>
@@ -31376,7 +30903,112 @@
       </p:sp>
       <p:sp>
         <p:nvSpPr>
+          <p:cNvPr id="39" name="Text 37"/>
+          <p:cNvSpPr/>
+          <p:nvPr/>
+        </p:nvSpPr>
+        <p:spPr>
+          <a:xfrm>
+            <a:off x="7323038" y="3364992"/>
+            <a:ext cx="78377" cy="475488"/>
+          </a:xfrm>
+          <a:prstGeom prst="rect">
+            <a:avLst/>
+          </a:prstGeom>
+          <a:noFill/>
+          <a:ln/>
+        </p:spPr>
+        <p:txBody>
+          <a:bodyPr wrap="square" lIns="0" tIns="0" rIns="0" bIns="0" rtlCol="0" anchor="ctr"/>
+          <a:lstStyle/>
+          <a:p>
+            <a:pPr algn="ctr" indent="0" marL="0">
+              <a:buNone/>
+            </a:pPr>
+            <a:r>
+              <a:rPr lang="en-US" sz="1600" b="1" dirty="0">
+                <a:solidFill>
+                  <a:srgbClr val="0D9488"/>
+                </a:solidFill>
+                <a:latin typeface="Trebuchet MS" pitchFamily="34" charset="0"/>
+                <a:ea typeface="Trebuchet MS" pitchFamily="34" charset="-122"/>
+                <a:cs typeface="Trebuchet MS" pitchFamily="34" charset="-120"/>
+              </a:rPr>
+              <a:t>·</a:t>
+            </a:r>
+            <a:endParaRPr lang="en-US" sz="1600" dirty="0"/>
+          </a:p>
+        </p:txBody>
+      </p:sp>
+      <p:sp>
+        <p:nvSpPr>
           <p:cNvPr id="40" name="Shape 38"/>
+          <p:cNvSpPr/>
+          <p:nvPr/>
+        </p:nvSpPr>
+        <p:spPr>
+          <a:xfrm>
+            <a:off x="7401415" y="3364992"/>
+            <a:ext cx="1005840" cy="475488"/>
+          </a:xfrm>
+          <a:prstGeom prst="rect">
+            <a:avLst>
+              <a:gd name="adj" fmla="val 9615"/>
+            </a:avLst>
+          </a:prstGeom>
+          <a:solidFill>
+            <a:srgbClr val="FFFFFF"/>
+          </a:solidFill>
+          <a:ln w="12700">
+            <a:solidFill>
+              <a:srgbClr val="0D9488"/>
+            </a:solidFill>
+            <a:prstDash val="solid"/>
+          </a:ln>
+        </p:spPr>
+      </p:sp>
+      <p:sp>
+        <p:nvSpPr>
+          <p:cNvPr id="41" name="Text 39"/>
+          <p:cNvSpPr/>
+          <p:nvPr/>
+        </p:nvSpPr>
+        <p:spPr>
+          <a:xfrm>
+            <a:off x="7401415" y="3364992"/>
+            <a:ext cx="1005840" cy="475488"/>
+          </a:xfrm>
+          <a:prstGeom prst="rect">
+            <a:avLst/>
+          </a:prstGeom>
+          <a:noFill/>
+          <a:ln/>
+        </p:spPr>
+        <p:txBody>
+          <a:bodyPr wrap="square" lIns="0" tIns="0" rIns="0" bIns="0" rtlCol="0" anchor="ctr"/>
+          <a:lstStyle/>
+          <a:p>
+            <a:pPr algn="ctr" indent="0" marL="0">
+              <a:buNone/>
+            </a:pPr>
+            <a:r>
+              <a:rPr lang="en-US" sz="1400" b="1" dirty="0">
+                <a:solidFill>
+                  <a:srgbClr val="0D9488"/>
+                </a:solidFill>
+                <a:latin typeface="Trebuchet MS" pitchFamily="34" charset="0"/>
+                <a:ea typeface="Trebuchet MS" pitchFamily="34" charset="-122"/>
+                <a:cs typeface="Trebuchet MS" pitchFamily="34" charset="-120"/>
+              </a:rPr>
+              <a:t>cate</a:t>
+            </a:r>
+            <a:endParaRPr lang="en-US" sz="1400" dirty="0"/>
+          </a:p>
+        </p:txBody>
+      </p:sp>
+      <p:sp>
+        <p:nvSpPr>
+          <p:cNvPr id="42" name="Shape 40"/>
           <p:cNvSpPr/>
           <p:nvPr/>
         </p:nvSpPr>
@@ -31403,7 +31035,7 @@
       </p:sp>
       <p:sp>
         <p:nvSpPr>
-          <p:cNvPr id="41" name="Text 39"/>
+          <p:cNvPr id="43" name="Text 41"/>
           <p:cNvSpPr/>
           <p:nvPr/>
         </p:nvSpPr>
@@ -31442,7 +31074,7 @@
       </p:sp>
       <p:sp>
         <p:nvSpPr>
-          <p:cNvPr id="42" name="Shape 40"/>
+          <p:cNvPr id="44" name="Shape 42"/>
           <p:cNvSpPr/>
           <p:nvPr/>
         </p:nvSpPr>
@@ -31469,14 +31101,14 @@
       </p:sp>
       <p:sp>
         <p:nvSpPr>
-          <p:cNvPr id="43" name="Shape 41"/>
-          <p:cNvSpPr/>
-          <p:nvPr/>
-        </p:nvSpPr>
-        <p:spPr>
-          <a:xfrm>
-            <a:off x="1952244" y="4169664"/>
-            <a:ext cx="543652" cy="384048"/>
+          <p:cNvPr id="45" name="Shape 43"/>
+          <p:cNvSpPr/>
+          <p:nvPr/>
+        </p:nvSpPr>
+        <p:spPr>
+          <a:xfrm>
+            <a:off x="1952596" y="4169664"/>
+            <a:ext cx="493776" cy="384048"/>
           </a:xfrm>
           <a:prstGeom prst="rect">
             <a:avLst>
@@ -31496,14 +31128,14 @@
       </p:sp>
       <p:sp>
         <p:nvSpPr>
-          <p:cNvPr id="44" name="Text 42"/>
-          <p:cNvSpPr/>
-          <p:nvPr/>
-        </p:nvSpPr>
-        <p:spPr>
-          <a:xfrm>
-            <a:off x="1952244" y="4169664"/>
-            <a:ext cx="543652" cy="384048"/>
+          <p:cNvPr id="46" name="Text 44"/>
+          <p:cNvSpPr/>
+          <p:nvPr/>
+        </p:nvSpPr>
+        <p:spPr>
+          <a:xfrm>
+            <a:off x="1952596" y="4169664"/>
+            <a:ext cx="493776" cy="384048"/>
           </a:xfrm>
           <a:prstGeom prst="rect">
             <a:avLst/>
@@ -31527,6 +31159,270 @@
                 <a:ea typeface="Trebuchet MS" pitchFamily="34" charset="-122"/>
                 <a:cs typeface="Trebuchet MS" pitchFamily="34" charset="-120"/>
               </a:rPr>
+              <a:t>i</a:t>
+            </a:r>
+            <a:endParaRPr lang="en-US" sz="900" dirty="0"/>
+          </a:p>
+        </p:txBody>
+      </p:sp>
+      <p:sp>
+        <p:nvSpPr>
+          <p:cNvPr id="47" name="Shape 45"/>
+          <p:cNvSpPr/>
+          <p:nvPr/>
+        </p:nvSpPr>
+        <p:spPr>
+          <a:xfrm>
+            <a:off x="2497015" y="4169664"/>
+            <a:ext cx="493776" cy="384048"/>
+          </a:xfrm>
+          <a:prstGeom prst="rect">
+            <a:avLst>
+              <a:gd name="adj" fmla="val 9524"/>
+            </a:avLst>
+          </a:prstGeom>
+          <a:solidFill>
+            <a:srgbClr val="FFFFFF"/>
+          </a:solidFill>
+          <a:ln w="12700">
+            <a:solidFill>
+              <a:srgbClr val="DB2777"/>
+            </a:solidFill>
+            <a:prstDash val="solid"/>
+          </a:ln>
+        </p:spPr>
+      </p:sp>
+      <p:sp>
+        <p:nvSpPr>
+          <p:cNvPr id="48" name="Text 46"/>
+          <p:cNvSpPr/>
+          <p:nvPr/>
+        </p:nvSpPr>
+        <p:spPr>
+          <a:xfrm>
+            <a:off x="2497015" y="4169664"/>
+            <a:ext cx="493776" cy="384048"/>
+          </a:xfrm>
+          <a:prstGeom prst="rect">
+            <a:avLst/>
+          </a:prstGeom>
+          <a:noFill/>
+          <a:ln/>
+        </p:spPr>
+        <p:txBody>
+          <a:bodyPr wrap="square" lIns="0" tIns="0" rIns="0" bIns="0" rtlCol="0" anchor="ctr"/>
+          <a:lstStyle/>
+          <a:p>
+            <a:pPr algn="ctr" indent="0" marL="0">
+              <a:buNone/>
+            </a:pPr>
+            <a:r>
+              <a:rPr lang="en-US" sz="900" b="1" dirty="0">
+                <a:solidFill>
+                  <a:srgbClr val="9D174D"/>
+                </a:solidFill>
+                <a:latin typeface="Trebuchet MS" pitchFamily="34" charset="0"/>
+                <a:ea typeface="Trebuchet MS" pitchFamily="34" charset="-122"/>
+                <a:cs typeface="Trebuchet MS" pitchFamily="34" charset="-120"/>
+              </a:rPr>
+              <a:t>n</a:t>
+            </a:r>
+            <a:endParaRPr lang="en-US" sz="900" dirty="0"/>
+          </a:p>
+        </p:txBody>
+      </p:sp>
+      <p:sp>
+        <p:nvSpPr>
+          <p:cNvPr id="49" name="Shape 47"/>
+          <p:cNvSpPr/>
+          <p:nvPr/>
+        </p:nvSpPr>
+        <p:spPr>
+          <a:xfrm>
+            <a:off x="3041435" y="4169664"/>
+            <a:ext cx="493776" cy="384048"/>
+          </a:xfrm>
+          <a:prstGeom prst="rect">
+            <a:avLst>
+              <a:gd name="adj" fmla="val 9524"/>
+            </a:avLst>
+          </a:prstGeom>
+          <a:solidFill>
+            <a:srgbClr val="FFFFFF"/>
+          </a:solidFill>
+          <a:ln w="12700">
+            <a:solidFill>
+              <a:srgbClr val="DB2777"/>
+            </a:solidFill>
+            <a:prstDash val="solid"/>
+          </a:ln>
+        </p:spPr>
+      </p:sp>
+      <p:sp>
+        <p:nvSpPr>
+          <p:cNvPr id="50" name="Text 48"/>
+          <p:cNvSpPr/>
+          <p:nvPr/>
+        </p:nvSpPr>
+        <p:spPr>
+          <a:xfrm>
+            <a:off x="3041435" y="4169664"/>
+            <a:ext cx="493776" cy="384048"/>
+          </a:xfrm>
+          <a:prstGeom prst="rect">
+            <a:avLst/>
+          </a:prstGeom>
+          <a:noFill/>
+          <a:ln/>
+        </p:spPr>
+        <p:txBody>
+          <a:bodyPr wrap="square" lIns="0" tIns="0" rIns="0" bIns="0" rtlCol="0" anchor="ctr"/>
+          <a:lstStyle/>
+          <a:p>
+            <a:pPr algn="ctr" indent="0" marL="0">
+              <a:buNone/>
+            </a:pPr>
+            <a:r>
+              <a:rPr lang="en-US" sz="900" b="1" dirty="0">
+                <a:solidFill>
+                  <a:srgbClr val="9D174D"/>
+                </a:solidFill>
+                <a:latin typeface="Trebuchet MS" pitchFamily="34" charset="0"/>
+                <a:ea typeface="Trebuchet MS" pitchFamily="34" charset="-122"/>
+                <a:cs typeface="Trebuchet MS" pitchFamily="34" charset="-120"/>
+              </a:rPr>
+              <a:t>t</a:t>
+            </a:r>
+            <a:endParaRPr lang="en-US" sz="900" dirty="0"/>
+          </a:p>
+        </p:txBody>
+      </p:sp>
+      <p:sp>
+        <p:nvSpPr>
+          <p:cNvPr id="51" name="Shape 49"/>
+          <p:cNvSpPr/>
+          <p:nvPr/>
+        </p:nvSpPr>
+        <p:spPr>
+          <a:xfrm>
+            <a:off x="3585855" y="4169664"/>
+            <a:ext cx="493776" cy="384048"/>
+          </a:xfrm>
+          <a:prstGeom prst="rect">
+            <a:avLst>
+              <a:gd name="adj" fmla="val 9524"/>
+            </a:avLst>
+          </a:prstGeom>
+          <a:solidFill>
+            <a:srgbClr val="FFFFFF"/>
+          </a:solidFill>
+          <a:ln w="12700">
+            <a:solidFill>
+              <a:srgbClr val="DB2777"/>
+            </a:solidFill>
+            <a:prstDash val="solid"/>
+          </a:ln>
+        </p:spPr>
+      </p:sp>
+      <p:sp>
+        <p:nvSpPr>
+          <p:cNvPr id="52" name="Text 50"/>
+          <p:cNvSpPr/>
+          <p:nvPr/>
+        </p:nvSpPr>
+        <p:spPr>
+          <a:xfrm>
+            <a:off x="3585855" y="4169664"/>
+            <a:ext cx="493776" cy="384048"/>
+          </a:xfrm>
+          <a:prstGeom prst="rect">
+            <a:avLst/>
+          </a:prstGeom>
+          <a:noFill/>
+          <a:ln/>
+        </p:spPr>
+        <p:txBody>
+          <a:bodyPr wrap="square" lIns="0" tIns="0" rIns="0" bIns="0" rtlCol="0" anchor="ctr"/>
+          <a:lstStyle/>
+          <a:p>
+            <a:pPr algn="ctr" indent="0" marL="0">
+              <a:buNone/>
+            </a:pPr>
+            <a:r>
+              <a:rPr lang="en-US" sz="900" b="1" dirty="0">
+                <a:solidFill>
+                  <a:srgbClr val="9D174D"/>
+                </a:solidFill>
+                <a:latin typeface="Trebuchet MS" pitchFamily="34" charset="0"/>
+                <a:ea typeface="Trebuchet MS" pitchFamily="34" charset="-122"/>
+                <a:cs typeface="Trebuchet MS" pitchFamily="34" charset="-120"/>
+              </a:rPr>
+              <a:t>er</a:t>
+            </a:r>
+            <a:endParaRPr lang="en-US" sz="900" dirty="0"/>
+          </a:p>
+        </p:txBody>
+      </p:sp>
+      <p:sp>
+        <p:nvSpPr>
+          <p:cNvPr id="53" name="Shape 51"/>
+          <p:cNvSpPr/>
+          <p:nvPr/>
+        </p:nvSpPr>
+        <p:spPr>
+          <a:xfrm>
+            <a:off x="4130274" y="4169664"/>
+            <a:ext cx="493776" cy="384048"/>
+          </a:xfrm>
+          <a:prstGeom prst="rect">
+            <a:avLst>
+              <a:gd name="adj" fmla="val 9524"/>
+            </a:avLst>
+          </a:prstGeom>
+          <a:solidFill>
+            <a:srgbClr val="FFFFFF"/>
+          </a:solidFill>
+          <a:ln w="12700">
+            <a:solidFill>
+              <a:srgbClr val="DB2777"/>
+            </a:solidFill>
+            <a:prstDash val="solid"/>
+          </a:ln>
+        </p:spPr>
+      </p:sp>
+      <p:sp>
+        <p:nvSpPr>
+          <p:cNvPr id="54" name="Text 52"/>
+          <p:cNvSpPr/>
+          <p:nvPr/>
+        </p:nvSpPr>
+        <p:spPr>
+          <a:xfrm>
+            <a:off x="4130274" y="4169664"/>
+            <a:ext cx="493776" cy="384048"/>
+          </a:xfrm>
+          <a:prstGeom prst="rect">
+            <a:avLst/>
+          </a:prstGeom>
+          <a:noFill/>
+          <a:ln/>
+        </p:spPr>
+        <p:txBody>
+          <a:bodyPr wrap="square" lIns="0" tIns="0" rIns="0" bIns="0" rtlCol="0" anchor="ctr"/>
+          <a:lstStyle/>
+          <a:p>
+            <a:pPr algn="ctr" indent="0" marL="0">
+              <a:buNone/>
+            </a:pPr>
+            <a:r>
+              <a:rPr lang="en-US" sz="900" b="1" dirty="0">
+                <a:solidFill>
+                  <a:srgbClr val="9D174D"/>
+                </a:solidFill>
+                <a:latin typeface="Trebuchet MS" pitchFamily="34" charset="0"/>
+                <a:ea typeface="Trebuchet MS" pitchFamily="34" charset="-122"/>
+                <a:cs typeface="Trebuchet MS" pitchFamily="34" charset="-120"/>
+              </a:rPr>
               <a:t>c</a:t>
             </a:r>
             <a:endParaRPr lang="en-US" sz="900" dirty="0"/>
@@ -31535,14 +31431,14 @@
       </p:sp>
       <p:sp>
         <p:nvSpPr>
-          <p:cNvPr id="45" name="Text 43"/>
-          <p:cNvSpPr/>
-          <p:nvPr/>
-        </p:nvSpPr>
-        <p:spPr>
-          <a:xfrm>
-            <a:off x="1952244" y="4572000"/>
-            <a:ext cx="543652" cy="219456"/>
+          <p:cNvPr id="55" name="Text 53"/>
+          <p:cNvSpPr/>
+          <p:nvPr/>
+        </p:nvSpPr>
+        <p:spPr>
+          <a:xfrm>
+            <a:off x="4130274" y="4572000"/>
+            <a:ext cx="493776" cy="219456"/>
           </a:xfrm>
           <a:prstGeom prst="rect">
             <a:avLst/>
@@ -31574,14 +31470,14 @@
       </p:sp>
       <p:sp>
         <p:nvSpPr>
-          <p:cNvPr id="46" name="Shape 44"/>
-          <p:cNvSpPr/>
-          <p:nvPr/>
-        </p:nvSpPr>
-        <p:spPr>
-          <a:xfrm>
-            <a:off x="2546188" y="4169664"/>
-            <a:ext cx="543652" cy="384048"/>
+          <p:cNvPr id="56" name="Shape 54"/>
+          <p:cNvSpPr/>
+          <p:nvPr/>
+        </p:nvSpPr>
+        <p:spPr>
+          <a:xfrm>
+            <a:off x="4674694" y="4169664"/>
+            <a:ext cx="493776" cy="384048"/>
           </a:xfrm>
           <a:prstGeom prst="rect">
             <a:avLst>
@@ -31601,14 +31497,14 @@
       </p:sp>
       <p:sp>
         <p:nvSpPr>
-          <p:cNvPr id="47" name="Text 45"/>
-          <p:cNvSpPr/>
-          <p:nvPr/>
-        </p:nvSpPr>
-        <p:spPr>
-          <a:xfrm>
-            <a:off x="2546188" y="4169664"/>
-            <a:ext cx="543652" cy="384048"/>
+          <p:cNvPr id="57" name="Text 55"/>
+          <p:cNvSpPr/>
+          <p:nvPr/>
+        </p:nvSpPr>
+        <p:spPr>
+          <a:xfrm>
+            <a:off x="4674694" y="4169664"/>
+            <a:ext cx="493776" cy="384048"/>
           </a:xfrm>
           <a:prstGeom prst="rect">
             <a:avLst/>
@@ -31640,14 +31536,14 @@
       </p:sp>
       <p:sp>
         <p:nvSpPr>
-          <p:cNvPr id="48" name="Shape 46"/>
-          <p:cNvSpPr/>
-          <p:nvPr/>
-        </p:nvSpPr>
-        <p:spPr>
-          <a:xfrm>
-            <a:off x="3140133" y="4169664"/>
-            <a:ext cx="543652" cy="384048"/>
+          <p:cNvPr id="58" name="Shape 56"/>
+          <p:cNvSpPr/>
+          <p:nvPr/>
+        </p:nvSpPr>
+        <p:spPr>
+          <a:xfrm>
+            <a:off x="5219114" y="4169664"/>
+            <a:ext cx="493776" cy="384048"/>
           </a:xfrm>
           <a:prstGeom prst="rect">
             <a:avLst>
@@ -31667,14 +31563,14 @@
       </p:sp>
       <p:sp>
         <p:nvSpPr>
-          <p:cNvPr id="49" name="Text 47"/>
-          <p:cNvSpPr/>
-          <p:nvPr/>
-        </p:nvSpPr>
-        <p:spPr>
-          <a:xfrm>
-            <a:off x="3140133" y="4169664"/>
-            <a:ext cx="543652" cy="384048"/>
+          <p:cNvPr id="59" name="Text 57"/>
+          <p:cNvSpPr/>
+          <p:nvPr/>
+        </p:nvSpPr>
+        <p:spPr>
+          <a:xfrm>
+            <a:off x="5219114" y="4169664"/>
+            <a:ext cx="493776" cy="384048"/>
           </a:xfrm>
           <a:prstGeom prst="rect">
             <a:avLst/>
@@ -31698,7 +31594,7 @@
                 <a:ea typeface="Trebuchet MS" pitchFamily="34" charset="-122"/>
                 <a:cs typeface="Trebuchet MS" pitchFamily="34" charset="-120"/>
               </a:rPr>
-              <a:t>mm</a:t>
+              <a:t>m</a:t>
             </a:r>
             <a:endParaRPr lang="en-US" sz="900" dirty="0"/>
           </a:p>
@@ -31706,14 +31602,14 @@
       </p:sp>
       <p:sp>
         <p:nvSpPr>
-          <p:cNvPr id="50" name="Shape 48"/>
-          <p:cNvSpPr/>
-          <p:nvPr/>
-        </p:nvSpPr>
-        <p:spPr>
-          <a:xfrm>
-            <a:off x="3734077" y="4169664"/>
-            <a:ext cx="543652" cy="384048"/>
+          <p:cNvPr id="60" name="Shape 58"/>
+          <p:cNvSpPr/>
+          <p:nvPr/>
+        </p:nvSpPr>
+        <p:spPr>
+          <a:xfrm>
+            <a:off x="5763534" y="4169664"/>
+            <a:ext cx="493776" cy="384048"/>
           </a:xfrm>
           <a:prstGeom prst="rect">
             <a:avLst>
@@ -31733,14 +31629,14 @@
       </p:sp>
       <p:sp>
         <p:nvSpPr>
-          <p:cNvPr id="51" name="Text 49"/>
-          <p:cNvSpPr/>
-          <p:nvPr/>
-        </p:nvSpPr>
-        <p:spPr>
-          <a:xfrm>
-            <a:off x="3734077" y="4169664"/>
-            <a:ext cx="543652" cy="384048"/>
+          <p:cNvPr id="61" name="Text 59"/>
+          <p:cNvSpPr/>
+          <p:nvPr/>
+        </p:nvSpPr>
+        <p:spPr>
+          <a:xfrm>
+            <a:off x="5763534" y="4169664"/>
+            <a:ext cx="493776" cy="384048"/>
           </a:xfrm>
           <a:prstGeom prst="rect">
             <a:avLst/>
@@ -31772,14 +31668,14 @@
       </p:sp>
       <p:sp>
         <p:nvSpPr>
-          <p:cNvPr id="52" name="Shape 50"/>
-          <p:cNvSpPr/>
-          <p:nvPr/>
-        </p:nvSpPr>
-        <p:spPr>
-          <a:xfrm>
-            <a:off x="4328021" y="4169664"/>
-            <a:ext cx="543652" cy="384048"/>
+          <p:cNvPr id="62" name="Shape 60"/>
+          <p:cNvSpPr/>
+          <p:nvPr/>
+        </p:nvSpPr>
+        <p:spPr>
+          <a:xfrm>
+            <a:off x="6307953" y="4169664"/>
+            <a:ext cx="493776" cy="384048"/>
           </a:xfrm>
           <a:prstGeom prst="rect">
             <a:avLst>
@@ -31799,14 +31695,14 @@
       </p:sp>
       <p:sp>
         <p:nvSpPr>
-          <p:cNvPr id="53" name="Text 51"/>
-          <p:cNvSpPr/>
-          <p:nvPr/>
-        </p:nvSpPr>
-        <p:spPr>
-          <a:xfrm>
-            <a:off x="4328021" y="4169664"/>
-            <a:ext cx="543652" cy="384048"/>
+          <p:cNvPr id="63" name="Text 61"/>
+          <p:cNvSpPr/>
+          <p:nvPr/>
+        </p:nvSpPr>
+        <p:spPr>
+          <a:xfrm>
+            <a:off x="6307953" y="4169664"/>
+            <a:ext cx="493776" cy="384048"/>
           </a:xfrm>
           <a:prstGeom prst="rect">
             <a:avLst/>
@@ -31838,14 +31734,14 @@
       </p:sp>
       <p:sp>
         <p:nvSpPr>
-          <p:cNvPr id="54" name="Shape 52"/>
-          <p:cNvSpPr/>
-          <p:nvPr/>
-        </p:nvSpPr>
-        <p:spPr>
-          <a:xfrm>
-            <a:off x="4921966" y="4169664"/>
-            <a:ext cx="543652" cy="384048"/>
+          <p:cNvPr id="64" name="Shape 62"/>
+          <p:cNvSpPr/>
+          <p:nvPr/>
+        </p:nvSpPr>
+        <p:spPr>
+          <a:xfrm>
+            <a:off x="6852373" y="4169664"/>
+            <a:ext cx="493776" cy="384048"/>
           </a:xfrm>
           <a:prstGeom prst="rect">
             <a:avLst>
@@ -31865,14 +31761,14 @@
       </p:sp>
       <p:sp>
         <p:nvSpPr>
-          <p:cNvPr id="55" name="Text 53"/>
-          <p:cNvSpPr/>
-          <p:nvPr/>
-        </p:nvSpPr>
-        <p:spPr>
-          <a:xfrm>
-            <a:off x="4921966" y="4169664"/>
-            <a:ext cx="543652" cy="384048"/>
+          <p:cNvPr id="65" name="Text 63"/>
+          <p:cNvSpPr/>
+          <p:nvPr/>
+        </p:nvSpPr>
+        <p:spPr>
+          <a:xfrm>
+            <a:off x="6852373" y="4169664"/>
+            <a:ext cx="493776" cy="384048"/>
           </a:xfrm>
           <a:prstGeom prst="rect">
             <a:avLst/>
@@ -31904,14 +31800,14 @@
       </p:sp>
       <p:sp>
         <p:nvSpPr>
-          <p:cNvPr id="56" name="Shape 54"/>
-          <p:cNvSpPr/>
-          <p:nvPr/>
-        </p:nvSpPr>
-        <p:spPr>
-          <a:xfrm>
-            <a:off x="5515910" y="4169664"/>
-            <a:ext cx="543652" cy="384048"/>
+          <p:cNvPr id="66" name="Shape 64"/>
+          <p:cNvSpPr/>
+          <p:nvPr/>
+        </p:nvSpPr>
+        <p:spPr>
+          <a:xfrm>
+            <a:off x="7396793" y="4169664"/>
+            <a:ext cx="493776" cy="384048"/>
           </a:xfrm>
           <a:prstGeom prst="rect">
             <a:avLst>
@@ -31931,14 +31827,14 @@
       </p:sp>
       <p:sp>
         <p:nvSpPr>
-          <p:cNvPr id="57" name="Text 55"/>
-          <p:cNvSpPr/>
-          <p:nvPr/>
-        </p:nvSpPr>
-        <p:spPr>
-          <a:xfrm>
-            <a:off x="5515910" y="4169664"/>
-            <a:ext cx="543652" cy="384048"/>
+          <p:cNvPr id="67" name="Text 65"/>
+          <p:cNvSpPr/>
+          <p:nvPr/>
+        </p:nvSpPr>
+        <p:spPr>
+          <a:xfrm>
+            <a:off x="7396793" y="4169664"/>
+            <a:ext cx="493776" cy="384048"/>
           </a:xfrm>
           <a:prstGeom prst="rect">
             <a:avLst/>
@@ -31970,14 +31866,14 @@
       </p:sp>
       <p:sp>
         <p:nvSpPr>
-          <p:cNvPr id="58" name="Text 56"/>
-          <p:cNvSpPr/>
-          <p:nvPr/>
-        </p:nvSpPr>
-        <p:spPr>
-          <a:xfrm>
-            <a:off x="5515910" y="4572000"/>
-            <a:ext cx="543652" cy="219456"/>
+          <p:cNvPr id="68" name="Text 66"/>
+          <p:cNvSpPr/>
+          <p:nvPr/>
+        </p:nvSpPr>
+        <p:spPr>
+          <a:xfrm>
+            <a:off x="7396793" y="4572000"/>
+            <a:ext cx="493776" cy="219456"/>
           </a:xfrm>
           <a:prstGeom prst="rect">
             <a:avLst/>
@@ -32009,14 +31905,14 @@
       </p:sp>
       <p:sp>
         <p:nvSpPr>
-          <p:cNvPr id="59" name="Shape 57"/>
-          <p:cNvSpPr/>
-          <p:nvPr/>
-        </p:nvSpPr>
-        <p:spPr>
-          <a:xfrm>
-            <a:off x="6109855" y="4169664"/>
-            <a:ext cx="543652" cy="384048"/>
+          <p:cNvPr id="69" name="Shape 67"/>
+          <p:cNvSpPr/>
+          <p:nvPr/>
+        </p:nvSpPr>
+        <p:spPr>
+          <a:xfrm>
+            <a:off x="7941212" y="4169664"/>
+            <a:ext cx="493776" cy="384048"/>
           </a:xfrm>
           <a:prstGeom prst="rect">
             <a:avLst>
@@ -32036,14 +31932,14 @@
       </p:sp>
       <p:sp>
         <p:nvSpPr>
-          <p:cNvPr id="60" name="Text 58"/>
-          <p:cNvSpPr/>
-          <p:nvPr/>
-        </p:nvSpPr>
-        <p:spPr>
-          <a:xfrm>
-            <a:off x="6109855" y="4169664"/>
-            <a:ext cx="543652" cy="384048"/>
+          <p:cNvPr id="70" name="Text 68"/>
+          <p:cNvSpPr/>
+          <p:nvPr/>
+        </p:nvSpPr>
+        <p:spPr>
+          <a:xfrm>
+            <a:off x="7941212" y="4169664"/>
+            <a:ext cx="493776" cy="384048"/>
           </a:xfrm>
           <a:prstGeom prst="rect">
             <a:avLst/>
@@ -32067,205 +31963,7 @@
                 <a:ea typeface="Trebuchet MS" pitchFamily="34" charset="-122"/>
                 <a:cs typeface="Trebuchet MS" pitchFamily="34" charset="-120"/>
               </a:rPr>
-              <a:t>a</a:t>
-            </a:r>
-            <a:endParaRPr lang="en-US" sz="900" dirty="0"/>
-          </a:p>
-        </p:txBody>
-      </p:sp>
-      <p:sp>
-        <p:nvSpPr>
-          <p:cNvPr id="61" name="Shape 59"/>
-          <p:cNvSpPr/>
-          <p:nvPr/>
-        </p:nvSpPr>
-        <p:spPr>
-          <a:xfrm>
-            <a:off x="6703799" y="4169664"/>
-            <a:ext cx="543652" cy="384048"/>
-          </a:xfrm>
-          <a:prstGeom prst="rect">
-            <a:avLst>
-              <a:gd name="adj" fmla="val 9524"/>
-            </a:avLst>
-          </a:prstGeom>
-          <a:solidFill>
-            <a:srgbClr val="FFFFFF"/>
-          </a:solidFill>
-          <a:ln w="12700">
-            <a:solidFill>
-              <a:srgbClr val="DB2777"/>
-            </a:solidFill>
-            <a:prstDash val="solid"/>
-          </a:ln>
-        </p:spPr>
-      </p:sp>
-      <p:sp>
-        <p:nvSpPr>
-          <p:cNvPr id="62" name="Text 60"/>
-          <p:cNvSpPr/>
-          <p:nvPr/>
-        </p:nvSpPr>
-        <p:spPr>
-          <a:xfrm>
-            <a:off x="6703799" y="4169664"/>
-            <a:ext cx="543652" cy="384048"/>
-          </a:xfrm>
-          <a:prstGeom prst="rect">
-            <a:avLst/>
-          </a:prstGeom>
-          <a:noFill/>
-          <a:ln/>
-        </p:spPr>
-        <p:txBody>
-          <a:bodyPr wrap="square" lIns="0" tIns="0" rIns="0" bIns="0" rtlCol="0" anchor="ctr"/>
-          <a:lstStyle/>
-          <a:p>
-            <a:pPr algn="ctr" indent="0" marL="0">
-              <a:buNone/>
-            </a:pPr>
-            <a:r>
-              <a:rPr lang="en-US" sz="900" b="1" dirty="0">
-                <a:solidFill>
-                  <a:srgbClr val="9D174D"/>
-                </a:solidFill>
-                <a:latin typeface="Trebuchet MS" pitchFamily="34" charset="0"/>
-                <a:ea typeface="Trebuchet MS" pitchFamily="34" charset="-122"/>
-                <a:cs typeface="Trebuchet MS" pitchFamily="34" charset="-120"/>
-              </a:rPr>
-              <a:t>t</a:t>
-            </a:r>
-            <a:endParaRPr lang="en-US" sz="900" dirty="0"/>
-          </a:p>
-        </p:txBody>
-      </p:sp>
-      <p:sp>
-        <p:nvSpPr>
-          <p:cNvPr id="63" name="Shape 61"/>
-          <p:cNvSpPr/>
-          <p:nvPr/>
-        </p:nvSpPr>
-        <p:spPr>
-          <a:xfrm>
-            <a:off x="7297743" y="4169664"/>
-            <a:ext cx="543652" cy="384048"/>
-          </a:xfrm>
-          <a:prstGeom prst="rect">
-            <a:avLst>
-              <a:gd name="adj" fmla="val 9524"/>
-            </a:avLst>
-          </a:prstGeom>
-          <a:solidFill>
-            <a:srgbClr val="FFFFFF"/>
-          </a:solidFill>
-          <a:ln w="12700">
-            <a:solidFill>
-              <a:srgbClr val="DB2777"/>
-            </a:solidFill>
-            <a:prstDash val="solid"/>
-          </a:ln>
-        </p:spPr>
-      </p:sp>
-      <p:sp>
-        <p:nvSpPr>
-          <p:cNvPr id="64" name="Text 62"/>
-          <p:cNvSpPr/>
-          <p:nvPr/>
-        </p:nvSpPr>
-        <p:spPr>
-          <a:xfrm>
-            <a:off x="7297743" y="4169664"/>
-            <a:ext cx="543652" cy="384048"/>
-          </a:xfrm>
-          <a:prstGeom prst="rect">
-            <a:avLst/>
-          </a:prstGeom>
-          <a:noFill/>
-          <a:ln/>
-        </p:spPr>
-        <p:txBody>
-          <a:bodyPr wrap="square" lIns="0" tIns="0" rIns="0" bIns="0" rtlCol="0" anchor="ctr"/>
-          <a:lstStyle/>
-          <a:p>
-            <a:pPr algn="ctr" indent="0" marL="0">
-              <a:buNone/>
-            </a:pPr>
-            <a:r>
-              <a:rPr lang="en-US" sz="900" b="1" dirty="0">
-                <a:solidFill>
-                  <a:srgbClr val="9D174D"/>
-                </a:solidFill>
-                <a:latin typeface="Trebuchet MS" pitchFamily="34" charset="0"/>
-                <a:ea typeface="Trebuchet MS" pitchFamily="34" charset="-122"/>
-                <a:cs typeface="Trebuchet MS" pitchFamily="34" charset="-120"/>
-              </a:rPr>
-              <a:t>i</a:t>
-            </a:r>
-            <a:endParaRPr lang="en-US" sz="900" dirty="0"/>
-          </a:p>
-        </p:txBody>
-      </p:sp>
-      <p:sp>
-        <p:nvSpPr>
-          <p:cNvPr id="65" name="Shape 63"/>
-          <p:cNvSpPr/>
-          <p:nvPr/>
-        </p:nvSpPr>
-        <p:spPr>
-          <a:xfrm>
-            <a:off x="7891688" y="4169664"/>
-            <a:ext cx="543652" cy="384048"/>
-          </a:xfrm>
-          <a:prstGeom prst="rect">
-            <a:avLst>
-              <a:gd name="adj" fmla="val 9524"/>
-            </a:avLst>
-          </a:prstGeom>
-          <a:solidFill>
-            <a:srgbClr val="FFFFFF"/>
-          </a:solidFill>
-          <a:ln w="12700">
-            <a:solidFill>
-              <a:srgbClr val="DB2777"/>
-            </a:solidFill>
-            <a:prstDash val="solid"/>
-          </a:ln>
-        </p:spPr>
-      </p:sp>
-      <p:sp>
-        <p:nvSpPr>
-          <p:cNvPr id="66" name="Text 64"/>
-          <p:cNvSpPr/>
-          <p:nvPr/>
-        </p:nvSpPr>
-        <p:spPr>
-          <a:xfrm>
-            <a:off x="7891688" y="4169664"/>
-            <a:ext cx="543652" cy="384048"/>
-          </a:xfrm>
-          <a:prstGeom prst="rect">
-            <a:avLst/>
-          </a:prstGeom>
-          <a:noFill/>
-          <a:ln/>
-        </p:spPr>
-        <p:txBody>
-          <a:bodyPr wrap="square" lIns="0" tIns="0" rIns="0" bIns="0" rtlCol="0" anchor="ctr"/>
-          <a:lstStyle/>
-          <a:p>
-            <a:pPr algn="ctr" indent="0" marL="0">
-              <a:buNone/>
-            </a:pPr>
-            <a:r>
-              <a:rPr lang="en-US" sz="900" b="1" dirty="0">
-                <a:solidFill>
-                  <a:srgbClr val="9D174D"/>
-                </a:solidFill>
-                <a:latin typeface="Trebuchet MS" pitchFamily="34" charset="0"/>
-                <a:ea typeface="Trebuchet MS" pitchFamily="34" charset="-122"/>
-                <a:cs typeface="Trebuchet MS" pitchFamily="34" charset="-120"/>
-              </a:rPr>
-              <a:t>ve</a:t>
+              <a:t>ate</a:t>
             </a:r>
             <a:endParaRPr lang="en-US" sz="900" dirty="0"/>
           </a:p>
@@ -32557,7 +32255,7 @@
                 <a:ea typeface="Calibri" pitchFamily="34" charset="-122"/>
                 <a:cs typeface="Calibri" pitchFamily="34" charset="-120"/>
               </a:rPr>
-              <a:t>Word Labs  •  wordlabs.app  •  Root: 'communicate' = to share or exchange information</a:t>
+              <a:t>Word Labs  •  wordlabs.app  •  Root: 'communicate' = share or exchange information</a:t>
             </a:r>
             <a:endParaRPr lang="en-US" sz="800" dirty="0"/>
           </a:p>
@@ -33384,7 +33082,7 @@
                 <a:ea typeface="Calibri" pitchFamily="34" charset="-122"/>
                 <a:cs typeface="Calibri" pitchFamily="34" charset="-120"/>
               </a:rPr>
-              <a:t>Word Labs  •  wordlabs.app  •  Root: 'communicate' = to share or exchange information</a:t>
+              <a:t>Word Labs  •  wordlabs.app  •  Root: 'communicate' = share or exchange information</a:t>
             </a:r>
             <a:endParaRPr lang="en-US" sz="800" dirty="0"/>
           </a:p>
@@ -33813,7 +33511,7 @@
                 <a:ea typeface="Calibri" pitchFamily="34" charset="-122"/>
                 <a:cs typeface="Calibri" pitchFamily="34" charset="-120"/>
               </a:rPr>
-              <a:t>to share or exchange information</a:t>
+              <a:t>share or exchange information</a:t>
             </a:r>
             <a:endParaRPr lang="en-US" sz="850" dirty="0"/>
           </a:p>
@@ -34520,7 +34218,7 @@
                 <a:ea typeface="Calibri" pitchFamily="34" charset="-122"/>
                 <a:cs typeface="Calibri" pitchFamily="34" charset="-120"/>
               </a:rPr>
-              <a:t>Word Labs  •  wordlabs.app  •  Root: 'communicate' = to share or exchange information</a:t>
+              <a:t>Word Labs  •  wordlabs.app  •  Root: 'communicate' = share or exchange information</a:t>
             </a:r>
             <a:endParaRPr lang="en-US" sz="800" dirty="0"/>
           </a:p>
@@ -34949,7 +34647,7 @@
                 <a:ea typeface="Calibri" pitchFamily="34" charset="-122"/>
                 <a:cs typeface="Calibri" pitchFamily="34" charset="-120"/>
               </a:rPr>
-              <a:t>to share or exchange information</a:t>
+              <a:t>share or exchange information</a:t>
             </a:r>
             <a:endParaRPr lang="en-US" sz="850" dirty="0"/>
           </a:p>
@@ -36208,7 +35906,7 @@
                 <a:ea typeface="Calibri" pitchFamily="34" charset="-122"/>
                 <a:cs typeface="Calibri" pitchFamily="34" charset="-120"/>
               </a:rPr>
-              <a:t>Word Labs  •  wordlabs.app  •  Root: 'communicate' = to share or exchange information</a:t>
+              <a:t>Word Labs  •  wordlabs.app  •  Root: 'communicate' = share or exchange information</a:t>
             </a:r>
             <a:endParaRPr lang="en-US" sz="800" dirty="0"/>
           </a:p>
@@ -36637,7 +36335,7 @@
                 <a:ea typeface="Calibri" pitchFamily="34" charset="-122"/>
                 <a:cs typeface="Calibri" pitchFamily="34" charset="-120"/>
               </a:rPr>
-              <a:t>to share or exchange information</a:t>
+              <a:t>share or exchange information</a:t>
             </a:r>
             <a:endParaRPr lang="en-US" sz="850" dirty="0"/>
           </a:p>
@@ -38000,7 +37698,7 @@
                 <a:ea typeface="Trebuchet MS" pitchFamily="34" charset="-122"/>
                 <a:cs typeface="Trebuchet MS" pitchFamily="34" charset="-120"/>
               </a:rPr>
-              <a:t>mm</a:t>
+              <a:t>m</a:t>
             </a:r>
             <a:endParaRPr lang="en-US" sz="900" dirty="0"/>
           </a:p>
@@ -38443,13 +38141,79 @@
       </p:sp>
       <p:sp>
         <p:nvSpPr>
-          <p:cNvPr id="75" name="Text 73"/>
-          <p:cNvSpPr/>
-          <p:nvPr/>
-        </p:nvSpPr>
-        <p:spPr>
-          <a:xfrm>
-            <a:off x="7085816" y="4572000"/>
+          <p:cNvPr id="75" name="Shape 73"/>
+          <p:cNvSpPr/>
+          <p:nvPr/>
+        </p:nvSpPr>
+        <p:spPr>
+          <a:xfrm>
+            <a:off x="7552421" y="4169664"/>
+            <a:ext cx="415399" cy="384048"/>
+          </a:xfrm>
+          <a:prstGeom prst="rect">
+            <a:avLst>
+              <a:gd name="adj" fmla="val 9524"/>
+            </a:avLst>
+          </a:prstGeom>
+          <a:solidFill>
+            <a:srgbClr val="FFFFFF"/>
+          </a:solidFill>
+          <a:ln w="12700">
+            <a:solidFill>
+              <a:srgbClr val="DB2777"/>
+            </a:solidFill>
+            <a:prstDash val="solid"/>
+          </a:ln>
+        </p:spPr>
+      </p:sp>
+      <p:sp>
+        <p:nvSpPr>
+          <p:cNvPr id="76" name="Text 74"/>
+          <p:cNvSpPr/>
+          <p:nvPr/>
+        </p:nvSpPr>
+        <p:spPr>
+          <a:xfrm>
+            <a:off x="7552421" y="4169664"/>
+            <a:ext cx="415399" cy="384048"/>
+          </a:xfrm>
+          <a:prstGeom prst="rect">
+            <a:avLst/>
+          </a:prstGeom>
+          <a:noFill/>
+          <a:ln/>
+        </p:spPr>
+        <p:txBody>
+          <a:bodyPr wrap="square" lIns="0" tIns="0" rIns="0" bIns="0" rtlCol="0" anchor="ctr"/>
+          <a:lstStyle/>
+          <a:p>
+            <a:pPr algn="ctr" indent="0" marL="0">
+              <a:buNone/>
+            </a:pPr>
+            <a:r>
+              <a:rPr lang="en-US" sz="900" b="1" dirty="0">
+                <a:solidFill>
+                  <a:srgbClr val="9D174D"/>
+                </a:solidFill>
+                <a:latin typeface="Trebuchet MS" pitchFamily="34" charset="0"/>
+                <a:ea typeface="Trebuchet MS" pitchFamily="34" charset="-122"/>
+                <a:cs typeface="Trebuchet MS" pitchFamily="34" charset="-120"/>
+              </a:rPr>
+              <a:t>io</a:t>
+            </a:r>
+            <a:endParaRPr lang="en-US" sz="900" dirty="0"/>
+          </a:p>
+        </p:txBody>
+      </p:sp>
+      <p:sp>
+        <p:nvSpPr>
+          <p:cNvPr id="77" name="Text 75"/>
+          <p:cNvSpPr/>
+          <p:nvPr/>
+        </p:nvSpPr>
+        <p:spPr>
+          <a:xfrm>
+            <a:off x="7552421" y="4572000"/>
             <a:ext cx="415399" cy="219456"/>
           </a:xfrm>
           <a:prstGeom prst="rect">
@@ -38477,72 +38241,6 @@
               <a:t>/sh/</a:t>
             </a:r>
             <a:endParaRPr lang="en-US" sz="750" dirty="0"/>
-          </a:p>
-        </p:txBody>
-      </p:sp>
-      <p:sp>
-        <p:nvSpPr>
-          <p:cNvPr id="76" name="Shape 74"/>
-          <p:cNvSpPr/>
-          <p:nvPr/>
-        </p:nvSpPr>
-        <p:spPr>
-          <a:xfrm>
-            <a:off x="7552421" y="4169664"/>
-            <a:ext cx="415399" cy="384048"/>
-          </a:xfrm>
-          <a:prstGeom prst="rect">
-            <a:avLst>
-              <a:gd name="adj" fmla="val 9524"/>
-            </a:avLst>
-          </a:prstGeom>
-          <a:solidFill>
-            <a:srgbClr val="FFFFFF"/>
-          </a:solidFill>
-          <a:ln w="12700">
-            <a:solidFill>
-              <a:srgbClr val="DB2777"/>
-            </a:solidFill>
-            <a:prstDash val="solid"/>
-          </a:ln>
-        </p:spPr>
-      </p:sp>
-      <p:sp>
-        <p:nvSpPr>
-          <p:cNvPr id="77" name="Text 75"/>
-          <p:cNvSpPr/>
-          <p:nvPr/>
-        </p:nvSpPr>
-        <p:spPr>
-          <a:xfrm>
-            <a:off x="7552421" y="4169664"/>
-            <a:ext cx="415399" cy="384048"/>
-          </a:xfrm>
-          <a:prstGeom prst="rect">
-            <a:avLst/>
-          </a:prstGeom>
-          <a:noFill/>
-          <a:ln/>
-        </p:spPr>
-        <p:txBody>
-          <a:bodyPr wrap="square" lIns="0" tIns="0" rIns="0" bIns="0" rtlCol="0" anchor="ctr"/>
-          <a:lstStyle/>
-          <a:p>
-            <a:pPr algn="ctr" indent="0" marL="0">
-              <a:buNone/>
-            </a:pPr>
-            <a:r>
-              <a:rPr lang="en-US" sz="900" b="1" dirty="0">
-                <a:solidFill>
-                  <a:srgbClr val="9D174D"/>
-                </a:solidFill>
-                <a:latin typeface="Trebuchet MS" pitchFamily="34" charset="0"/>
-                <a:ea typeface="Trebuchet MS" pitchFamily="34" charset="-122"/>
-                <a:cs typeface="Trebuchet MS" pitchFamily="34" charset="-120"/>
-              </a:rPr>
-              <a:t>io</a:t>
-            </a:r>
-            <a:endParaRPr lang="en-US" sz="900" dirty="0"/>
           </a:p>
         </p:txBody>
       </p:sp>
@@ -38898,7 +38596,7 @@
                 <a:ea typeface="Calibri" pitchFamily="34" charset="-122"/>
                 <a:cs typeface="Calibri" pitchFamily="34" charset="-120"/>
               </a:rPr>
-              <a:t>Word Labs  •  wordlabs.app  •  Root: 'communicate' = to share or exchange information</a:t>
+              <a:t>Word Labs  •  wordlabs.app  •  Root: 'communicate' = share or exchange information</a:t>
             </a:r>
             <a:endParaRPr lang="en-US" sz="800" dirty="0"/>
           </a:p>
@@ -40067,7 +39765,7 @@
                 <a:ea typeface="Calibri" pitchFamily="34" charset="-122"/>
                 <a:cs typeface="Calibri" pitchFamily="34" charset="-120"/>
               </a:rPr>
-              <a:t>Word Labs  •  wordlabs.app  •  Root: 'communicate' = to share or exchange information</a:t>
+              <a:t>Word Labs  •  wordlabs.app  •  Root: 'communicate' = share or exchange information</a:t>
             </a:r>
             <a:endParaRPr lang="en-US" sz="800" dirty="0"/>
           </a:p>
@@ -40368,7 +40066,7 @@
                 <a:ea typeface="Trebuchet MS" pitchFamily="34" charset="-122"/>
                 <a:cs typeface="Trebuchet MS" pitchFamily="34" charset="-120"/>
               </a:rPr>
-              <a:t>ex-</a:t>
+              <a:t>re-</a:t>
             </a:r>
             <a:endParaRPr lang="en-US" sz="1300" dirty="0"/>
           </a:p>
@@ -40560,7 +40258,7 @@
                 <a:ea typeface="Trebuchet MS" pitchFamily="34" charset="-122"/>
                 <a:cs typeface="Trebuchet MS" pitchFamily="34" charset="-120"/>
               </a:rPr>
-              <a:t>inter-</a:t>
+              <a:t>ex-</a:t>
             </a:r>
             <a:endParaRPr lang="en-US" sz="1300" dirty="0"/>
           </a:p>
@@ -40713,7 +40411,7 @@
                 <a:ea typeface="Trebuchet MS" pitchFamily="34" charset="-122"/>
                 <a:cs typeface="Trebuchet MS" pitchFamily="34" charset="-120"/>
               </a:rPr>
-              <a:t>mis-</a:t>
+              <a:t>inter-</a:t>
             </a:r>
             <a:endParaRPr lang="en-US" sz="1300" dirty="0"/>
           </a:p>
@@ -41019,7 +40717,7 @@
                 <a:ea typeface="Trebuchet MS" pitchFamily="34" charset="-122"/>
                 <a:cs typeface="Trebuchet MS" pitchFamily="34" charset="-120"/>
               </a:rPr>
-              <a:t>non-</a:t>
+              <a:t>mis-</a:t>
             </a:r>
             <a:endParaRPr lang="en-US" sz="1300" dirty="0"/>
           </a:p>
@@ -41213,7 +40911,7 @@
                 <a:ea typeface="Trebuchet MS" pitchFamily="34" charset="-122"/>
                 <a:cs typeface="Trebuchet MS" pitchFamily="34" charset="-120"/>
               </a:rPr>
-              <a:t>communication</a:t>
+              <a:t>communicate</a:t>
             </a:r>
             <a:endParaRPr lang="en-US" sz="1200" dirty="0"/>
           </a:p>
@@ -41279,7 +40977,7 @@
                 <a:ea typeface="Trebuchet MS" pitchFamily="34" charset="-122"/>
                 <a:cs typeface="Trebuchet MS" pitchFamily="34" charset="-120"/>
               </a:rPr>
-              <a:t>communicative</a:t>
+              <a:t>communication</a:t>
             </a:r>
             <a:endParaRPr lang="en-US" sz="1200" dirty="0"/>
           </a:p>
@@ -41345,7 +41043,7 @@
                 <a:ea typeface="Trebuchet MS" pitchFamily="34" charset="-122"/>
                 <a:cs typeface="Trebuchet MS" pitchFamily="34" charset="-120"/>
               </a:rPr>
-              <a:t>communicator</a:t>
+              <a:t>communicative</a:t>
             </a:r>
             <a:endParaRPr lang="en-US" sz="1200" dirty="0"/>
           </a:p>
@@ -41411,7 +41109,7 @@
                 <a:ea typeface="Trebuchet MS" pitchFamily="34" charset="-122"/>
                 <a:cs typeface="Trebuchet MS" pitchFamily="34" charset="-120"/>
               </a:rPr>
-              <a:t>excommunicate</a:t>
+              <a:t>communicator</a:t>
             </a:r>
             <a:endParaRPr lang="en-US" sz="1200" dirty="0"/>
           </a:p>
@@ -41477,7 +41175,7 @@
                 <a:ea typeface="Trebuchet MS" pitchFamily="34" charset="-122"/>
                 <a:cs typeface="Trebuchet MS" pitchFamily="34" charset="-120"/>
               </a:rPr>
-              <a:t>intercommunicate</a:t>
+              <a:t>communicable</a:t>
             </a:r>
             <a:endParaRPr lang="en-US" sz="1200" dirty="0"/>
           </a:p>
@@ -41543,7 +41241,7 @@
                 <a:ea typeface="Trebuchet MS" pitchFamily="34" charset="-122"/>
                 <a:cs typeface="Trebuchet MS" pitchFamily="34" charset="-120"/>
               </a:rPr>
-              <a:t>miscommunicate</a:t>
+              <a:t>excommunicate</a:t>
             </a:r>
             <a:endParaRPr lang="en-US" sz="1200" dirty="0"/>
           </a:p>
@@ -41609,7 +41307,7 @@
                 <a:ea typeface="Trebuchet MS" pitchFamily="34" charset="-122"/>
                 <a:cs typeface="Trebuchet MS" pitchFamily="34" charset="-120"/>
               </a:rPr>
-              <a:t>communicable</a:t>
+              <a:t>miscommunicate</a:t>
             </a:r>
             <a:endParaRPr lang="en-US" sz="1200" dirty="0"/>
           </a:p>
@@ -41675,7 +41373,7 @@
                 <a:ea typeface="Trebuchet MS" pitchFamily="34" charset="-122"/>
                 <a:cs typeface="Trebuchet MS" pitchFamily="34" charset="-120"/>
               </a:rPr>
-              <a:t>communicating</a:t>
+              <a:t>intercommunicate</a:t>
             </a:r>
             <a:endParaRPr lang="en-US" sz="1200" dirty="0"/>
           </a:p>
@@ -41967,7 +41665,7 @@
                 <a:ea typeface="Calibri" pitchFamily="34" charset="-122"/>
                 <a:cs typeface="Calibri" pitchFamily="34" charset="-120"/>
               </a:rPr>
-              <a:t>Word Labs  •  wordlabs.app  •  Root: 'communicate' = to share or exchange information</a:t>
+              <a:t>Word Labs  •  wordlabs.app  •  Root: 'communicate' = share or exchange information</a:t>
             </a:r>
             <a:endParaRPr lang="en-US" sz="800" dirty="0"/>
           </a:p>
@@ -42131,7 +41829,7 @@
                 <a:ea typeface="Calibri" pitchFamily="34" charset="-122"/>
                 <a:cs typeface="Calibri" pitchFamily="34" charset="-120"/>
               </a:rPr>
-              <a:t>The core part of a word carrying its basic meaning. For example, 'communicate' means 'to share or exchange information'.</a:t>
+              <a:t>The core part of a word carrying its basic meaning. For example, 'communicate' means 'share or exchange information'.</a:t>
             </a:r>
             <a:endParaRPr lang="en-US" sz="1350" dirty="0"/>
           </a:p>
@@ -42751,7 +42449,7 @@
                 <a:ea typeface="Calibri" pitchFamily="34" charset="-122"/>
                 <a:cs typeface="Calibri" pitchFamily="34" charset="-120"/>
               </a:rPr>
-              <a:t>Word Labs  •  wordlabs.app  •  Root: 'communicate' = to share or exchange information</a:t>
+              <a:t>Word Labs  •  wordlabs.app  •  Root: 'communicate' = share or exchange information</a:t>
             </a:r>
             <a:endParaRPr lang="en-US" sz="800" dirty="0"/>
           </a:p>
@@ -42863,7 +42561,7 @@
                 <a:ea typeface="Calibri" pitchFamily="34" charset="-122"/>
                 <a:cs typeface="Calibri" pitchFamily="34" charset="-120"/>
               </a:rPr>
-              <a:t>1.  The root 'communicate' comes from Latin.</a:t>
+              <a:t>1.  The prefix 'inter' in 'intercommunicate' means between or among groups.</a:t>
             </a:r>
             <a:endParaRPr lang="en-US" sz="1300" dirty="0"/>
           </a:p>
@@ -43002,7 +42700,7 @@
                 <a:ea typeface="Calibri" pitchFamily="34" charset="-122"/>
                 <a:cs typeface="Calibri" pitchFamily="34" charset="-120"/>
               </a:rPr>
-              <a:t>2.  The word 'miscommunicate' means to share information very clearly.</a:t>
+              <a:t>2.  The word 'miscommunicate' means to share a message very clearly.</a:t>
             </a:r>
             <a:endParaRPr lang="en-US" sz="1300" dirty="0"/>
           </a:p>
@@ -43141,7 +42839,7 @@
                 <a:ea typeface="Calibri" pitchFamily="34" charset="-122"/>
                 <a:cs typeface="Calibri" pitchFamily="34" charset="-120"/>
               </a:rPr>
-              <a:t>3.  A 'communicator' is a person who shares information with others.</a:t>
+              <a:t>3.  The suffix '-ive' in 'communicative' turns the word into a noun.</a:t>
             </a:r>
             <a:endParaRPr lang="en-US" sz="1300" dirty="0"/>
           </a:p>
@@ -43164,11 +42862,11 @@
             </a:avLst>
           </a:prstGeom>
           <a:solidFill>
-            <a:srgbClr val="DCFCE7"/>
-          </a:solidFill>
-          <a:ln w="12700">
-            <a:solidFill>
-              <a:srgbClr val="16A34A"/>
+            <a:srgbClr val="FEE2E2"/>
+          </a:solidFill>
+          <a:ln w="12700">
+            <a:solidFill>
+              <a:srgbClr val="DC2626"/>
             </a:solidFill>
             <a:prstDash val="solid"/>
           </a:ln>
@@ -43201,13 +42899,13 @@
             <a:r>
               <a:rPr lang="en-US" sz="1100" b="1" dirty="0">
                 <a:solidFill>
-                  <a:srgbClr val="16A34A"/>
+                  <a:srgbClr val="DC2626"/>
                 </a:solidFill>
                 <a:latin typeface="Trebuchet MS" pitchFamily="34" charset="0"/>
                 <a:ea typeface="Trebuchet MS" pitchFamily="34" charset="-122"/>
                 <a:cs typeface="Trebuchet MS" pitchFamily="34" charset="-120"/>
               </a:rPr>
-              <a:t>TRUE</a:t>
+              <a:t>FALSE</a:t>
             </a:r>
             <a:endParaRPr lang="en-US" sz="1100" dirty="0"/>
           </a:p>
@@ -43280,7 +42978,7 @@
                 <a:ea typeface="Calibri" pitchFamily="34" charset="-122"/>
                 <a:cs typeface="Calibri" pitchFamily="34" charset="-120"/>
               </a:rPr>
-              <a:t>4.  The suffix '-ion' can be added to 'communicate' to make 'communication'.</a:t>
+              <a:t>4.  The root 'communicate' comes from the Latin word 'communicare'.</a:t>
             </a:r>
             <a:endParaRPr lang="en-US" sz="1300" dirty="0"/>
           </a:p>
@@ -43419,7 +43117,7 @@
                 <a:ea typeface="Calibri" pitchFamily="34" charset="-122"/>
                 <a:cs typeface="Calibri" pitchFamily="34" charset="-120"/>
               </a:rPr>
-              <a:t>5.  The word 'communicative' means someone who refuses to talk to others.</a:t>
+              <a:t>5.  A communicator is someone who shares information with others.</a:t>
             </a:r>
             <a:endParaRPr lang="en-US" sz="1300" dirty="0"/>
           </a:p>
@@ -43442,11 +43140,11 @@
             </a:avLst>
           </a:prstGeom>
           <a:solidFill>
-            <a:srgbClr val="FEE2E2"/>
-          </a:solidFill>
-          <a:ln w="12700">
-            <a:solidFill>
-              <a:srgbClr val="DC2626"/>
+            <a:srgbClr val="DCFCE7"/>
+          </a:solidFill>
+          <a:ln w="12700">
+            <a:solidFill>
+              <a:srgbClr val="16A34A"/>
             </a:solidFill>
             <a:prstDash val="solid"/>
           </a:ln>
@@ -43479,13 +43177,13 @@
             <a:r>
               <a:rPr lang="en-US" sz="1100" b="1" dirty="0">
                 <a:solidFill>
-                  <a:srgbClr val="DC2626"/>
+                  <a:srgbClr val="16A34A"/>
                 </a:solidFill>
                 <a:latin typeface="Trebuchet MS" pitchFamily="34" charset="0"/>
                 <a:ea typeface="Trebuchet MS" pitchFamily="34" charset="-122"/>
                 <a:cs typeface="Trebuchet MS" pitchFamily="34" charset="-120"/>
               </a:rPr>
-              <a:t>FALSE</a:t>
+              <a:t>TRUE</a:t>
             </a:r>
             <a:endParaRPr lang="en-US" sz="1100" dirty="0"/>
           </a:p>
@@ -43777,7 +43475,7 @@
                 <a:ea typeface="Calibri" pitchFamily="34" charset="-122"/>
                 <a:cs typeface="Calibri" pitchFamily="34" charset="-120"/>
               </a:rPr>
-              <a:t>Word Labs  •  wordlabs.app  •  Root: 'communicate' = to share or exchange information</a:t>
+              <a:t>Word Labs  •  wordlabs.app  •  Root: 'communicate' = share or exchange information</a:t>
             </a:r>
             <a:endParaRPr lang="en-US" sz="800" dirty="0"/>
           </a:p>
@@ -43914,7 +43612,7 @@
                 <a:ea typeface="Trebuchet MS" pitchFamily="34" charset="-122"/>
                 <a:cs typeface="Trebuchet MS" pitchFamily="34" charset="-120"/>
               </a:rPr>
-              <a:t>to share or exchange information</a:t>
+              <a:t>share or exchange information</a:t>
             </a:r>
             <a:endParaRPr lang="en-US" sz="2000" dirty="0"/>
           </a:p>
@@ -44058,7 +43756,7 @@
                 <a:ea typeface="Trebuchet MS" pitchFamily="34" charset="-122"/>
                 <a:cs typeface="Trebuchet MS" pitchFamily="34" charset="-120"/>
               </a:rPr>
-              <a:t>communication</a:t>
+              <a:t>communicate</a:t>
             </a:r>
             <a:endParaRPr lang="en-US" sz="1300" dirty="0"/>
           </a:p>
@@ -44124,7 +43822,7 @@
                 <a:ea typeface="Trebuchet MS" pitchFamily="34" charset="-122"/>
                 <a:cs typeface="Trebuchet MS" pitchFamily="34" charset="-120"/>
               </a:rPr>
-              <a:t>communicative</a:t>
+              <a:t>communication</a:t>
             </a:r>
             <a:endParaRPr lang="en-US" sz="1300" dirty="0"/>
           </a:p>
@@ -44190,7 +43888,7 @@
                 <a:ea typeface="Trebuchet MS" pitchFamily="34" charset="-122"/>
                 <a:cs typeface="Trebuchet MS" pitchFamily="34" charset="-120"/>
               </a:rPr>
-              <a:t>communicator</a:t>
+              <a:t>communicative</a:t>
             </a:r>
             <a:endParaRPr lang="en-US" sz="1300" dirty="0"/>
           </a:p>
@@ -44256,7 +43954,7 @@
                 <a:ea typeface="Trebuchet MS" pitchFamily="34" charset="-122"/>
                 <a:cs typeface="Trebuchet MS" pitchFamily="34" charset="-120"/>
               </a:rPr>
-              <a:t>excommunicate</a:t>
+              <a:t>communicator</a:t>
             </a:r>
             <a:endParaRPr lang="en-US" sz="1300" dirty="0"/>
           </a:p>
@@ -44322,7 +44020,7 @@
                 <a:ea typeface="Trebuchet MS" pitchFamily="34" charset="-122"/>
                 <a:cs typeface="Trebuchet MS" pitchFamily="34" charset="-120"/>
               </a:rPr>
-              <a:t>intercommunicate</a:t>
+              <a:t>communicable</a:t>
             </a:r>
             <a:endParaRPr lang="en-US" sz="1300" dirty="0"/>
           </a:p>
@@ -44388,7 +44086,7 @@
                 <a:ea typeface="Trebuchet MS" pitchFamily="34" charset="-122"/>
                 <a:cs typeface="Trebuchet MS" pitchFamily="34" charset="-120"/>
               </a:rPr>
-              <a:t>miscommunicate</a:t>
+              <a:t>excommunicate</a:t>
             </a:r>
             <a:endParaRPr lang="en-US" sz="1300" dirty="0"/>
           </a:p>
@@ -44454,7 +44152,7 @@
                 <a:ea typeface="Trebuchet MS" pitchFamily="34" charset="-122"/>
                 <a:cs typeface="Trebuchet MS" pitchFamily="34" charset="-120"/>
               </a:rPr>
-              <a:t>communicable</a:t>
+              <a:t>miscommunicate</a:t>
             </a:r>
             <a:endParaRPr lang="en-US" sz="1300" dirty="0"/>
           </a:p>
@@ -44746,7 +44444,7 @@
                 <a:ea typeface="Calibri" pitchFamily="34" charset="-122"/>
                 <a:cs typeface="Calibri" pitchFamily="34" charset="-120"/>
               </a:rPr>
-              <a:t>Word Labs  •  wordlabs.app  •  Root: 'communicate' = to share or exchange information</a:t>
+              <a:t>Word Labs  •  wordlabs.app  •  Root: 'communicate' = share or exchange information</a:t>
             </a:r>
             <a:endParaRPr lang="en-US" sz="800" dirty="0"/>
           </a:p>
@@ -45047,7 +44745,7 @@
                 <a:ea typeface="Trebuchet MS" pitchFamily="34" charset="-122"/>
                 <a:cs typeface="Trebuchet MS" pitchFamily="34" charset="-120"/>
               </a:rPr>
-              <a:t>ex-</a:t>
+              <a:t>re-</a:t>
             </a:r>
             <a:endParaRPr lang="en-US" sz="1300" dirty="0"/>
           </a:p>
@@ -45239,7 +44937,7 @@
                 <a:ea typeface="Trebuchet MS" pitchFamily="34" charset="-122"/>
                 <a:cs typeface="Trebuchet MS" pitchFamily="34" charset="-120"/>
               </a:rPr>
-              <a:t>inter-</a:t>
+              <a:t>ex-</a:t>
             </a:r>
             <a:endParaRPr lang="en-US" sz="1300" dirty="0"/>
           </a:p>
@@ -45392,7 +45090,7 @@
                 <a:ea typeface="Trebuchet MS" pitchFamily="34" charset="-122"/>
                 <a:cs typeface="Trebuchet MS" pitchFamily="34" charset="-120"/>
               </a:rPr>
-              <a:t>mis-</a:t>
+              <a:t>inter-</a:t>
             </a:r>
             <a:endParaRPr lang="en-US" sz="1300" dirty="0"/>
           </a:p>
@@ -45698,7 +45396,7 @@
                 <a:ea typeface="Trebuchet MS" pitchFamily="34" charset="-122"/>
                 <a:cs typeface="Trebuchet MS" pitchFamily="34" charset="-120"/>
               </a:rPr>
-              <a:t>non-</a:t>
+              <a:t>mis-</a:t>
             </a:r>
             <a:endParaRPr lang="en-US" sz="1300" dirty="0"/>
           </a:p>
@@ -45899,7 +45597,7 @@
                 <a:ea typeface="Trebuchet MS" pitchFamily="34" charset="-122"/>
                 <a:cs typeface="Trebuchet MS" pitchFamily="34" charset="-120"/>
               </a:rPr>
-              <a:t>ex-</a:t>
+              <a:t>re-</a:t>
             </a:r>
             <a:endParaRPr lang="en-US" sz="1300" dirty="0"/>
           </a:p>
@@ -46228,7 +45926,7 @@
                 <a:ea typeface="Trebuchet MS" pitchFamily="34" charset="-122"/>
                 <a:cs typeface="Trebuchet MS" pitchFamily="34" charset="-120"/>
               </a:rPr>
-              <a:t>communication</a:t>
+              <a:t>communicate</a:t>
             </a:r>
             <a:endParaRPr lang="en-US" sz="1400" dirty="0"/>
           </a:p>
@@ -46520,7 +46218,7 @@
                 <a:ea typeface="Calibri" pitchFamily="34" charset="-122"/>
                 <a:cs typeface="Calibri" pitchFamily="34" charset="-120"/>
               </a:rPr>
-              <a:t>Word Labs  •  wordlabs.app  •  Root: 'communicate' = to share or exchange information</a:t>
+              <a:t>Word Labs  •  wordlabs.app  •  Root: 'communicate' = share or exchange information</a:t>
             </a:r>
             <a:endParaRPr lang="en-US" sz="800" dirty="0"/>
           </a:p>
@@ -46632,7 +46330,7 @@
                 <a:ea typeface="Trebuchet MS" pitchFamily="34" charset="-122"/>
                 <a:cs typeface="Trebuchet MS" pitchFamily="34" charset="-120"/>
               </a:rPr>
-              <a:t>communication</a:t>
+              <a:t>communicate</a:t>
             </a:r>
             <a:endParaRPr lang="en-US" sz="1200" dirty="0"/>
           </a:p>
@@ -46698,7 +46396,7 @@
                 <a:ea typeface="Calibri" pitchFamily="34" charset="-122"/>
                 <a:cs typeface="Calibri" pitchFamily="34" charset="-120"/>
               </a:rPr>
-              <a:t>Able to be passed on or shared, like a communicable disease that spreads from person to person.</a:t>
+              <a:t>To share information in a confusing way so the message is misunderstood.</a:t>
             </a:r>
             <a:endParaRPr lang="en-US" sz="1200" dirty="0"/>
           </a:p>
@@ -46771,7 +46469,7 @@
                 <a:ea typeface="Trebuchet MS" pitchFamily="34" charset="-122"/>
                 <a:cs typeface="Trebuchet MS" pitchFamily="34" charset="-120"/>
               </a:rPr>
-              <a:t>communicative</a:t>
+              <a:t>communication</a:t>
             </a:r>
             <a:endParaRPr lang="en-US" sz="1200" dirty="0"/>
           </a:p>
@@ -46837,7 +46535,7 @@
                 <a:ea typeface="Calibri" pitchFamily="34" charset="-122"/>
                 <a:cs typeface="Calibri" pitchFamily="34" charset="-120"/>
               </a:rPr>
-              <a:t>To officially stop someone from being part of a group or community.</a:t>
+              <a:t>A person who shares information or ideas with others.</a:t>
             </a:r>
             <a:endParaRPr lang="en-US" sz="1200" dirty="0"/>
           </a:p>
@@ -46910,7 +46608,7 @@
                 <a:ea typeface="Trebuchet MS" pitchFamily="34" charset="-122"/>
                 <a:cs typeface="Trebuchet MS" pitchFamily="34" charset="-120"/>
               </a:rPr>
-              <a:t>communicator</a:t>
+              <a:t>communicative</a:t>
             </a:r>
             <a:endParaRPr lang="en-US" sz="1200" dirty="0"/>
           </a:p>
@@ -46976,7 +46674,7 @@
                 <a:ea typeface="Calibri" pitchFamily="34" charset="-122"/>
                 <a:cs typeface="Calibri" pitchFamily="34" charset="-120"/>
               </a:rPr>
-              <a:t>To share information in a way that causes confusion or misunderstanding.</a:t>
+              <a:t>To officially remove someone from membership of a religious group.</a:t>
             </a:r>
             <a:endParaRPr lang="en-US" sz="1200" dirty="0"/>
           </a:p>
@@ -47049,7 +46747,7 @@
                 <a:ea typeface="Trebuchet MS" pitchFamily="34" charset="-122"/>
                 <a:cs typeface="Trebuchet MS" pitchFamily="34" charset="-120"/>
               </a:rPr>
-              <a:t>excommunicate</a:t>
+              <a:t>communicator</a:t>
             </a:r>
             <a:endParaRPr lang="en-US" sz="1200" dirty="0"/>
           </a:p>
@@ -47115,7 +46813,7 @@
                 <a:ea typeface="Calibri" pitchFamily="34" charset="-122"/>
                 <a:cs typeface="Calibri" pitchFamily="34" charset="-120"/>
               </a:rPr>
-              <a:t>To share information back and forth between two or more groups or people.</a:t>
+              <a:t>Able to be passed on or shared, often used about diseases that can spread.</a:t>
             </a:r>
             <a:endParaRPr lang="en-US" sz="1200" dirty="0"/>
           </a:p>
@@ -47188,7 +46886,7 @@
                 <a:ea typeface="Trebuchet MS" pitchFamily="34" charset="-122"/>
                 <a:cs typeface="Trebuchet MS" pitchFamily="34" charset="-120"/>
               </a:rPr>
-              <a:t>intercommunicate</a:t>
+              <a:t>communicable</a:t>
             </a:r>
             <a:endParaRPr lang="en-US" sz="1200" dirty="0"/>
           </a:p>
@@ -47254,7 +46952,7 @@
                 <a:ea typeface="Calibri" pitchFamily="34" charset="-122"/>
                 <a:cs typeface="Calibri" pitchFamily="34" charset="-120"/>
               </a:rPr>
-              <a:t>The act of sharing information or ideas with others.</a:t>
+              <a:t>To share information, ideas or feelings with someone else.</a:t>
             </a:r>
             <a:endParaRPr lang="en-US" sz="1200" dirty="0"/>
           </a:p>
@@ -47327,7 +47025,7 @@
                 <a:ea typeface="Trebuchet MS" pitchFamily="34" charset="-122"/>
                 <a:cs typeface="Trebuchet MS" pitchFamily="34" charset="-120"/>
               </a:rPr>
-              <a:t>miscommunicate</a:t>
+              <a:t>excommunicate</a:t>
             </a:r>
             <a:endParaRPr lang="en-US" sz="1200" dirty="0"/>
           </a:p>
@@ -47393,7 +47091,7 @@
                 <a:ea typeface="Calibri" pitchFamily="34" charset="-122"/>
                 <a:cs typeface="Calibri" pitchFamily="34" charset="-120"/>
               </a:rPr>
-              <a:t>A person who shares information or ideas with others.</a:t>
+              <a:t>Willing and able to share information or talk with others easily.</a:t>
             </a:r>
             <a:endParaRPr lang="en-US" sz="1200" dirty="0"/>
           </a:p>
@@ -47466,7 +47164,7 @@
                 <a:ea typeface="Trebuchet MS" pitchFamily="34" charset="-122"/>
                 <a:cs typeface="Trebuchet MS" pitchFamily="34" charset="-120"/>
               </a:rPr>
-              <a:t>communicable</a:t>
+              <a:t>miscommunicate</a:t>
             </a:r>
             <a:endParaRPr lang="en-US" sz="1200" dirty="0"/>
           </a:p>
@@ -47532,7 +47230,7 @@
                 <a:ea typeface="Calibri" pitchFamily="34" charset="-122"/>
                 <a:cs typeface="Calibri" pitchFamily="34" charset="-120"/>
               </a:rPr>
-              <a:t>Describing someone who is good at sharing information and talking with others.</a:t>
+              <a:t>The act of sharing information between people, like talking, writing or signing.</a:t>
             </a:r>
             <a:endParaRPr lang="en-US" sz="1200" dirty="0"/>
           </a:p>
@@ -47824,7 +47522,7 @@
                 <a:ea typeface="Calibri" pitchFamily="34" charset="-122"/>
                 <a:cs typeface="Calibri" pitchFamily="34" charset="-120"/>
               </a:rPr>
-              <a:t>Word Labs  •  wordlabs.app  •  Root: 'communicate' = to share or exchange information</a:t>
+              <a:t>Word Labs  •  wordlabs.app  •  Root: 'communicate' = share or exchange information</a:t>
             </a:r>
             <a:endParaRPr lang="en-US" sz="800" dirty="0"/>
           </a:p>
@@ -48027,7 +47725,7 @@
                 <a:ea typeface="Calibri" pitchFamily="34" charset="-122"/>
                 <a:cs typeface="Calibri" pitchFamily="34" charset="-120"/>
               </a:rPr>
-              <a:t>It is important to communicate clearly so that everyone in the group understands the plan.</a:t>
+              <a:t>Scientists use special radio signals to communicate with satellites orbiting the Earth.</a:t>
             </a:r>
             <a:endParaRPr lang="en-US" sz="1500" dirty="0"/>
           </a:p>
@@ -48191,7 +47889,7 @@
                 <a:ea typeface="Calibri" pitchFamily="34" charset="-122"/>
                 <a:cs typeface="Calibri" pitchFamily="34" charset="-120"/>
               </a:rPr>
-              <a:t>The doctor explained that the illness was communicable, meaning it could spread from one person to another.</a:t>
+              <a:t>Good communication between teammates helps a sports team work together and win.</a:t>
             </a:r>
             <a:endParaRPr lang="en-US" sz="1500" dirty="0"/>
           </a:p>
@@ -48355,7 +48053,7 @@
                 <a:ea typeface="Calibri" pitchFamily="34" charset="-122"/>
                 <a:cs typeface="Calibri" pitchFamily="34" charset="-120"/>
               </a:rPr>
-              <a:t>There was a miscommunication between the two teams, so they ended up doing the same task twice.</a:t>
+              <a:t>She was an excellent communicator who always explained her ideas clearly to the class.</a:t>
             </a:r>
             <a:endParaRPr lang="en-US" sz="1500" dirty="0"/>
           </a:p>

--- a/output/wordlabs-communicate-3day.pptx
+++ b/output/wordlabs-communicate-3day.pptx
@@ -11166,11 +11166,11 @@
         <p:spPr>
           <a:xfrm>
             <a:off x="1874520" y="4096512"/>
-            <a:ext cx="6903720" cy="804672"/>
+            <a:ext cx="6903720" cy="658368"/>
           </a:xfrm>
           <a:prstGeom prst="rect">
             <a:avLst>
-              <a:gd name="adj" fmla="val 6818"/>
+              <a:gd name="adj" fmla="val 8333"/>
             </a:avLst>
           </a:prstGeom>
           <a:solidFill>
@@ -11192,12 +11192,12 @@
         </p:nvSpPr>
         <p:spPr>
           <a:xfrm>
-            <a:off x="1952244" y="4169664"/>
-            <a:ext cx="543652" cy="384048"/>
+            <a:off x="1952596" y="4169664"/>
+            <a:ext cx="493776" cy="475488"/>
           </a:xfrm>
           <a:prstGeom prst="rect">
             <a:avLst>
-              <a:gd name="adj" fmla="val 9524"/>
+              <a:gd name="adj" fmla="val 7692"/>
             </a:avLst>
           </a:prstGeom>
           <a:solidFill>
@@ -11219,8 +11219,8 @@
         </p:nvSpPr>
         <p:spPr>
           <a:xfrm>
-            <a:off x="1952244" y="4169664"/>
-            <a:ext cx="543652" cy="384048"/>
+            <a:off x="1952596" y="4169664"/>
+            <a:ext cx="493776" cy="475488"/>
           </a:xfrm>
           <a:prstGeom prst="rect">
             <a:avLst/>
@@ -11252,57 +11252,18 @@
       </p:sp>
       <p:sp>
         <p:nvSpPr>
-          <p:cNvPr id="45" name="Text 43"/>
-          <p:cNvSpPr/>
-          <p:nvPr/>
-        </p:nvSpPr>
-        <p:spPr>
-          <a:xfrm>
-            <a:off x="1952244" y="4572000"/>
-            <a:ext cx="543652" cy="219456"/>
-          </a:xfrm>
-          <a:prstGeom prst="rect">
-            <a:avLst/>
-          </a:prstGeom>
-          <a:noFill/>
-          <a:ln/>
-        </p:spPr>
-        <p:txBody>
-          <a:bodyPr wrap="square" lIns="0" tIns="0" rIns="0" bIns="0" rtlCol="0" anchor="t"/>
-          <a:lstStyle/>
-          <a:p>
-            <a:pPr algn="ctr" indent="0" marL="0">
-              <a:buNone/>
-            </a:pPr>
-            <a:r>
-              <a:rPr lang="en-US" sz="750" i="1" dirty="0">
-                <a:solidFill>
-                  <a:srgbClr val="94A3B8"/>
-                </a:solidFill>
-                <a:latin typeface="Calibri" pitchFamily="34" charset="0"/>
-                <a:ea typeface="Calibri" pitchFamily="34" charset="-122"/>
-                <a:cs typeface="Calibri" pitchFamily="34" charset="-120"/>
-              </a:rPr>
-              <a:t>/k/</a:t>
-            </a:r>
-            <a:endParaRPr lang="en-US" sz="750" dirty="0"/>
-          </a:p>
-        </p:txBody>
-      </p:sp>
-      <p:sp>
-        <p:nvSpPr>
-          <p:cNvPr id="46" name="Shape 44"/>
-          <p:cNvSpPr/>
-          <p:nvPr/>
-        </p:nvSpPr>
-        <p:spPr>
-          <a:xfrm>
-            <a:off x="2546188" y="4169664"/>
-            <a:ext cx="543652" cy="384048"/>
+          <p:cNvPr id="45" name="Shape 43"/>
+          <p:cNvSpPr/>
+          <p:nvPr/>
+        </p:nvSpPr>
+        <p:spPr>
+          <a:xfrm>
+            <a:off x="2497015" y="4169664"/>
+            <a:ext cx="493776" cy="475488"/>
           </a:xfrm>
           <a:prstGeom prst="rect">
             <a:avLst>
-              <a:gd name="adj" fmla="val 9524"/>
+              <a:gd name="adj" fmla="val 7692"/>
             </a:avLst>
           </a:prstGeom>
           <a:solidFill>
@@ -11318,14 +11279,14 @@
       </p:sp>
       <p:sp>
         <p:nvSpPr>
-          <p:cNvPr id="47" name="Text 45"/>
-          <p:cNvSpPr/>
-          <p:nvPr/>
-        </p:nvSpPr>
-        <p:spPr>
-          <a:xfrm>
-            <a:off x="2546188" y="4169664"/>
-            <a:ext cx="543652" cy="384048"/>
+          <p:cNvPr id="46" name="Text 44"/>
+          <p:cNvSpPr/>
+          <p:nvPr/>
+        </p:nvSpPr>
+        <p:spPr>
+          <a:xfrm>
+            <a:off x="2497015" y="4169664"/>
+            <a:ext cx="493776" cy="475488"/>
           </a:xfrm>
           <a:prstGeom prst="rect">
             <a:avLst/>
@@ -11357,18 +11318,18 @@
       </p:sp>
       <p:sp>
         <p:nvSpPr>
-          <p:cNvPr id="48" name="Shape 46"/>
-          <p:cNvSpPr/>
-          <p:nvPr/>
-        </p:nvSpPr>
-        <p:spPr>
-          <a:xfrm>
-            <a:off x="3140133" y="4169664"/>
-            <a:ext cx="543652" cy="384048"/>
+          <p:cNvPr id="47" name="Shape 45"/>
+          <p:cNvSpPr/>
+          <p:nvPr/>
+        </p:nvSpPr>
+        <p:spPr>
+          <a:xfrm>
+            <a:off x="3041435" y="4169664"/>
+            <a:ext cx="493776" cy="475488"/>
           </a:xfrm>
           <a:prstGeom prst="rect">
             <a:avLst>
-              <a:gd name="adj" fmla="val 9524"/>
+              <a:gd name="adj" fmla="val 7692"/>
             </a:avLst>
           </a:prstGeom>
           <a:solidFill>
@@ -11384,14 +11345,14 @@
       </p:sp>
       <p:sp>
         <p:nvSpPr>
-          <p:cNvPr id="49" name="Text 47"/>
-          <p:cNvSpPr/>
-          <p:nvPr/>
-        </p:nvSpPr>
-        <p:spPr>
-          <a:xfrm>
-            <a:off x="3140133" y="4169664"/>
-            <a:ext cx="543652" cy="384048"/>
+          <p:cNvPr id="48" name="Text 46"/>
+          <p:cNvSpPr/>
+          <p:nvPr/>
+        </p:nvSpPr>
+        <p:spPr>
+          <a:xfrm>
+            <a:off x="3041435" y="4169664"/>
+            <a:ext cx="493776" cy="475488"/>
           </a:xfrm>
           <a:prstGeom prst="rect">
             <a:avLst/>
@@ -11415,7 +11376,7 @@
                 <a:ea typeface="Trebuchet MS" pitchFamily="34" charset="-122"/>
                 <a:cs typeface="Trebuchet MS" pitchFamily="34" charset="-120"/>
               </a:rPr>
-              <a:t>m</a:t>
+              <a:t>mm</a:t>
             </a:r>
             <a:endParaRPr lang="en-US" sz="900" dirty="0"/>
           </a:p>
@@ -11423,18 +11384,18 @@
       </p:sp>
       <p:sp>
         <p:nvSpPr>
-          <p:cNvPr id="50" name="Shape 48"/>
-          <p:cNvSpPr/>
-          <p:nvPr/>
-        </p:nvSpPr>
-        <p:spPr>
-          <a:xfrm>
-            <a:off x="3734077" y="4169664"/>
-            <a:ext cx="543652" cy="384048"/>
+          <p:cNvPr id="49" name="Shape 47"/>
+          <p:cNvSpPr/>
+          <p:nvPr/>
+        </p:nvSpPr>
+        <p:spPr>
+          <a:xfrm>
+            <a:off x="3585855" y="4169664"/>
+            <a:ext cx="493776" cy="475488"/>
           </a:xfrm>
           <a:prstGeom prst="rect">
             <a:avLst>
-              <a:gd name="adj" fmla="val 9524"/>
+              <a:gd name="adj" fmla="val 7692"/>
             </a:avLst>
           </a:prstGeom>
           <a:solidFill>
@@ -11450,14 +11411,14 @@
       </p:sp>
       <p:sp>
         <p:nvSpPr>
-          <p:cNvPr id="51" name="Text 49"/>
-          <p:cNvSpPr/>
-          <p:nvPr/>
-        </p:nvSpPr>
-        <p:spPr>
-          <a:xfrm>
-            <a:off x="3734077" y="4169664"/>
-            <a:ext cx="543652" cy="384048"/>
+          <p:cNvPr id="50" name="Text 48"/>
+          <p:cNvSpPr/>
+          <p:nvPr/>
+        </p:nvSpPr>
+        <p:spPr>
+          <a:xfrm>
+            <a:off x="3585855" y="4169664"/>
+            <a:ext cx="493776" cy="475488"/>
           </a:xfrm>
           <a:prstGeom prst="rect">
             <a:avLst/>
@@ -11489,18 +11450,18 @@
       </p:sp>
       <p:sp>
         <p:nvSpPr>
-          <p:cNvPr id="52" name="Shape 50"/>
-          <p:cNvSpPr/>
-          <p:nvPr/>
-        </p:nvSpPr>
-        <p:spPr>
-          <a:xfrm>
-            <a:off x="4328021" y="4169664"/>
-            <a:ext cx="543652" cy="384048"/>
+          <p:cNvPr id="51" name="Shape 49"/>
+          <p:cNvSpPr/>
+          <p:nvPr/>
+        </p:nvSpPr>
+        <p:spPr>
+          <a:xfrm>
+            <a:off x="4130274" y="4169664"/>
+            <a:ext cx="493776" cy="475488"/>
           </a:xfrm>
           <a:prstGeom prst="rect">
             <a:avLst>
-              <a:gd name="adj" fmla="val 9524"/>
+              <a:gd name="adj" fmla="val 7692"/>
             </a:avLst>
           </a:prstGeom>
           <a:solidFill>
@@ -11516,14 +11477,14 @@
       </p:sp>
       <p:sp>
         <p:nvSpPr>
-          <p:cNvPr id="53" name="Text 51"/>
-          <p:cNvSpPr/>
-          <p:nvPr/>
-        </p:nvSpPr>
-        <p:spPr>
-          <a:xfrm>
-            <a:off x="4328021" y="4169664"/>
-            <a:ext cx="543652" cy="384048"/>
+          <p:cNvPr id="52" name="Text 50"/>
+          <p:cNvSpPr/>
+          <p:nvPr/>
+        </p:nvSpPr>
+        <p:spPr>
+          <a:xfrm>
+            <a:off x="4130274" y="4169664"/>
+            <a:ext cx="493776" cy="475488"/>
           </a:xfrm>
           <a:prstGeom prst="rect">
             <a:avLst/>
@@ -11555,18 +11516,18 @@
       </p:sp>
       <p:sp>
         <p:nvSpPr>
-          <p:cNvPr id="54" name="Shape 52"/>
-          <p:cNvSpPr/>
-          <p:nvPr/>
-        </p:nvSpPr>
-        <p:spPr>
-          <a:xfrm>
-            <a:off x="4921966" y="4169664"/>
-            <a:ext cx="543652" cy="384048"/>
+          <p:cNvPr id="53" name="Shape 51"/>
+          <p:cNvSpPr/>
+          <p:nvPr/>
+        </p:nvSpPr>
+        <p:spPr>
+          <a:xfrm>
+            <a:off x="4674694" y="4169664"/>
+            <a:ext cx="493776" cy="475488"/>
           </a:xfrm>
           <a:prstGeom prst="rect">
             <a:avLst>
-              <a:gd name="adj" fmla="val 9524"/>
+              <a:gd name="adj" fmla="val 7692"/>
             </a:avLst>
           </a:prstGeom>
           <a:solidFill>
@@ -11582,14 +11543,14 @@
       </p:sp>
       <p:sp>
         <p:nvSpPr>
-          <p:cNvPr id="55" name="Text 53"/>
-          <p:cNvSpPr/>
-          <p:nvPr/>
-        </p:nvSpPr>
-        <p:spPr>
-          <a:xfrm>
-            <a:off x="4921966" y="4169664"/>
-            <a:ext cx="543652" cy="384048"/>
+          <p:cNvPr id="54" name="Text 52"/>
+          <p:cNvSpPr/>
+          <p:nvPr/>
+        </p:nvSpPr>
+        <p:spPr>
+          <a:xfrm>
+            <a:off x="4674694" y="4169664"/>
+            <a:ext cx="493776" cy="475488"/>
           </a:xfrm>
           <a:prstGeom prst="rect">
             <a:avLst/>
@@ -11621,18 +11582,18 @@
       </p:sp>
       <p:sp>
         <p:nvSpPr>
-          <p:cNvPr id="56" name="Shape 54"/>
-          <p:cNvSpPr/>
-          <p:nvPr/>
-        </p:nvSpPr>
-        <p:spPr>
-          <a:xfrm>
-            <a:off x="5515910" y="4169664"/>
-            <a:ext cx="543652" cy="384048"/>
+          <p:cNvPr id="55" name="Shape 53"/>
+          <p:cNvSpPr/>
+          <p:nvPr/>
+        </p:nvSpPr>
+        <p:spPr>
+          <a:xfrm>
+            <a:off x="5219114" y="4169664"/>
+            <a:ext cx="493776" cy="475488"/>
           </a:xfrm>
           <a:prstGeom prst="rect">
             <a:avLst>
-              <a:gd name="adj" fmla="val 9524"/>
+              <a:gd name="adj" fmla="val 7692"/>
             </a:avLst>
           </a:prstGeom>
           <a:solidFill>
@@ -11648,14 +11609,14 @@
       </p:sp>
       <p:sp>
         <p:nvSpPr>
-          <p:cNvPr id="57" name="Text 55"/>
-          <p:cNvSpPr/>
-          <p:nvPr/>
-        </p:nvSpPr>
-        <p:spPr>
-          <a:xfrm>
-            <a:off x="5515910" y="4169664"/>
-            <a:ext cx="543652" cy="384048"/>
+          <p:cNvPr id="56" name="Text 54"/>
+          <p:cNvSpPr/>
+          <p:nvPr/>
+        </p:nvSpPr>
+        <p:spPr>
+          <a:xfrm>
+            <a:off x="5219114" y="4169664"/>
+            <a:ext cx="493776" cy="475488"/>
           </a:xfrm>
           <a:prstGeom prst="rect">
             <a:avLst/>
@@ -11687,40 +11648,67 @@
       </p:sp>
       <p:sp>
         <p:nvSpPr>
+          <p:cNvPr id="57" name="Shape 55"/>
+          <p:cNvSpPr/>
+          <p:nvPr/>
+        </p:nvSpPr>
+        <p:spPr>
+          <a:xfrm>
+            <a:off x="5763534" y="4169664"/>
+            <a:ext cx="493776" cy="475488"/>
+          </a:xfrm>
+          <a:prstGeom prst="rect">
+            <a:avLst>
+              <a:gd name="adj" fmla="val 7692"/>
+            </a:avLst>
+          </a:prstGeom>
+          <a:solidFill>
+            <a:srgbClr val="FFFFFF"/>
+          </a:solidFill>
+          <a:ln w="12700">
+            <a:solidFill>
+              <a:srgbClr val="DB2777"/>
+            </a:solidFill>
+            <a:prstDash val="solid"/>
+          </a:ln>
+        </p:spPr>
+      </p:sp>
+      <p:sp>
+        <p:nvSpPr>
           <p:cNvPr id="58" name="Text 56"/>
           <p:cNvSpPr/>
           <p:nvPr/>
         </p:nvSpPr>
         <p:spPr>
           <a:xfrm>
-            <a:off x="5515910" y="4572000"/>
-            <a:ext cx="543652" cy="219456"/>
-          </a:xfrm>
-          <a:prstGeom prst="rect">
-            <a:avLst/>
-          </a:prstGeom>
-          <a:noFill/>
-          <a:ln/>
-        </p:spPr>
-        <p:txBody>
-          <a:bodyPr wrap="square" lIns="0" tIns="0" rIns="0" bIns="0" rtlCol="0" anchor="t"/>
-          <a:lstStyle/>
-          <a:p>
-            <a:pPr algn="ctr" indent="0" marL="0">
-              <a:buNone/>
-            </a:pPr>
-            <a:r>
-              <a:rPr lang="en-US" sz="750" i="1" dirty="0">
-                <a:solidFill>
-                  <a:srgbClr val="94A3B8"/>
-                </a:solidFill>
-                <a:latin typeface="Calibri" pitchFamily="34" charset="0"/>
-                <a:ea typeface="Calibri" pitchFamily="34" charset="-122"/>
-                <a:cs typeface="Calibri" pitchFamily="34" charset="-120"/>
-              </a:rPr>
-              <a:t>/k/</a:t>
-            </a:r>
-            <a:endParaRPr lang="en-US" sz="750" dirty="0"/>
+            <a:off x="5763534" y="4169664"/>
+            <a:ext cx="493776" cy="475488"/>
+          </a:xfrm>
+          <a:prstGeom prst="rect">
+            <a:avLst/>
+          </a:prstGeom>
+          <a:noFill/>
+          <a:ln/>
+        </p:spPr>
+        <p:txBody>
+          <a:bodyPr wrap="square" lIns="0" tIns="0" rIns="0" bIns="0" rtlCol="0" anchor="ctr"/>
+          <a:lstStyle/>
+          <a:p>
+            <a:pPr algn="ctr" indent="0" marL="0">
+              <a:buNone/>
+            </a:pPr>
+            <a:r>
+              <a:rPr lang="en-US" sz="900" b="1" dirty="0">
+                <a:solidFill>
+                  <a:srgbClr val="9D174D"/>
+                </a:solidFill>
+                <a:latin typeface="Trebuchet MS" pitchFamily="34" charset="0"/>
+                <a:ea typeface="Trebuchet MS" pitchFamily="34" charset="-122"/>
+                <a:cs typeface="Trebuchet MS" pitchFamily="34" charset="-120"/>
+              </a:rPr>
+              <a:t>a</a:t>
+            </a:r>
+            <a:endParaRPr lang="en-US" sz="900" dirty="0"/>
           </a:p>
         </p:txBody>
       </p:sp>
@@ -11732,12 +11720,12 @@
         </p:nvSpPr>
         <p:spPr>
           <a:xfrm>
-            <a:off x="6109855" y="4169664"/>
-            <a:ext cx="543652" cy="384048"/>
+            <a:off x="6307953" y="4169664"/>
+            <a:ext cx="493776" cy="475488"/>
           </a:xfrm>
           <a:prstGeom prst="rect">
             <a:avLst>
-              <a:gd name="adj" fmla="val 9524"/>
+              <a:gd name="adj" fmla="val 7692"/>
             </a:avLst>
           </a:prstGeom>
           <a:solidFill>
@@ -11759,8 +11747,8 @@
         </p:nvSpPr>
         <p:spPr>
           <a:xfrm>
-            <a:off x="6109855" y="4169664"/>
-            <a:ext cx="543652" cy="384048"/>
+            <a:off x="6307953" y="4169664"/>
+            <a:ext cx="493776" cy="475488"/>
           </a:xfrm>
           <a:prstGeom prst="rect">
             <a:avLst/>
@@ -11784,7 +11772,7 @@
                 <a:ea typeface="Trebuchet MS" pitchFamily="34" charset="-122"/>
                 <a:cs typeface="Trebuchet MS" pitchFamily="34" charset="-120"/>
               </a:rPr>
-              <a:t>a</a:t>
+              <a:t>t</a:t>
             </a:r>
             <a:endParaRPr lang="en-US" sz="900" dirty="0"/>
           </a:p>
@@ -11798,12 +11786,12 @@
         </p:nvSpPr>
         <p:spPr>
           <a:xfrm>
-            <a:off x="6703799" y="4169664"/>
-            <a:ext cx="543652" cy="384048"/>
+            <a:off x="6852373" y="4169664"/>
+            <a:ext cx="493776" cy="475488"/>
           </a:xfrm>
           <a:prstGeom prst="rect">
             <a:avLst>
-              <a:gd name="adj" fmla="val 9524"/>
+              <a:gd name="adj" fmla="val 7692"/>
             </a:avLst>
           </a:prstGeom>
           <a:solidFill>
@@ -11825,8 +11813,8 @@
         </p:nvSpPr>
         <p:spPr>
           <a:xfrm>
-            <a:off x="6703799" y="4169664"/>
-            <a:ext cx="543652" cy="384048"/>
+            <a:off x="6852373" y="4169664"/>
+            <a:ext cx="493776" cy="475488"/>
           </a:xfrm>
           <a:prstGeom prst="rect">
             <a:avLst/>
@@ -11850,7 +11838,7 @@
                 <a:ea typeface="Trebuchet MS" pitchFamily="34" charset="-122"/>
                 <a:cs typeface="Trebuchet MS" pitchFamily="34" charset="-120"/>
               </a:rPr>
-              <a:t>t</a:t>
+              <a:t>i</a:t>
             </a:r>
             <a:endParaRPr lang="en-US" sz="900" dirty="0"/>
           </a:p>
@@ -11864,12 +11852,12 @@
         </p:nvSpPr>
         <p:spPr>
           <a:xfrm>
-            <a:off x="7297743" y="4169664"/>
-            <a:ext cx="543652" cy="384048"/>
+            <a:off x="7396793" y="4169664"/>
+            <a:ext cx="493776" cy="475488"/>
           </a:xfrm>
           <a:prstGeom prst="rect">
             <a:avLst>
-              <a:gd name="adj" fmla="val 9524"/>
+              <a:gd name="adj" fmla="val 7692"/>
             </a:avLst>
           </a:prstGeom>
           <a:solidFill>
@@ -11891,8 +11879,8 @@
         </p:nvSpPr>
         <p:spPr>
           <a:xfrm>
-            <a:off x="7297743" y="4169664"/>
-            <a:ext cx="543652" cy="384048"/>
+            <a:off x="7396793" y="4169664"/>
+            <a:ext cx="493776" cy="475488"/>
           </a:xfrm>
           <a:prstGeom prst="rect">
             <a:avLst/>
@@ -11916,7 +11904,7 @@
                 <a:ea typeface="Trebuchet MS" pitchFamily="34" charset="-122"/>
                 <a:cs typeface="Trebuchet MS" pitchFamily="34" charset="-120"/>
               </a:rPr>
-              <a:t>io</a:t>
+              <a:t>o</a:t>
             </a:r>
             <a:endParaRPr lang="en-US" sz="900" dirty="0"/>
           </a:p>
@@ -11924,57 +11912,18 @@
       </p:sp>
       <p:sp>
         <p:nvSpPr>
-          <p:cNvPr id="65" name="Text 63"/>
-          <p:cNvSpPr/>
-          <p:nvPr/>
-        </p:nvSpPr>
-        <p:spPr>
-          <a:xfrm>
-            <a:off x="7297743" y="4572000"/>
-            <a:ext cx="543652" cy="219456"/>
-          </a:xfrm>
-          <a:prstGeom prst="rect">
-            <a:avLst/>
-          </a:prstGeom>
-          <a:noFill/>
-          <a:ln/>
-        </p:spPr>
-        <p:txBody>
-          <a:bodyPr wrap="square" lIns="0" tIns="0" rIns="0" bIns="0" rtlCol="0" anchor="t"/>
-          <a:lstStyle/>
-          <a:p>
-            <a:pPr algn="ctr" indent="0" marL="0">
-              <a:buNone/>
-            </a:pPr>
-            <a:r>
-              <a:rPr lang="en-US" sz="750" i="1" dirty="0">
-                <a:solidFill>
-                  <a:srgbClr val="94A3B8"/>
-                </a:solidFill>
-                <a:latin typeface="Calibri" pitchFamily="34" charset="0"/>
-                <a:ea typeface="Calibri" pitchFamily="34" charset="-122"/>
-                <a:cs typeface="Calibri" pitchFamily="34" charset="-120"/>
-              </a:rPr>
-              <a:t>/sh/</a:t>
-            </a:r>
-            <a:endParaRPr lang="en-US" sz="750" dirty="0"/>
-          </a:p>
-        </p:txBody>
-      </p:sp>
-      <p:sp>
-        <p:nvSpPr>
-          <p:cNvPr id="66" name="Shape 64"/>
-          <p:cNvSpPr/>
-          <p:nvPr/>
-        </p:nvSpPr>
-        <p:spPr>
-          <a:xfrm>
-            <a:off x="7891688" y="4169664"/>
-            <a:ext cx="543652" cy="384048"/>
+          <p:cNvPr id="65" name="Shape 63"/>
+          <p:cNvSpPr/>
+          <p:nvPr/>
+        </p:nvSpPr>
+        <p:spPr>
+          <a:xfrm>
+            <a:off x="7941212" y="4169664"/>
+            <a:ext cx="493776" cy="475488"/>
           </a:xfrm>
           <a:prstGeom prst="rect">
             <a:avLst>
-              <a:gd name="adj" fmla="val 9524"/>
+              <a:gd name="adj" fmla="val 7692"/>
             </a:avLst>
           </a:prstGeom>
           <a:solidFill>
@@ -11990,14 +11939,14 @@
       </p:sp>
       <p:sp>
         <p:nvSpPr>
-          <p:cNvPr id="67" name="Text 65"/>
-          <p:cNvSpPr/>
-          <p:nvPr/>
-        </p:nvSpPr>
-        <p:spPr>
-          <a:xfrm>
-            <a:off x="7891688" y="4169664"/>
-            <a:ext cx="543652" cy="384048"/>
+          <p:cNvPr id="66" name="Text 64"/>
+          <p:cNvSpPr/>
+          <p:nvPr/>
+        </p:nvSpPr>
+        <p:spPr>
+          <a:xfrm>
+            <a:off x="7941212" y="4169664"/>
+            <a:ext cx="493776" cy="475488"/>
           </a:xfrm>
           <a:prstGeom prst="rect">
             <a:avLst/>
@@ -17364,11 +17313,11 @@
         <p:spPr>
           <a:xfrm>
             <a:off x="1874520" y="4096512"/>
-            <a:ext cx="6903720" cy="804672"/>
+            <a:ext cx="6903720" cy="658368"/>
           </a:xfrm>
           <a:prstGeom prst="rect">
             <a:avLst>
-              <a:gd name="adj" fmla="val 6818"/>
+              <a:gd name="adj" fmla="val 8333"/>
             </a:avLst>
           </a:prstGeom>
           <a:solidFill>
@@ -17391,11 +17340,11 @@
         <p:spPr>
           <a:xfrm>
             <a:off x="1952244" y="4169664"/>
-            <a:ext cx="543652" cy="384048"/>
+            <a:ext cx="543652" cy="475488"/>
           </a:xfrm>
           <a:prstGeom prst="rect">
             <a:avLst>
-              <a:gd name="adj" fmla="val 9524"/>
+              <a:gd name="adj" fmla="val 7692"/>
             </a:avLst>
           </a:prstGeom>
           <a:solidFill>
@@ -17418,7 +17367,7 @@
         <p:spPr>
           <a:xfrm>
             <a:off x="1952244" y="4169664"/>
-            <a:ext cx="543652" cy="384048"/>
+            <a:ext cx="543652" cy="475488"/>
           </a:xfrm>
           <a:prstGeom prst="rect">
             <a:avLst/>
@@ -17450,57 +17399,18 @@
       </p:sp>
       <p:sp>
         <p:nvSpPr>
-          <p:cNvPr id="48" name="Text 46"/>
-          <p:cNvSpPr/>
-          <p:nvPr/>
-        </p:nvSpPr>
-        <p:spPr>
-          <a:xfrm>
-            <a:off x="1952244" y="4572000"/>
-            <a:ext cx="543652" cy="219456"/>
-          </a:xfrm>
-          <a:prstGeom prst="rect">
-            <a:avLst/>
-          </a:prstGeom>
-          <a:noFill/>
-          <a:ln/>
-        </p:spPr>
-        <p:txBody>
-          <a:bodyPr wrap="square" lIns="0" tIns="0" rIns="0" bIns="0" rtlCol="0" anchor="t"/>
-          <a:lstStyle/>
-          <a:p>
-            <a:pPr algn="ctr" indent="0" marL="0">
-              <a:buNone/>
-            </a:pPr>
-            <a:r>
-              <a:rPr lang="en-US" sz="750" i="1" dirty="0">
-                <a:solidFill>
-                  <a:srgbClr val="94A3B8"/>
-                </a:solidFill>
-                <a:latin typeface="Calibri" pitchFamily="34" charset="0"/>
-                <a:ea typeface="Calibri" pitchFamily="34" charset="-122"/>
-                <a:cs typeface="Calibri" pitchFamily="34" charset="-120"/>
-              </a:rPr>
-              <a:t>/k/</a:t>
-            </a:r>
-            <a:endParaRPr lang="en-US" sz="750" dirty="0"/>
-          </a:p>
-        </p:txBody>
-      </p:sp>
-      <p:sp>
-        <p:nvSpPr>
-          <p:cNvPr id="49" name="Shape 47"/>
+          <p:cNvPr id="48" name="Shape 46"/>
           <p:cNvSpPr/>
           <p:nvPr/>
         </p:nvSpPr>
         <p:spPr>
           <a:xfrm>
             <a:off x="2546188" y="4169664"/>
-            <a:ext cx="543652" cy="384048"/>
+            <a:ext cx="543652" cy="475488"/>
           </a:xfrm>
           <a:prstGeom prst="rect">
             <a:avLst>
-              <a:gd name="adj" fmla="val 9524"/>
+              <a:gd name="adj" fmla="val 7692"/>
             </a:avLst>
           </a:prstGeom>
           <a:solidFill>
@@ -17516,14 +17426,14 @@
       </p:sp>
       <p:sp>
         <p:nvSpPr>
-          <p:cNvPr id="50" name="Text 48"/>
+          <p:cNvPr id="49" name="Text 47"/>
           <p:cNvSpPr/>
           <p:nvPr/>
         </p:nvSpPr>
         <p:spPr>
           <a:xfrm>
             <a:off x="2546188" y="4169664"/>
-            <a:ext cx="543652" cy="384048"/>
+            <a:ext cx="543652" cy="475488"/>
           </a:xfrm>
           <a:prstGeom prst="rect">
             <a:avLst/>
@@ -17555,18 +17465,18 @@
       </p:sp>
       <p:sp>
         <p:nvSpPr>
-          <p:cNvPr id="51" name="Shape 49"/>
+          <p:cNvPr id="50" name="Shape 48"/>
           <p:cNvSpPr/>
           <p:nvPr/>
         </p:nvSpPr>
         <p:spPr>
           <a:xfrm>
             <a:off x="3140133" y="4169664"/>
-            <a:ext cx="543652" cy="384048"/>
+            <a:ext cx="543652" cy="475488"/>
           </a:xfrm>
           <a:prstGeom prst="rect">
             <a:avLst>
-              <a:gd name="adj" fmla="val 9524"/>
+              <a:gd name="adj" fmla="val 7692"/>
             </a:avLst>
           </a:prstGeom>
           <a:solidFill>
@@ -17582,14 +17492,14 @@
       </p:sp>
       <p:sp>
         <p:nvSpPr>
-          <p:cNvPr id="52" name="Text 50"/>
+          <p:cNvPr id="51" name="Text 49"/>
           <p:cNvSpPr/>
           <p:nvPr/>
         </p:nvSpPr>
         <p:spPr>
           <a:xfrm>
             <a:off x="3140133" y="4169664"/>
-            <a:ext cx="543652" cy="384048"/>
+            <a:ext cx="543652" cy="475488"/>
           </a:xfrm>
           <a:prstGeom prst="rect">
             <a:avLst/>
@@ -17613,7 +17523,7 @@
                 <a:ea typeface="Trebuchet MS" pitchFamily="34" charset="-122"/>
                 <a:cs typeface="Trebuchet MS" pitchFamily="34" charset="-120"/>
               </a:rPr>
-              <a:t>m</a:t>
+              <a:t>mm</a:t>
             </a:r>
             <a:endParaRPr lang="en-US" sz="900" dirty="0"/>
           </a:p>
@@ -17621,18 +17531,18 @@
       </p:sp>
       <p:sp>
         <p:nvSpPr>
-          <p:cNvPr id="53" name="Shape 51"/>
+          <p:cNvPr id="52" name="Shape 50"/>
           <p:cNvSpPr/>
           <p:nvPr/>
         </p:nvSpPr>
         <p:spPr>
           <a:xfrm>
             <a:off x="3734077" y="4169664"/>
-            <a:ext cx="543652" cy="384048"/>
+            <a:ext cx="543652" cy="475488"/>
           </a:xfrm>
           <a:prstGeom prst="rect">
             <a:avLst>
-              <a:gd name="adj" fmla="val 9524"/>
+              <a:gd name="adj" fmla="val 7692"/>
             </a:avLst>
           </a:prstGeom>
           <a:solidFill>
@@ -17648,14 +17558,14 @@
       </p:sp>
       <p:sp>
         <p:nvSpPr>
-          <p:cNvPr id="54" name="Text 52"/>
+          <p:cNvPr id="53" name="Text 51"/>
           <p:cNvSpPr/>
           <p:nvPr/>
         </p:nvSpPr>
         <p:spPr>
           <a:xfrm>
             <a:off x="3734077" y="4169664"/>
-            <a:ext cx="543652" cy="384048"/>
+            <a:ext cx="543652" cy="475488"/>
           </a:xfrm>
           <a:prstGeom prst="rect">
             <a:avLst/>
@@ -17687,18 +17597,18 @@
       </p:sp>
       <p:sp>
         <p:nvSpPr>
-          <p:cNvPr id="55" name="Shape 53"/>
+          <p:cNvPr id="54" name="Shape 52"/>
           <p:cNvSpPr/>
           <p:nvPr/>
         </p:nvSpPr>
         <p:spPr>
           <a:xfrm>
             <a:off x="4328021" y="4169664"/>
-            <a:ext cx="543652" cy="384048"/>
+            <a:ext cx="543652" cy="475488"/>
           </a:xfrm>
           <a:prstGeom prst="rect">
             <a:avLst>
-              <a:gd name="adj" fmla="val 9524"/>
+              <a:gd name="adj" fmla="val 7692"/>
             </a:avLst>
           </a:prstGeom>
           <a:solidFill>
@@ -17714,14 +17624,14 @@
       </p:sp>
       <p:sp>
         <p:nvSpPr>
-          <p:cNvPr id="56" name="Text 54"/>
+          <p:cNvPr id="55" name="Text 53"/>
           <p:cNvSpPr/>
           <p:nvPr/>
         </p:nvSpPr>
         <p:spPr>
           <a:xfrm>
             <a:off x="4328021" y="4169664"/>
-            <a:ext cx="543652" cy="384048"/>
+            <a:ext cx="543652" cy="475488"/>
           </a:xfrm>
           <a:prstGeom prst="rect">
             <a:avLst/>
@@ -17753,18 +17663,18 @@
       </p:sp>
       <p:sp>
         <p:nvSpPr>
-          <p:cNvPr id="57" name="Shape 55"/>
+          <p:cNvPr id="56" name="Shape 54"/>
           <p:cNvSpPr/>
           <p:nvPr/>
         </p:nvSpPr>
         <p:spPr>
           <a:xfrm>
             <a:off x="4921966" y="4169664"/>
-            <a:ext cx="543652" cy="384048"/>
+            <a:ext cx="543652" cy="475488"/>
           </a:xfrm>
           <a:prstGeom prst="rect">
             <a:avLst>
-              <a:gd name="adj" fmla="val 9524"/>
+              <a:gd name="adj" fmla="val 7692"/>
             </a:avLst>
           </a:prstGeom>
           <a:solidFill>
@@ -17780,14 +17690,14 @@
       </p:sp>
       <p:sp>
         <p:nvSpPr>
-          <p:cNvPr id="58" name="Text 56"/>
+          <p:cNvPr id="57" name="Text 55"/>
           <p:cNvSpPr/>
           <p:nvPr/>
         </p:nvSpPr>
         <p:spPr>
           <a:xfrm>
             <a:off x="4921966" y="4169664"/>
-            <a:ext cx="543652" cy="384048"/>
+            <a:ext cx="543652" cy="475488"/>
           </a:xfrm>
           <a:prstGeom prst="rect">
             <a:avLst/>
@@ -17819,18 +17729,18 @@
       </p:sp>
       <p:sp>
         <p:nvSpPr>
-          <p:cNvPr id="59" name="Shape 57"/>
+          <p:cNvPr id="58" name="Shape 56"/>
           <p:cNvSpPr/>
           <p:nvPr/>
         </p:nvSpPr>
         <p:spPr>
           <a:xfrm>
             <a:off x="5515910" y="4169664"/>
-            <a:ext cx="543652" cy="384048"/>
+            <a:ext cx="543652" cy="475488"/>
           </a:xfrm>
           <a:prstGeom prst="rect">
             <a:avLst>
-              <a:gd name="adj" fmla="val 9524"/>
+              <a:gd name="adj" fmla="val 7692"/>
             </a:avLst>
           </a:prstGeom>
           <a:solidFill>
@@ -17846,14 +17756,14 @@
       </p:sp>
       <p:sp>
         <p:nvSpPr>
-          <p:cNvPr id="60" name="Text 58"/>
+          <p:cNvPr id="59" name="Text 57"/>
           <p:cNvSpPr/>
           <p:nvPr/>
         </p:nvSpPr>
         <p:spPr>
           <a:xfrm>
             <a:off x="5515910" y="4169664"/>
-            <a:ext cx="543652" cy="384048"/>
+            <a:ext cx="543652" cy="475488"/>
           </a:xfrm>
           <a:prstGeom prst="rect">
             <a:avLst/>
@@ -17885,40 +17795,67 @@
       </p:sp>
       <p:sp>
         <p:nvSpPr>
+          <p:cNvPr id="60" name="Shape 58"/>
+          <p:cNvSpPr/>
+          <p:nvPr/>
+        </p:nvSpPr>
+        <p:spPr>
+          <a:xfrm>
+            <a:off x="6109855" y="4169664"/>
+            <a:ext cx="543652" cy="475488"/>
+          </a:xfrm>
+          <a:prstGeom prst="rect">
+            <a:avLst>
+              <a:gd name="adj" fmla="val 7692"/>
+            </a:avLst>
+          </a:prstGeom>
+          <a:solidFill>
+            <a:srgbClr val="FFFFFF"/>
+          </a:solidFill>
+          <a:ln w="12700">
+            <a:solidFill>
+              <a:srgbClr val="DB2777"/>
+            </a:solidFill>
+            <a:prstDash val="solid"/>
+          </a:ln>
+        </p:spPr>
+      </p:sp>
+      <p:sp>
+        <p:nvSpPr>
           <p:cNvPr id="61" name="Text 59"/>
           <p:cNvSpPr/>
           <p:nvPr/>
         </p:nvSpPr>
         <p:spPr>
           <a:xfrm>
-            <a:off x="5515910" y="4572000"/>
-            <a:ext cx="543652" cy="219456"/>
-          </a:xfrm>
-          <a:prstGeom prst="rect">
-            <a:avLst/>
-          </a:prstGeom>
-          <a:noFill/>
-          <a:ln/>
-        </p:spPr>
-        <p:txBody>
-          <a:bodyPr wrap="square" lIns="0" tIns="0" rIns="0" bIns="0" rtlCol="0" anchor="t"/>
-          <a:lstStyle/>
-          <a:p>
-            <a:pPr algn="ctr" indent="0" marL="0">
-              <a:buNone/>
-            </a:pPr>
-            <a:r>
-              <a:rPr lang="en-US" sz="750" i="1" dirty="0">
-                <a:solidFill>
-                  <a:srgbClr val="94A3B8"/>
-                </a:solidFill>
-                <a:latin typeface="Calibri" pitchFamily="34" charset="0"/>
-                <a:ea typeface="Calibri" pitchFamily="34" charset="-122"/>
-                <a:cs typeface="Calibri" pitchFamily="34" charset="-120"/>
-              </a:rPr>
-              <a:t>/k/</a:t>
-            </a:r>
-            <a:endParaRPr lang="en-US" sz="750" dirty="0"/>
+            <a:off x="6109855" y="4169664"/>
+            <a:ext cx="543652" cy="475488"/>
+          </a:xfrm>
+          <a:prstGeom prst="rect">
+            <a:avLst/>
+          </a:prstGeom>
+          <a:noFill/>
+          <a:ln/>
+        </p:spPr>
+        <p:txBody>
+          <a:bodyPr wrap="square" lIns="0" tIns="0" rIns="0" bIns="0" rtlCol="0" anchor="ctr"/>
+          <a:lstStyle/>
+          <a:p>
+            <a:pPr algn="ctr" indent="0" marL="0">
+              <a:buNone/>
+            </a:pPr>
+            <a:r>
+              <a:rPr lang="en-US" sz="900" b="1" dirty="0">
+                <a:solidFill>
+                  <a:srgbClr val="9D174D"/>
+                </a:solidFill>
+                <a:latin typeface="Trebuchet MS" pitchFamily="34" charset="0"/>
+                <a:ea typeface="Trebuchet MS" pitchFamily="34" charset="-122"/>
+                <a:cs typeface="Trebuchet MS" pitchFamily="34" charset="-120"/>
+              </a:rPr>
+              <a:t>a</a:t>
+            </a:r>
+            <a:endParaRPr lang="en-US" sz="900" dirty="0"/>
           </a:p>
         </p:txBody>
       </p:sp>
@@ -17930,12 +17867,12 @@
         </p:nvSpPr>
         <p:spPr>
           <a:xfrm>
-            <a:off x="6109855" y="4169664"/>
-            <a:ext cx="543652" cy="384048"/>
+            <a:off x="6703799" y="4169664"/>
+            <a:ext cx="543652" cy="475488"/>
           </a:xfrm>
           <a:prstGeom prst="rect">
             <a:avLst>
-              <a:gd name="adj" fmla="val 9524"/>
+              <a:gd name="adj" fmla="val 7692"/>
             </a:avLst>
           </a:prstGeom>
           <a:solidFill>
@@ -17957,8 +17894,8 @@
         </p:nvSpPr>
         <p:spPr>
           <a:xfrm>
-            <a:off x="6109855" y="4169664"/>
-            <a:ext cx="543652" cy="384048"/>
+            <a:off x="6703799" y="4169664"/>
+            <a:ext cx="543652" cy="475488"/>
           </a:xfrm>
           <a:prstGeom prst="rect">
             <a:avLst/>
@@ -17982,7 +17919,7 @@
                 <a:ea typeface="Trebuchet MS" pitchFamily="34" charset="-122"/>
                 <a:cs typeface="Trebuchet MS" pitchFamily="34" charset="-120"/>
               </a:rPr>
-              <a:t>a</a:t>
+              <a:t>t</a:t>
             </a:r>
             <a:endParaRPr lang="en-US" sz="900" dirty="0"/>
           </a:p>
@@ -17996,12 +17933,12 @@
         </p:nvSpPr>
         <p:spPr>
           <a:xfrm>
-            <a:off x="6703799" y="4169664"/>
-            <a:ext cx="543652" cy="384048"/>
+            <a:off x="7297743" y="4169664"/>
+            <a:ext cx="543652" cy="475488"/>
           </a:xfrm>
           <a:prstGeom prst="rect">
             <a:avLst>
-              <a:gd name="adj" fmla="val 9524"/>
+              <a:gd name="adj" fmla="val 7692"/>
             </a:avLst>
           </a:prstGeom>
           <a:solidFill>
@@ -18023,8 +17960,8 @@
         </p:nvSpPr>
         <p:spPr>
           <a:xfrm>
-            <a:off x="6703799" y="4169664"/>
-            <a:ext cx="543652" cy="384048"/>
+            <a:off x="7297743" y="4169664"/>
+            <a:ext cx="543652" cy="475488"/>
           </a:xfrm>
           <a:prstGeom prst="rect">
             <a:avLst/>
@@ -18048,7 +17985,7 @@
                 <a:ea typeface="Trebuchet MS" pitchFamily="34" charset="-122"/>
                 <a:cs typeface="Trebuchet MS" pitchFamily="34" charset="-120"/>
               </a:rPr>
-              <a:t>t</a:t>
+              <a:t>or</a:t>
             </a:r>
             <a:endParaRPr lang="en-US" sz="900" dirty="0"/>
           </a:p>
@@ -18062,12 +17999,12 @@
         </p:nvSpPr>
         <p:spPr>
           <a:xfrm>
-            <a:off x="7297743" y="4169664"/>
-            <a:ext cx="543652" cy="384048"/>
+            <a:off x="7891688" y="4169664"/>
+            <a:ext cx="543652" cy="475488"/>
           </a:xfrm>
           <a:prstGeom prst="rect">
             <a:avLst>
-              <a:gd name="adj" fmla="val 9524"/>
+              <a:gd name="adj" fmla="val 7692"/>
             </a:avLst>
           </a:prstGeom>
           <a:solidFill>
@@ -18089,74 +18026,8 @@
         </p:nvSpPr>
         <p:spPr>
           <a:xfrm>
-            <a:off x="7297743" y="4169664"/>
-            <a:ext cx="543652" cy="384048"/>
-          </a:xfrm>
-          <a:prstGeom prst="rect">
-            <a:avLst/>
-          </a:prstGeom>
-          <a:noFill/>
-          <a:ln/>
-        </p:spPr>
-        <p:txBody>
-          <a:bodyPr wrap="square" lIns="0" tIns="0" rIns="0" bIns="0" rtlCol="0" anchor="ctr"/>
-          <a:lstStyle/>
-          <a:p>
-            <a:pPr algn="ctr" indent="0" marL="0">
-              <a:buNone/>
-            </a:pPr>
-            <a:r>
-              <a:rPr lang="en-US" sz="900" b="1" dirty="0">
-                <a:solidFill>
-                  <a:srgbClr val="9D174D"/>
-                </a:solidFill>
-                <a:latin typeface="Trebuchet MS" pitchFamily="34" charset="0"/>
-                <a:ea typeface="Trebuchet MS" pitchFamily="34" charset="-122"/>
-                <a:cs typeface="Trebuchet MS" pitchFamily="34" charset="-120"/>
-              </a:rPr>
-              <a:t>or</a:t>
-            </a:r>
-            <a:endParaRPr lang="en-US" sz="900" dirty="0"/>
-          </a:p>
-        </p:txBody>
-      </p:sp>
-      <p:sp>
-        <p:nvSpPr>
-          <p:cNvPr id="68" name="Shape 66"/>
-          <p:cNvSpPr/>
-          <p:nvPr/>
-        </p:nvSpPr>
-        <p:spPr>
-          <a:xfrm>
             <a:off x="7891688" y="4169664"/>
-            <a:ext cx="543652" cy="384048"/>
-          </a:xfrm>
-          <a:prstGeom prst="rect">
-            <a:avLst>
-              <a:gd name="adj" fmla="val 9524"/>
-            </a:avLst>
-          </a:prstGeom>
-          <a:solidFill>
-            <a:srgbClr val="FFFFFF"/>
-          </a:solidFill>
-          <a:ln w="12700">
-            <a:solidFill>
-              <a:srgbClr val="DB2777"/>
-            </a:solidFill>
-            <a:prstDash val="solid"/>
-          </a:ln>
-        </p:spPr>
-      </p:sp>
-      <p:sp>
-        <p:nvSpPr>
-          <p:cNvPr id="69" name="Text 67"/>
-          <p:cNvSpPr/>
-          <p:nvPr/>
-        </p:nvSpPr>
-        <p:spPr>
-          <a:xfrm>
-            <a:off x="7891688" y="4169664"/>
-            <a:ext cx="543652" cy="384048"/>
+            <a:ext cx="543652" cy="475488"/>
           </a:xfrm>
           <a:prstGeom prst="rect">
             <a:avLst/>
@@ -24777,11 +24648,11 @@
         <p:spPr>
           <a:xfrm>
             <a:off x="1874520" y="4096512"/>
-            <a:ext cx="6903720" cy="804672"/>
+            <a:ext cx="6903720" cy="658368"/>
           </a:xfrm>
           <a:prstGeom prst="rect">
             <a:avLst>
-              <a:gd name="adj" fmla="val 6818"/>
+              <a:gd name="adj" fmla="val 8333"/>
             </a:avLst>
           </a:prstGeom>
           <a:solidFill>
@@ -24803,12 +24674,12 @@
         </p:nvSpPr>
         <p:spPr>
           <a:xfrm>
-            <a:off x="1951828" y="4169664"/>
-            <a:ext cx="603504" cy="384048"/>
+            <a:off x="1952596" y="4169664"/>
+            <a:ext cx="493776" cy="475488"/>
           </a:xfrm>
           <a:prstGeom prst="rect">
             <a:avLst>
-              <a:gd name="adj" fmla="val 9524"/>
+              <a:gd name="adj" fmla="val 7692"/>
             </a:avLst>
           </a:prstGeom>
           <a:solidFill>
@@ -24830,8 +24701,8 @@
         </p:nvSpPr>
         <p:spPr>
           <a:xfrm>
-            <a:off x="1951828" y="4169664"/>
-            <a:ext cx="603504" cy="384048"/>
+            <a:off x="1952596" y="4169664"/>
+            <a:ext cx="493776" cy="475488"/>
           </a:xfrm>
           <a:prstGeom prst="rect">
             <a:avLst/>
@@ -24863,57 +24734,18 @@
       </p:sp>
       <p:sp>
         <p:nvSpPr>
-          <p:cNvPr id="45" name="Text 43"/>
-          <p:cNvSpPr/>
-          <p:nvPr/>
-        </p:nvSpPr>
-        <p:spPr>
-          <a:xfrm>
-            <a:off x="1951828" y="4572000"/>
-            <a:ext cx="603504" cy="219456"/>
-          </a:xfrm>
-          <a:prstGeom prst="rect">
-            <a:avLst/>
-          </a:prstGeom>
-          <a:noFill/>
-          <a:ln/>
-        </p:spPr>
-        <p:txBody>
-          <a:bodyPr wrap="square" lIns="0" tIns="0" rIns="0" bIns="0" rtlCol="0" anchor="t"/>
-          <a:lstStyle/>
-          <a:p>
-            <a:pPr algn="ctr" indent="0" marL="0">
-              <a:buNone/>
-            </a:pPr>
-            <a:r>
-              <a:rPr lang="en-US" sz="750" i="1" dirty="0">
-                <a:solidFill>
-                  <a:srgbClr val="94A3B8"/>
-                </a:solidFill>
-                <a:latin typeface="Calibri" pitchFamily="34" charset="0"/>
-                <a:ea typeface="Calibri" pitchFamily="34" charset="-122"/>
-                <a:cs typeface="Calibri" pitchFamily="34" charset="-120"/>
-              </a:rPr>
-              <a:t>/k/</a:t>
-            </a:r>
-            <a:endParaRPr lang="en-US" sz="750" dirty="0"/>
-          </a:p>
-        </p:txBody>
-      </p:sp>
-      <p:sp>
-        <p:nvSpPr>
-          <p:cNvPr id="46" name="Shape 44"/>
-          <p:cNvSpPr/>
-          <p:nvPr/>
-        </p:nvSpPr>
-        <p:spPr>
-          <a:xfrm>
-            <a:off x="2605209" y="4169664"/>
-            <a:ext cx="603504" cy="384048"/>
+          <p:cNvPr id="45" name="Shape 43"/>
+          <p:cNvSpPr/>
+          <p:nvPr/>
+        </p:nvSpPr>
+        <p:spPr>
+          <a:xfrm>
+            <a:off x="2497015" y="4169664"/>
+            <a:ext cx="493776" cy="475488"/>
           </a:xfrm>
           <a:prstGeom prst="rect">
             <a:avLst>
-              <a:gd name="adj" fmla="val 9524"/>
+              <a:gd name="adj" fmla="val 7692"/>
             </a:avLst>
           </a:prstGeom>
           <a:solidFill>
@@ -24929,14 +24761,14 @@
       </p:sp>
       <p:sp>
         <p:nvSpPr>
-          <p:cNvPr id="47" name="Text 45"/>
-          <p:cNvSpPr/>
-          <p:nvPr/>
-        </p:nvSpPr>
-        <p:spPr>
-          <a:xfrm>
-            <a:off x="2605209" y="4169664"/>
-            <a:ext cx="603504" cy="384048"/>
+          <p:cNvPr id="46" name="Text 44"/>
+          <p:cNvSpPr/>
+          <p:nvPr/>
+        </p:nvSpPr>
+        <p:spPr>
+          <a:xfrm>
+            <a:off x="2497015" y="4169664"/>
+            <a:ext cx="493776" cy="475488"/>
           </a:xfrm>
           <a:prstGeom prst="rect">
             <a:avLst/>
@@ -24968,18 +24800,18 @@
       </p:sp>
       <p:sp>
         <p:nvSpPr>
-          <p:cNvPr id="48" name="Shape 46"/>
-          <p:cNvSpPr/>
-          <p:nvPr/>
-        </p:nvSpPr>
-        <p:spPr>
-          <a:xfrm>
-            <a:off x="3258589" y="4169664"/>
-            <a:ext cx="603504" cy="384048"/>
+          <p:cNvPr id="47" name="Shape 45"/>
+          <p:cNvSpPr/>
+          <p:nvPr/>
+        </p:nvSpPr>
+        <p:spPr>
+          <a:xfrm>
+            <a:off x="3041435" y="4169664"/>
+            <a:ext cx="493776" cy="475488"/>
           </a:xfrm>
           <a:prstGeom prst="rect">
             <a:avLst>
-              <a:gd name="adj" fmla="val 9524"/>
+              <a:gd name="adj" fmla="val 7692"/>
             </a:avLst>
           </a:prstGeom>
           <a:solidFill>
@@ -24995,14 +24827,14 @@
       </p:sp>
       <p:sp>
         <p:nvSpPr>
-          <p:cNvPr id="49" name="Text 47"/>
-          <p:cNvSpPr/>
-          <p:nvPr/>
-        </p:nvSpPr>
-        <p:spPr>
-          <a:xfrm>
-            <a:off x="3258589" y="4169664"/>
-            <a:ext cx="603504" cy="384048"/>
+          <p:cNvPr id="48" name="Text 46"/>
+          <p:cNvSpPr/>
+          <p:nvPr/>
+        </p:nvSpPr>
+        <p:spPr>
+          <a:xfrm>
+            <a:off x="3041435" y="4169664"/>
+            <a:ext cx="493776" cy="475488"/>
           </a:xfrm>
           <a:prstGeom prst="rect">
             <a:avLst/>
@@ -25026,7 +24858,7 @@
                 <a:ea typeface="Trebuchet MS" pitchFamily="34" charset="-122"/>
                 <a:cs typeface="Trebuchet MS" pitchFamily="34" charset="-120"/>
               </a:rPr>
-              <a:t>m</a:t>
+              <a:t>mm</a:t>
             </a:r>
             <a:endParaRPr lang="en-US" sz="900" dirty="0"/>
           </a:p>
@@ -25034,18 +24866,18 @@
       </p:sp>
       <p:sp>
         <p:nvSpPr>
-          <p:cNvPr id="50" name="Shape 48"/>
-          <p:cNvSpPr/>
-          <p:nvPr/>
-        </p:nvSpPr>
-        <p:spPr>
-          <a:xfrm>
-            <a:off x="3911969" y="4169664"/>
-            <a:ext cx="603504" cy="384048"/>
+          <p:cNvPr id="49" name="Shape 47"/>
+          <p:cNvSpPr/>
+          <p:nvPr/>
+        </p:nvSpPr>
+        <p:spPr>
+          <a:xfrm>
+            <a:off x="3585855" y="4169664"/>
+            <a:ext cx="493776" cy="475488"/>
           </a:xfrm>
           <a:prstGeom prst="rect">
             <a:avLst>
-              <a:gd name="adj" fmla="val 9524"/>
+              <a:gd name="adj" fmla="val 7692"/>
             </a:avLst>
           </a:prstGeom>
           <a:solidFill>
@@ -25061,14 +24893,14 @@
       </p:sp>
       <p:sp>
         <p:nvSpPr>
-          <p:cNvPr id="51" name="Text 49"/>
-          <p:cNvSpPr/>
-          <p:nvPr/>
-        </p:nvSpPr>
-        <p:spPr>
-          <a:xfrm>
-            <a:off x="3911969" y="4169664"/>
-            <a:ext cx="603504" cy="384048"/>
+          <p:cNvPr id="50" name="Text 48"/>
+          <p:cNvSpPr/>
+          <p:nvPr/>
+        </p:nvSpPr>
+        <p:spPr>
+          <a:xfrm>
+            <a:off x="3585855" y="4169664"/>
+            <a:ext cx="493776" cy="475488"/>
           </a:xfrm>
           <a:prstGeom prst="rect">
             <a:avLst/>
@@ -25100,18 +24932,18 @@
       </p:sp>
       <p:sp>
         <p:nvSpPr>
-          <p:cNvPr id="52" name="Shape 50"/>
-          <p:cNvSpPr/>
-          <p:nvPr/>
-        </p:nvSpPr>
-        <p:spPr>
-          <a:xfrm>
-            <a:off x="4565350" y="4169664"/>
-            <a:ext cx="603504" cy="384048"/>
+          <p:cNvPr id="51" name="Shape 49"/>
+          <p:cNvSpPr/>
+          <p:nvPr/>
+        </p:nvSpPr>
+        <p:spPr>
+          <a:xfrm>
+            <a:off x="4130274" y="4169664"/>
+            <a:ext cx="493776" cy="475488"/>
           </a:xfrm>
           <a:prstGeom prst="rect">
             <a:avLst>
-              <a:gd name="adj" fmla="val 9524"/>
+              <a:gd name="adj" fmla="val 7692"/>
             </a:avLst>
           </a:prstGeom>
           <a:solidFill>
@@ -25127,14 +24959,14 @@
       </p:sp>
       <p:sp>
         <p:nvSpPr>
-          <p:cNvPr id="53" name="Text 51"/>
-          <p:cNvSpPr/>
-          <p:nvPr/>
-        </p:nvSpPr>
-        <p:spPr>
-          <a:xfrm>
-            <a:off x="4565350" y="4169664"/>
-            <a:ext cx="603504" cy="384048"/>
+          <p:cNvPr id="52" name="Text 50"/>
+          <p:cNvSpPr/>
+          <p:nvPr/>
+        </p:nvSpPr>
+        <p:spPr>
+          <a:xfrm>
+            <a:off x="4130274" y="4169664"/>
+            <a:ext cx="493776" cy="475488"/>
           </a:xfrm>
           <a:prstGeom prst="rect">
             <a:avLst/>
@@ -25166,18 +24998,18 @@
       </p:sp>
       <p:sp>
         <p:nvSpPr>
-          <p:cNvPr id="54" name="Shape 52"/>
-          <p:cNvSpPr/>
-          <p:nvPr/>
-        </p:nvSpPr>
-        <p:spPr>
-          <a:xfrm>
-            <a:off x="5218730" y="4169664"/>
-            <a:ext cx="603504" cy="384048"/>
+          <p:cNvPr id="53" name="Shape 51"/>
+          <p:cNvSpPr/>
+          <p:nvPr/>
+        </p:nvSpPr>
+        <p:spPr>
+          <a:xfrm>
+            <a:off x="4674694" y="4169664"/>
+            <a:ext cx="493776" cy="475488"/>
           </a:xfrm>
           <a:prstGeom prst="rect">
             <a:avLst>
-              <a:gd name="adj" fmla="val 9524"/>
+              <a:gd name="adj" fmla="val 7692"/>
             </a:avLst>
           </a:prstGeom>
           <a:solidFill>
@@ -25193,14 +25025,14 @@
       </p:sp>
       <p:sp>
         <p:nvSpPr>
-          <p:cNvPr id="55" name="Text 53"/>
-          <p:cNvSpPr/>
-          <p:nvPr/>
-        </p:nvSpPr>
-        <p:spPr>
-          <a:xfrm>
-            <a:off x="5218730" y="4169664"/>
-            <a:ext cx="603504" cy="384048"/>
+          <p:cNvPr id="54" name="Text 52"/>
+          <p:cNvSpPr/>
+          <p:nvPr/>
+        </p:nvSpPr>
+        <p:spPr>
+          <a:xfrm>
+            <a:off x="4674694" y="4169664"/>
+            <a:ext cx="493776" cy="475488"/>
           </a:xfrm>
           <a:prstGeom prst="rect">
             <a:avLst/>
@@ -25232,18 +25064,18 @@
       </p:sp>
       <p:sp>
         <p:nvSpPr>
-          <p:cNvPr id="56" name="Shape 54"/>
-          <p:cNvSpPr/>
-          <p:nvPr/>
-        </p:nvSpPr>
-        <p:spPr>
-          <a:xfrm>
-            <a:off x="5872111" y="4169664"/>
-            <a:ext cx="603504" cy="384048"/>
+          <p:cNvPr id="55" name="Shape 53"/>
+          <p:cNvSpPr/>
+          <p:nvPr/>
+        </p:nvSpPr>
+        <p:spPr>
+          <a:xfrm>
+            <a:off x="5219114" y="4169664"/>
+            <a:ext cx="493776" cy="475488"/>
           </a:xfrm>
           <a:prstGeom prst="rect">
             <a:avLst>
-              <a:gd name="adj" fmla="val 9524"/>
+              <a:gd name="adj" fmla="val 7692"/>
             </a:avLst>
           </a:prstGeom>
           <a:solidFill>
@@ -25259,14 +25091,14 @@
       </p:sp>
       <p:sp>
         <p:nvSpPr>
-          <p:cNvPr id="57" name="Text 55"/>
-          <p:cNvSpPr/>
-          <p:nvPr/>
-        </p:nvSpPr>
-        <p:spPr>
-          <a:xfrm>
-            <a:off x="5872111" y="4169664"/>
-            <a:ext cx="603504" cy="384048"/>
+          <p:cNvPr id="56" name="Text 54"/>
+          <p:cNvSpPr/>
+          <p:nvPr/>
+        </p:nvSpPr>
+        <p:spPr>
+          <a:xfrm>
+            <a:off x="5219114" y="4169664"/>
+            <a:ext cx="493776" cy="475488"/>
           </a:xfrm>
           <a:prstGeom prst="rect">
             <a:avLst/>
@@ -25298,40 +25130,67 @@
       </p:sp>
       <p:sp>
         <p:nvSpPr>
+          <p:cNvPr id="57" name="Shape 55"/>
+          <p:cNvSpPr/>
+          <p:nvPr/>
+        </p:nvSpPr>
+        <p:spPr>
+          <a:xfrm>
+            <a:off x="5763534" y="4169664"/>
+            <a:ext cx="493776" cy="475488"/>
+          </a:xfrm>
+          <a:prstGeom prst="rect">
+            <a:avLst>
+              <a:gd name="adj" fmla="val 7692"/>
+            </a:avLst>
+          </a:prstGeom>
+          <a:solidFill>
+            <a:srgbClr val="FFFFFF"/>
+          </a:solidFill>
+          <a:ln w="12700">
+            <a:solidFill>
+              <a:srgbClr val="DB2777"/>
+            </a:solidFill>
+            <a:prstDash val="solid"/>
+          </a:ln>
+        </p:spPr>
+      </p:sp>
+      <p:sp>
+        <p:nvSpPr>
           <p:cNvPr id="58" name="Text 56"/>
           <p:cNvSpPr/>
           <p:nvPr/>
         </p:nvSpPr>
         <p:spPr>
           <a:xfrm>
-            <a:off x="5872111" y="4572000"/>
-            <a:ext cx="603504" cy="219456"/>
-          </a:xfrm>
-          <a:prstGeom prst="rect">
-            <a:avLst/>
-          </a:prstGeom>
-          <a:noFill/>
-          <a:ln/>
-        </p:spPr>
-        <p:txBody>
-          <a:bodyPr wrap="square" lIns="0" tIns="0" rIns="0" bIns="0" rtlCol="0" anchor="t"/>
-          <a:lstStyle/>
-          <a:p>
-            <a:pPr algn="ctr" indent="0" marL="0">
-              <a:buNone/>
-            </a:pPr>
-            <a:r>
-              <a:rPr lang="en-US" sz="750" i="1" dirty="0">
-                <a:solidFill>
-                  <a:srgbClr val="94A3B8"/>
-                </a:solidFill>
-                <a:latin typeface="Calibri" pitchFamily="34" charset="0"/>
-                <a:ea typeface="Calibri" pitchFamily="34" charset="-122"/>
-                <a:cs typeface="Calibri" pitchFamily="34" charset="-120"/>
-              </a:rPr>
-              <a:t>/k/</a:t>
-            </a:r>
-            <a:endParaRPr lang="en-US" sz="750" dirty="0"/>
+            <a:off x="5763534" y="4169664"/>
+            <a:ext cx="493776" cy="475488"/>
+          </a:xfrm>
+          <a:prstGeom prst="rect">
+            <a:avLst/>
+          </a:prstGeom>
+          <a:noFill/>
+          <a:ln/>
+        </p:spPr>
+        <p:txBody>
+          <a:bodyPr wrap="square" lIns="0" tIns="0" rIns="0" bIns="0" rtlCol="0" anchor="ctr"/>
+          <a:lstStyle/>
+          <a:p>
+            <a:pPr algn="ctr" indent="0" marL="0">
+              <a:buNone/>
+            </a:pPr>
+            <a:r>
+              <a:rPr lang="en-US" sz="900" b="1" dirty="0">
+                <a:solidFill>
+                  <a:srgbClr val="9D174D"/>
+                </a:solidFill>
+                <a:latin typeface="Trebuchet MS" pitchFamily="34" charset="0"/>
+                <a:ea typeface="Trebuchet MS" pitchFamily="34" charset="-122"/>
+                <a:cs typeface="Trebuchet MS" pitchFamily="34" charset="-120"/>
+              </a:rPr>
+              <a:t>a</a:t>
+            </a:r>
+            <a:endParaRPr lang="en-US" sz="900" dirty="0"/>
           </a:p>
         </p:txBody>
       </p:sp>
@@ -25343,12 +25202,12 @@
         </p:nvSpPr>
         <p:spPr>
           <a:xfrm>
-            <a:off x="6525491" y="4169664"/>
-            <a:ext cx="603504" cy="384048"/>
+            <a:off x="6307953" y="4169664"/>
+            <a:ext cx="493776" cy="475488"/>
           </a:xfrm>
           <a:prstGeom prst="rect">
             <a:avLst>
-              <a:gd name="adj" fmla="val 9524"/>
+              <a:gd name="adj" fmla="val 7692"/>
             </a:avLst>
           </a:prstGeom>
           <a:solidFill>
@@ -25370,8 +25229,8 @@
         </p:nvSpPr>
         <p:spPr>
           <a:xfrm>
-            <a:off x="6525491" y="4169664"/>
-            <a:ext cx="603504" cy="384048"/>
+            <a:off x="6307953" y="4169664"/>
+            <a:ext cx="493776" cy="475488"/>
           </a:xfrm>
           <a:prstGeom prst="rect">
             <a:avLst/>
@@ -25395,7 +25254,7 @@
                 <a:ea typeface="Trebuchet MS" pitchFamily="34" charset="-122"/>
                 <a:cs typeface="Trebuchet MS" pitchFamily="34" charset="-120"/>
               </a:rPr>
-              <a:t>a</a:t>
+              <a:t>t</a:t>
             </a:r>
             <a:endParaRPr lang="en-US" sz="900" dirty="0"/>
           </a:p>
@@ -25409,12 +25268,12 @@
         </p:nvSpPr>
         <p:spPr>
           <a:xfrm>
-            <a:off x="7178871" y="4169664"/>
-            <a:ext cx="603504" cy="384048"/>
+            <a:off x="6852373" y="4169664"/>
+            <a:ext cx="493776" cy="475488"/>
           </a:xfrm>
           <a:prstGeom prst="rect">
             <a:avLst>
-              <a:gd name="adj" fmla="val 9524"/>
+              <a:gd name="adj" fmla="val 7692"/>
             </a:avLst>
           </a:prstGeom>
           <a:solidFill>
@@ -25436,8 +25295,8 @@
         </p:nvSpPr>
         <p:spPr>
           <a:xfrm>
-            <a:off x="7178871" y="4169664"/>
-            <a:ext cx="603504" cy="384048"/>
+            <a:off x="6852373" y="4169664"/>
+            <a:ext cx="493776" cy="475488"/>
           </a:xfrm>
           <a:prstGeom prst="rect">
             <a:avLst/>
@@ -25461,7 +25320,7 @@
                 <a:ea typeface="Trebuchet MS" pitchFamily="34" charset="-122"/>
                 <a:cs typeface="Trebuchet MS" pitchFamily="34" charset="-120"/>
               </a:rPr>
-              <a:t>t</a:t>
+              <a:t>i</a:t>
             </a:r>
             <a:endParaRPr lang="en-US" sz="900" dirty="0"/>
           </a:p>
@@ -25475,12 +25334,12 @@
         </p:nvSpPr>
         <p:spPr>
           <a:xfrm>
-            <a:off x="7832252" y="4169664"/>
-            <a:ext cx="603504" cy="384048"/>
+            <a:off x="7396793" y="4169664"/>
+            <a:ext cx="493776" cy="475488"/>
           </a:xfrm>
           <a:prstGeom prst="rect">
             <a:avLst>
-              <a:gd name="adj" fmla="val 9524"/>
+              <a:gd name="adj" fmla="val 7692"/>
             </a:avLst>
           </a:prstGeom>
           <a:solidFill>
@@ -25502,8 +25361,8 @@
         </p:nvSpPr>
         <p:spPr>
           <a:xfrm>
-            <a:off x="7832252" y="4169664"/>
-            <a:ext cx="603504" cy="384048"/>
+            <a:off x="7396793" y="4169664"/>
+            <a:ext cx="493776" cy="475488"/>
           </a:xfrm>
           <a:prstGeom prst="rect">
             <a:avLst/>
@@ -25527,7 +25386,73 @@
                 <a:ea typeface="Trebuchet MS" pitchFamily="34" charset="-122"/>
                 <a:cs typeface="Trebuchet MS" pitchFamily="34" charset="-120"/>
               </a:rPr>
-              <a:t>ive</a:t>
+              <a:t>v</a:t>
+            </a:r>
+            <a:endParaRPr lang="en-US" sz="900" dirty="0"/>
+          </a:p>
+        </p:txBody>
+      </p:sp>
+      <p:sp>
+        <p:nvSpPr>
+          <p:cNvPr id="65" name="Shape 63"/>
+          <p:cNvSpPr/>
+          <p:nvPr/>
+        </p:nvSpPr>
+        <p:spPr>
+          <a:xfrm>
+            <a:off x="7941212" y="4169664"/>
+            <a:ext cx="493776" cy="475488"/>
+          </a:xfrm>
+          <a:prstGeom prst="rect">
+            <a:avLst>
+              <a:gd name="adj" fmla="val 7692"/>
+            </a:avLst>
+          </a:prstGeom>
+          <a:solidFill>
+            <a:srgbClr val="FFFFFF"/>
+          </a:solidFill>
+          <a:ln w="12700">
+            <a:solidFill>
+              <a:srgbClr val="DB2777"/>
+            </a:solidFill>
+            <a:prstDash val="solid"/>
+          </a:ln>
+        </p:spPr>
+      </p:sp>
+      <p:sp>
+        <p:nvSpPr>
+          <p:cNvPr id="66" name="Text 64"/>
+          <p:cNvSpPr/>
+          <p:nvPr/>
+        </p:nvSpPr>
+        <p:spPr>
+          <a:xfrm>
+            <a:off x="7941212" y="4169664"/>
+            <a:ext cx="493776" cy="475488"/>
+          </a:xfrm>
+          <a:prstGeom prst="rect">
+            <a:avLst/>
+          </a:prstGeom>
+          <a:noFill/>
+          <a:ln/>
+        </p:spPr>
+        <p:txBody>
+          <a:bodyPr wrap="square" lIns="0" tIns="0" rIns="0" bIns="0" rtlCol="0" anchor="ctr"/>
+          <a:lstStyle/>
+          <a:p>
+            <a:pPr algn="ctr" indent="0" marL="0">
+              <a:buNone/>
+            </a:pPr>
+            <a:r>
+              <a:rPr lang="en-US" sz="900" b="1" dirty="0">
+                <a:solidFill>
+                  <a:srgbClr val="9D174D"/>
+                </a:solidFill>
+                <a:latin typeface="Trebuchet MS" pitchFamily="34" charset="0"/>
+                <a:ea typeface="Trebuchet MS" pitchFamily="34" charset="-122"/>
+                <a:cs typeface="Trebuchet MS" pitchFamily="34" charset="-120"/>
+              </a:rPr>
+              <a:t>e</a:t>
             </a:r>
             <a:endParaRPr lang="en-US" sz="900" dirty="0"/>
           </a:p>
@@ -31081,11 +31006,11 @@
         <p:spPr>
           <a:xfrm>
             <a:off x="1874520" y="4096512"/>
-            <a:ext cx="6903720" cy="804672"/>
+            <a:ext cx="6903720" cy="658368"/>
           </a:xfrm>
           <a:prstGeom prst="rect">
             <a:avLst>
-              <a:gd name="adj" fmla="val 6818"/>
+              <a:gd name="adj" fmla="val 8333"/>
             </a:avLst>
           </a:prstGeom>
           <a:solidFill>
@@ -31107,12 +31032,12 @@
         </p:nvSpPr>
         <p:spPr>
           <a:xfrm>
-            <a:off x="1952596" y="4169664"/>
-            <a:ext cx="493776" cy="384048"/>
+            <a:off x="1953158" y="4169664"/>
+            <a:ext cx="415399" cy="475488"/>
           </a:xfrm>
           <a:prstGeom prst="rect">
             <a:avLst>
-              <a:gd name="adj" fmla="val 9524"/>
+              <a:gd name="adj" fmla="val 8805"/>
             </a:avLst>
           </a:prstGeom>
           <a:solidFill>
@@ -31134,8 +31059,8 @@
         </p:nvSpPr>
         <p:spPr>
           <a:xfrm>
-            <a:off x="1952596" y="4169664"/>
-            <a:ext cx="493776" cy="384048"/>
+            <a:off x="1953158" y="4169664"/>
+            <a:ext cx="415399" cy="475488"/>
           </a:xfrm>
           <a:prstGeom prst="rect">
             <a:avLst/>
@@ -31173,12 +31098,12 @@
         </p:nvSpPr>
         <p:spPr>
           <a:xfrm>
-            <a:off x="2497015" y="4169664"/>
-            <a:ext cx="493776" cy="384048"/>
+            <a:off x="2419764" y="4169664"/>
+            <a:ext cx="415399" cy="475488"/>
           </a:xfrm>
           <a:prstGeom prst="rect">
             <a:avLst>
-              <a:gd name="adj" fmla="val 9524"/>
+              <a:gd name="adj" fmla="val 8805"/>
             </a:avLst>
           </a:prstGeom>
           <a:solidFill>
@@ -31200,8 +31125,8 @@
         </p:nvSpPr>
         <p:spPr>
           <a:xfrm>
-            <a:off x="2497015" y="4169664"/>
-            <a:ext cx="493776" cy="384048"/>
+            <a:off x="2419764" y="4169664"/>
+            <a:ext cx="415399" cy="475488"/>
           </a:xfrm>
           <a:prstGeom prst="rect">
             <a:avLst/>
@@ -31239,12 +31164,12 @@
         </p:nvSpPr>
         <p:spPr>
           <a:xfrm>
-            <a:off x="3041435" y="4169664"/>
-            <a:ext cx="493776" cy="384048"/>
+            <a:off x="2886369" y="4169664"/>
+            <a:ext cx="415399" cy="475488"/>
           </a:xfrm>
           <a:prstGeom prst="rect">
             <a:avLst>
-              <a:gd name="adj" fmla="val 9524"/>
+              <a:gd name="adj" fmla="val 8805"/>
             </a:avLst>
           </a:prstGeom>
           <a:solidFill>
@@ -31266,8 +31191,8 @@
         </p:nvSpPr>
         <p:spPr>
           <a:xfrm>
-            <a:off x="3041435" y="4169664"/>
-            <a:ext cx="493776" cy="384048"/>
+            <a:off x="2886369" y="4169664"/>
+            <a:ext cx="415399" cy="475488"/>
           </a:xfrm>
           <a:prstGeom prst="rect">
             <a:avLst/>
@@ -31305,12 +31230,12 @@
         </p:nvSpPr>
         <p:spPr>
           <a:xfrm>
-            <a:off x="3585855" y="4169664"/>
-            <a:ext cx="493776" cy="384048"/>
+            <a:off x="3352974" y="4169664"/>
+            <a:ext cx="415399" cy="475488"/>
           </a:xfrm>
           <a:prstGeom prst="rect">
             <a:avLst>
-              <a:gd name="adj" fmla="val 9524"/>
+              <a:gd name="adj" fmla="val 8805"/>
             </a:avLst>
           </a:prstGeom>
           <a:solidFill>
@@ -31332,8 +31257,8 @@
         </p:nvSpPr>
         <p:spPr>
           <a:xfrm>
-            <a:off x="3585855" y="4169664"/>
-            <a:ext cx="493776" cy="384048"/>
+            <a:off x="3352974" y="4169664"/>
+            <a:ext cx="415399" cy="475488"/>
           </a:xfrm>
           <a:prstGeom prst="rect">
             <a:avLst/>
@@ -31371,12 +31296,12 @@
         </p:nvSpPr>
         <p:spPr>
           <a:xfrm>
-            <a:off x="4130274" y="4169664"/>
-            <a:ext cx="493776" cy="384048"/>
+            <a:off x="3819579" y="4169664"/>
+            <a:ext cx="415399" cy="475488"/>
           </a:xfrm>
           <a:prstGeom prst="rect">
             <a:avLst>
-              <a:gd name="adj" fmla="val 9524"/>
+              <a:gd name="adj" fmla="val 8805"/>
             </a:avLst>
           </a:prstGeom>
           <a:solidFill>
@@ -31398,8 +31323,8 @@
         </p:nvSpPr>
         <p:spPr>
           <a:xfrm>
-            <a:off x="4130274" y="4169664"/>
-            <a:ext cx="493776" cy="384048"/>
+            <a:off x="3819579" y="4169664"/>
+            <a:ext cx="415399" cy="475488"/>
           </a:xfrm>
           <a:prstGeom prst="rect">
             <a:avLst/>
@@ -31431,57 +31356,18 @@
       </p:sp>
       <p:sp>
         <p:nvSpPr>
-          <p:cNvPr id="55" name="Text 53"/>
-          <p:cNvSpPr/>
-          <p:nvPr/>
-        </p:nvSpPr>
-        <p:spPr>
-          <a:xfrm>
-            <a:off x="4130274" y="4572000"/>
-            <a:ext cx="493776" cy="219456"/>
-          </a:xfrm>
-          <a:prstGeom prst="rect">
-            <a:avLst/>
-          </a:prstGeom>
-          <a:noFill/>
-          <a:ln/>
-        </p:spPr>
-        <p:txBody>
-          <a:bodyPr wrap="square" lIns="0" tIns="0" rIns="0" bIns="0" rtlCol="0" anchor="t"/>
-          <a:lstStyle/>
-          <a:p>
-            <a:pPr algn="ctr" indent="0" marL="0">
-              <a:buNone/>
-            </a:pPr>
-            <a:r>
-              <a:rPr lang="en-US" sz="750" i="1" dirty="0">
-                <a:solidFill>
-                  <a:srgbClr val="94A3B8"/>
-                </a:solidFill>
-                <a:latin typeface="Calibri" pitchFamily="34" charset="0"/>
-                <a:ea typeface="Calibri" pitchFamily="34" charset="-122"/>
-                <a:cs typeface="Calibri" pitchFamily="34" charset="-120"/>
-              </a:rPr>
-              <a:t>/k/</a:t>
-            </a:r>
-            <a:endParaRPr lang="en-US" sz="750" dirty="0"/>
-          </a:p>
-        </p:txBody>
-      </p:sp>
-      <p:sp>
-        <p:nvSpPr>
-          <p:cNvPr id="56" name="Shape 54"/>
-          <p:cNvSpPr/>
-          <p:nvPr/>
-        </p:nvSpPr>
-        <p:spPr>
-          <a:xfrm>
-            <a:off x="4674694" y="4169664"/>
-            <a:ext cx="493776" cy="384048"/>
+          <p:cNvPr id="55" name="Shape 53"/>
+          <p:cNvSpPr/>
+          <p:nvPr/>
+        </p:nvSpPr>
+        <p:spPr>
+          <a:xfrm>
+            <a:off x="4286185" y="4169664"/>
+            <a:ext cx="415399" cy="475488"/>
           </a:xfrm>
           <a:prstGeom prst="rect">
             <a:avLst>
-              <a:gd name="adj" fmla="val 9524"/>
+              <a:gd name="adj" fmla="val 8805"/>
             </a:avLst>
           </a:prstGeom>
           <a:solidFill>
@@ -31497,14 +31383,14 @@
       </p:sp>
       <p:sp>
         <p:nvSpPr>
-          <p:cNvPr id="57" name="Text 55"/>
-          <p:cNvSpPr/>
-          <p:nvPr/>
-        </p:nvSpPr>
-        <p:spPr>
-          <a:xfrm>
-            <a:off x="4674694" y="4169664"/>
-            <a:ext cx="493776" cy="384048"/>
+          <p:cNvPr id="56" name="Text 54"/>
+          <p:cNvSpPr/>
+          <p:nvPr/>
+        </p:nvSpPr>
+        <p:spPr>
+          <a:xfrm>
+            <a:off x="4286185" y="4169664"/>
+            <a:ext cx="415399" cy="475488"/>
           </a:xfrm>
           <a:prstGeom prst="rect">
             <a:avLst/>
@@ -31536,18 +31422,18 @@
       </p:sp>
       <p:sp>
         <p:nvSpPr>
-          <p:cNvPr id="58" name="Shape 56"/>
-          <p:cNvSpPr/>
-          <p:nvPr/>
-        </p:nvSpPr>
-        <p:spPr>
-          <a:xfrm>
-            <a:off x="5219114" y="4169664"/>
-            <a:ext cx="493776" cy="384048"/>
+          <p:cNvPr id="57" name="Shape 55"/>
+          <p:cNvSpPr/>
+          <p:nvPr/>
+        </p:nvSpPr>
+        <p:spPr>
+          <a:xfrm>
+            <a:off x="4752790" y="4169664"/>
+            <a:ext cx="415399" cy="475488"/>
           </a:xfrm>
           <a:prstGeom prst="rect">
             <a:avLst>
-              <a:gd name="adj" fmla="val 9524"/>
+              <a:gd name="adj" fmla="val 8805"/>
             </a:avLst>
           </a:prstGeom>
           <a:solidFill>
@@ -31563,14 +31449,14 @@
       </p:sp>
       <p:sp>
         <p:nvSpPr>
-          <p:cNvPr id="59" name="Text 57"/>
-          <p:cNvSpPr/>
-          <p:nvPr/>
-        </p:nvSpPr>
-        <p:spPr>
-          <a:xfrm>
-            <a:off x="5219114" y="4169664"/>
-            <a:ext cx="493776" cy="384048"/>
+          <p:cNvPr id="58" name="Text 56"/>
+          <p:cNvSpPr/>
+          <p:nvPr/>
+        </p:nvSpPr>
+        <p:spPr>
+          <a:xfrm>
+            <a:off x="4752790" y="4169664"/>
+            <a:ext cx="415399" cy="475488"/>
           </a:xfrm>
           <a:prstGeom prst="rect">
             <a:avLst/>
@@ -31594,7 +31480,7 @@
                 <a:ea typeface="Trebuchet MS" pitchFamily="34" charset="-122"/>
                 <a:cs typeface="Trebuchet MS" pitchFamily="34" charset="-120"/>
               </a:rPr>
-              <a:t>m</a:t>
+              <a:t>mm</a:t>
             </a:r>
             <a:endParaRPr lang="en-US" sz="900" dirty="0"/>
           </a:p>
@@ -31602,18 +31488,18 @@
       </p:sp>
       <p:sp>
         <p:nvSpPr>
-          <p:cNvPr id="60" name="Shape 58"/>
-          <p:cNvSpPr/>
-          <p:nvPr/>
-        </p:nvSpPr>
-        <p:spPr>
-          <a:xfrm>
-            <a:off x="5763534" y="4169664"/>
-            <a:ext cx="493776" cy="384048"/>
+          <p:cNvPr id="59" name="Shape 57"/>
+          <p:cNvSpPr/>
+          <p:nvPr/>
+        </p:nvSpPr>
+        <p:spPr>
+          <a:xfrm>
+            <a:off x="5219395" y="4169664"/>
+            <a:ext cx="415399" cy="475488"/>
           </a:xfrm>
           <a:prstGeom prst="rect">
             <a:avLst>
-              <a:gd name="adj" fmla="val 9524"/>
+              <a:gd name="adj" fmla="val 8805"/>
             </a:avLst>
           </a:prstGeom>
           <a:solidFill>
@@ -31629,14 +31515,14 @@
       </p:sp>
       <p:sp>
         <p:nvSpPr>
-          <p:cNvPr id="61" name="Text 59"/>
-          <p:cNvSpPr/>
-          <p:nvPr/>
-        </p:nvSpPr>
-        <p:spPr>
-          <a:xfrm>
-            <a:off x="5763534" y="4169664"/>
-            <a:ext cx="493776" cy="384048"/>
+          <p:cNvPr id="60" name="Text 58"/>
+          <p:cNvSpPr/>
+          <p:nvPr/>
+        </p:nvSpPr>
+        <p:spPr>
+          <a:xfrm>
+            <a:off x="5219395" y="4169664"/>
+            <a:ext cx="415399" cy="475488"/>
           </a:xfrm>
           <a:prstGeom prst="rect">
             <a:avLst/>
@@ -31668,18 +31554,18 @@
       </p:sp>
       <p:sp>
         <p:nvSpPr>
-          <p:cNvPr id="62" name="Shape 60"/>
-          <p:cNvSpPr/>
-          <p:nvPr/>
-        </p:nvSpPr>
-        <p:spPr>
-          <a:xfrm>
-            <a:off x="6307953" y="4169664"/>
-            <a:ext cx="493776" cy="384048"/>
+          <p:cNvPr id="61" name="Shape 59"/>
+          <p:cNvSpPr/>
+          <p:nvPr/>
+        </p:nvSpPr>
+        <p:spPr>
+          <a:xfrm>
+            <a:off x="5686000" y="4169664"/>
+            <a:ext cx="415399" cy="475488"/>
           </a:xfrm>
           <a:prstGeom prst="rect">
             <a:avLst>
-              <a:gd name="adj" fmla="val 9524"/>
+              <a:gd name="adj" fmla="val 8805"/>
             </a:avLst>
           </a:prstGeom>
           <a:solidFill>
@@ -31695,14 +31581,14 @@
       </p:sp>
       <p:sp>
         <p:nvSpPr>
-          <p:cNvPr id="63" name="Text 61"/>
-          <p:cNvSpPr/>
-          <p:nvPr/>
-        </p:nvSpPr>
-        <p:spPr>
-          <a:xfrm>
-            <a:off x="6307953" y="4169664"/>
-            <a:ext cx="493776" cy="384048"/>
+          <p:cNvPr id="62" name="Text 60"/>
+          <p:cNvSpPr/>
+          <p:nvPr/>
+        </p:nvSpPr>
+        <p:spPr>
+          <a:xfrm>
+            <a:off x="5686000" y="4169664"/>
+            <a:ext cx="415399" cy="475488"/>
           </a:xfrm>
           <a:prstGeom prst="rect">
             <a:avLst/>
@@ -31734,18 +31620,18 @@
       </p:sp>
       <p:sp>
         <p:nvSpPr>
-          <p:cNvPr id="64" name="Shape 62"/>
-          <p:cNvSpPr/>
-          <p:nvPr/>
-        </p:nvSpPr>
-        <p:spPr>
-          <a:xfrm>
-            <a:off x="6852373" y="4169664"/>
-            <a:ext cx="493776" cy="384048"/>
+          <p:cNvPr id="63" name="Shape 61"/>
+          <p:cNvSpPr/>
+          <p:nvPr/>
+        </p:nvSpPr>
+        <p:spPr>
+          <a:xfrm>
+            <a:off x="6152606" y="4169664"/>
+            <a:ext cx="415399" cy="475488"/>
           </a:xfrm>
           <a:prstGeom prst="rect">
             <a:avLst>
-              <a:gd name="adj" fmla="val 9524"/>
+              <a:gd name="adj" fmla="val 8805"/>
             </a:avLst>
           </a:prstGeom>
           <a:solidFill>
@@ -31761,14 +31647,14 @@
       </p:sp>
       <p:sp>
         <p:nvSpPr>
-          <p:cNvPr id="65" name="Text 63"/>
-          <p:cNvSpPr/>
-          <p:nvPr/>
-        </p:nvSpPr>
-        <p:spPr>
-          <a:xfrm>
-            <a:off x="6852373" y="4169664"/>
-            <a:ext cx="493776" cy="384048"/>
+          <p:cNvPr id="64" name="Text 62"/>
+          <p:cNvSpPr/>
+          <p:nvPr/>
+        </p:nvSpPr>
+        <p:spPr>
+          <a:xfrm>
+            <a:off x="6152606" y="4169664"/>
+            <a:ext cx="415399" cy="475488"/>
           </a:xfrm>
           <a:prstGeom prst="rect">
             <a:avLst/>
@@ -31800,18 +31686,18 @@
       </p:sp>
       <p:sp>
         <p:nvSpPr>
-          <p:cNvPr id="66" name="Shape 64"/>
-          <p:cNvSpPr/>
-          <p:nvPr/>
-        </p:nvSpPr>
-        <p:spPr>
-          <a:xfrm>
-            <a:off x="7396793" y="4169664"/>
-            <a:ext cx="493776" cy="384048"/>
+          <p:cNvPr id="65" name="Shape 63"/>
+          <p:cNvSpPr/>
+          <p:nvPr/>
+        </p:nvSpPr>
+        <p:spPr>
+          <a:xfrm>
+            <a:off x="6619211" y="4169664"/>
+            <a:ext cx="415399" cy="475488"/>
           </a:xfrm>
           <a:prstGeom prst="rect">
             <a:avLst>
-              <a:gd name="adj" fmla="val 9524"/>
+              <a:gd name="adj" fmla="val 8805"/>
             </a:avLst>
           </a:prstGeom>
           <a:solidFill>
@@ -31827,14 +31713,14 @@
       </p:sp>
       <p:sp>
         <p:nvSpPr>
-          <p:cNvPr id="67" name="Text 65"/>
-          <p:cNvSpPr/>
-          <p:nvPr/>
-        </p:nvSpPr>
-        <p:spPr>
-          <a:xfrm>
-            <a:off x="7396793" y="4169664"/>
-            <a:ext cx="493776" cy="384048"/>
+          <p:cNvPr id="66" name="Text 64"/>
+          <p:cNvSpPr/>
+          <p:nvPr/>
+        </p:nvSpPr>
+        <p:spPr>
+          <a:xfrm>
+            <a:off x="6619211" y="4169664"/>
+            <a:ext cx="415399" cy="475488"/>
           </a:xfrm>
           <a:prstGeom prst="rect">
             <a:avLst/>
@@ -31866,40 +31752,67 @@
       </p:sp>
       <p:sp>
         <p:nvSpPr>
+          <p:cNvPr id="67" name="Shape 65"/>
+          <p:cNvSpPr/>
+          <p:nvPr/>
+        </p:nvSpPr>
+        <p:spPr>
+          <a:xfrm>
+            <a:off x="7085816" y="4169664"/>
+            <a:ext cx="415399" cy="475488"/>
+          </a:xfrm>
+          <a:prstGeom prst="rect">
+            <a:avLst>
+              <a:gd name="adj" fmla="val 8805"/>
+            </a:avLst>
+          </a:prstGeom>
+          <a:solidFill>
+            <a:srgbClr val="FFFFFF"/>
+          </a:solidFill>
+          <a:ln w="12700">
+            <a:solidFill>
+              <a:srgbClr val="DB2777"/>
+            </a:solidFill>
+            <a:prstDash val="solid"/>
+          </a:ln>
+        </p:spPr>
+      </p:sp>
+      <p:sp>
+        <p:nvSpPr>
           <p:cNvPr id="68" name="Text 66"/>
           <p:cNvSpPr/>
           <p:nvPr/>
         </p:nvSpPr>
         <p:spPr>
           <a:xfrm>
-            <a:off x="7396793" y="4572000"/>
-            <a:ext cx="493776" cy="219456"/>
-          </a:xfrm>
-          <a:prstGeom prst="rect">
-            <a:avLst/>
-          </a:prstGeom>
-          <a:noFill/>
-          <a:ln/>
-        </p:spPr>
-        <p:txBody>
-          <a:bodyPr wrap="square" lIns="0" tIns="0" rIns="0" bIns="0" rtlCol="0" anchor="t"/>
-          <a:lstStyle/>
-          <a:p>
-            <a:pPr algn="ctr" indent="0" marL="0">
-              <a:buNone/>
-            </a:pPr>
-            <a:r>
-              <a:rPr lang="en-US" sz="750" i="1" dirty="0">
-                <a:solidFill>
-                  <a:srgbClr val="94A3B8"/>
-                </a:solidFill>
-                <a:latin typeface="Calibri" pitchFamily="34" charset="0"/>
-                <a:ea typeface="Calibri" pitchFamily="34" charset="-122"/>
-                <a:cs typeface="Calibri" pitchFamily="34" charset="-120"/>
-              </a:rPr>
-              <a:t>/k/</a:t>
-            </a:r>
-            <a:endParaRPr lang="en-US" sz="750" dirty="0"/>
+            <a:off x="7085816" y="4169664"/>
+            <a:ext cx="415399" cy="475488"/>
+          </a:xfrm>
+          <a:prstGeom prst="rect">
+            <a:avLst/>
+          </a:prstGeom>
+          <a:noFill/>
+          <a:ln/>
+        </p:spPr>
+        <p:txBody>
+          <a:bodyPr wrap="square" lIns="0" tIns="0" rIns="0" bIns="0" rtlCol="0" anchor="ctr"/>
+          <a:lstStyle/>
+          <a:p>
+            <a:pPr algn="ctr" indent="0" marL="0">
+              <a:buNone/>
+            </a:pPr>
+            <a:r>
+              <a:rPr lang="en-US" sz="900" b="1" dirty="0">
+                <a:solidFill>
+                  <a:srgbClr val="9D174D"/>
+                </a:solidFill>
+                <a:latin typeface="Trebuchet MS" pitchFamily="34" charset="0"/>
+                <a:ea typeface="Trebuchet MS" pitchFamily="34" charset="-122"/>
+                <a:cs typeface="Trebuchet MS" pitchFamily="34" charset="-120"/>
+              </a:rPr>
+              <a:t>a</a:t>
+            </a:r>
+            <a:endParaRPr lang="en-US" sz="900" dirty="0"/>
           </a:p>
         </p:txBody>
       </p:sp>
@@ -31911,12 +31824,12 @@
         </p:nvSpPr>
         <p:spPr>
           <a:xfrm>
-            <a:off x="7941212" y="4169664"/>
-            <a:ext cx="493776" cy="384048"/>
+            <a:off x="7552421" y="4169664"/>
+            <a:ext cx="415399" cy="475488"/>
           </a:xfrm>
           <a:prstGeom prst="rect">
             <a:avLst>
-              <a:gd name="adj" fmla="val 9524"/>
+              <a:gd name="adj" fmla="val 8805"/>
             </a:avLst>
           </a:prstGeom>
           <a:solidFill>
@@ -31938,8 +31851,8 @@
         </p:nvSpPr>
         <p:spPr>
           <a:xfrm>
-            <a:off x="7941212" y="4169664"/>
-            <a:ext cx="493776" cy="384048"/>
+            <a:off x="7552421" y="4169664"/>
+            <a:ext cx="415399" cy="475488"/>
           </a:xfrm>
           <a:prstGeom prst="rect">
             <a:avLst/>
@@ -31963,7 +31876,73 @@
                 <a:ea typeface="Trebuchet MS" pitchFamily="34" charset="-122"/>
                 <a:cs typeface="Trebuchet MS" pitchFamily="34" charset="-120"/>
               </a:rPr>
-              <a:t>ate</a:t>
+              <a:t>t</a:t>
+            </a:r>
+            <a:endParaRPr lang="en-US" sz="900" dirty="0"/>
+          </a:p>
+        </p:txBody>
+      </p:sp>
+      <p:sp>
+        <p:nvSpPr>
+          <p:cNvPr id="71" name="Shape 69"/>
+          <p:cNvSpPr/>
+          <p:nvPr/>
+        </p:nvSpPr>
+        <p:spPr>
+          <a:xfrm>
+            <a:off x="8019027" y="4169664"/>
+            <a:ext cx="415399" cy="475488"/>
+          </a:xfrm>
+          <a:prstGeom prst="rect">
+            <a:avLst>
+              <a:gd name="adj" fmla="val 8805"/>
+            </a:avLst>
+          </a:prstGeom>
+          <a:solidFill>
+            <a:srgbClr val="FFFFFF"/>
+          </a:solidFill>
+          <a:ln w="12700">
+            <a:solidFill>
+              <a:srgbClr val="DB2777"/>
+            </a:solidFill>
+            <a:prstDash val="solid"/>
+          </a:ln>
+        </p:spPr>
+      </p:sp>
+      <p:sp>
+        <p:nvSpPr>
+          <p:cNvPr id="72" name="Text 70"/>
+          <p:cNvSpPr/>
+          <p:nvPr/>
+        </p:nvSpPr>
+        <p:spPr>
+          <a:xfrm>
+            <a:off x="8019027" y="4169664"/>
+            <a:ext cx="415399" cy="475488"/>
+          </a:xfrm>
+          <a:prstGeom prst="rect">
+            <a:avLst/>
+          </a:prstGeom>
+          <a:noFill/>
+          <a:ln/>
+        </p:spPr>
+        <p:txBody>
+          <a:bodyPr wrap="square" lIns="0" tIns="0" rIns="0" bIns="0" rtlCol="0" anchor="ctr"/>
+          <a:lstStyle/>
+          <a:p>
+            <a:pPr algn="ctr" indent="0" marL="0">
+              <a:buNone/>
+            </a:pPr>
+            <a:r>
+              <a:rPr lang="en-US" sz="900" b="1" dirty="0">
+                <a:solidFill>
+                  <a:srgbClr val="9D174D"/>
+                </a:solidFill>
+                <a:latin typeface="Trebuchet MS" pitchFamily="34" charset="0"/>
+                <a:ea typeface="Trebuchet MS" pitchFamily="34" charset="-122"/>
+                <a:cs typeface="Trebuchet MS" pitchFamily="34" charset="-120"/>
+              </a:rPr>
+              <a:t>e</a:t>
             </a:r>
             <a:endParaRPr lang="en-US" sz="900" dirty="0"/>
           </a:p>
@@ -37251,11 +37230,11 @@
         <p:spPr>
           <a:xfrm>
             <a:off x="1874520" y="4096512"/>
-            <a:ext cx="6903720" cy="804672"/>
+            <a:ext cx="6903720" cy="658368"/>
           </a:xfrm>
           <a:prstGeom prst="rect">
             <a:avLst>
-              <a:gd name="adj" fmla="val 6818"/>
+              <a:gd name="adj" fmla="val 8333"/>
             </a:avLst>
           </a:prstGeom>
           <a:solidFill>
@@ -37277,8 +37256,8 @@
         </p:nvSpPr>
         <p:spPr>
           <a:xfrm>
-            <a:off x="1953158" y="4169664"/>
-            <a:ext cx="415399" cy="384048"/>
+            <a:off x="1953387" y="4169664"/>
+            <a:ext cx="384048" cy="475488"/>
           </a:xfrm>
           <a:prstGeom prst="rect">
             <a:avLst>
@@ -37304,8 +37283,8 @@
         </p:nvSpPr>
         <p:spPr>
           <a:xfrm>
-            <a:off x="1953158" y="4169664"/>
-            <a:ext cx="415399" cy="384048"/>
+            <a:off x="1953387" y="4169664"/>
+            <a:ext cx="384048" cy="475488"/>
           </a:xfrm>
           <a:prstGeom prst="rect">
             <a:avLst/>
@@ -37343,8 +37322,8 @@
         </p:nvSpPr>
         <p:spPr>
           <a:xfrm>
-            <a:off x="2419764" y="4169664"/>
-            <a:ext cx="415399" cy="384048"/>
+            <a:off x="2388870" y="4169664"/>
+            <a:ext cx="384048" cy="475488"/>
           </a:xfrm>
           <a:prstGeom prst="rect">
             <a:avLst>
@@ -37370,8 +37349,8 @@
         </p:nvSpPr>
         <p:spPr>
           <a:xfrm>
-            <a:off x="2419764" y="4169664"/>
-            <a:ext cx="415399" cy="384048"/>
+            <a:off x="2388870" y="4169664"/>
+            <a:ext cx="384048" cy="475488"/>
           </a:xfrm>
           <a:prstGeom prst="rect">
             <a:avLst/>
@@ -37409,8 +37388,8 @@
         </p:nvSpPr>
         <p:spPr>
           <a:xfrm>
-            <a:off x="2886369" y="4169664"/>
-            <a:ext cx="415399" cy="384048"/>
+            <a:off x="2824353" y="4169664"/>
+            <a:ext cx="384048" cy="475488"/>
           </a:xfrm>
           <a:prstGeom prst="rect">
             <a:avLst>
@@ -37436,8 +37415,8 @@
         </p:nvSpPr>
         <p:spPr>
           <a:xfrm>
-            <a:off x="2886369" y="4169664"/>
-            <a:ext cx="415399" cy="384048"/>
+            <a:off x="2824353" y="4169664"/>
+            <a:ext cx="384048" cy="475488"/>
           </a:xfrm>
           <a:prstGeom prst="rect">
             <a:avLst/>
@@ -37475,8 +37454,8 @@
         </p:nvSpPr>
         <p:spPr>
           <a:xfrm>
-            <a:off x="3352974" y="4169664"/>
-            <a:ext cx="415399" cy="384048"/>
+            <a:off x="3259836" y="4169664"/>
+            <a:ext cx="384048" cy="475488"/>
           </a:xfrm>
           <a:prstGeom prst="rect">
             <a:avLst>
@@ -37502,8 +37481,8 @@
         </p:nvSpPr>
         <p:spPr>
           <a:xfrm>
-            <a:off x="3352974" y="4169664"/>
-            <a:ext cx="415399" cy="384048"/>
+            <a:off x="3259836" y="4169664"/>
+            <a:ext cx="384048" cy="475488"/>
           </a:xfrm>
           <a:prstGeom prst="rect">
             <a:avLst/>
@@ -37535,53 +37514,14 @@
       </p:sp>
       <p:sp>
         <p:nvSpPr>
-          <p:cNvPr id="57" name="Text 55"/>
-          <p:cNvSpPr/>
-          <p:nvPr/>
-        </p:nvSpPr>
-        <p:spPr>
-          <a:xfrm>
-            <a:off x="3352974" y="4572000"/>
-            <a:ext cx="415399" cy="219456"/>
-          </a:xfrm>
-          <a:prstGeom prst="rect">
-            <a:avLst/>
-          </a:prstGeom>
-          <a:noFill/>
-          <a:ln/>
-        </p:spPr>
-        <p:txBody>
-          <a:bodyPr wrap="square" lIns="0" tIns="0" rIns="0" bIns="0" rtlCol="0" anchor="t"/>
-          <a:lstStyle/>
-          <a:p>
-            <a:pPr algn="ctr" indent="0" marL="0">
-              <a:buNone/>
-            </a:pPr>
-            <a:r>
-              <a:rPr lang="en-US" sz="750" i="1" dirty="0">
-                <a:solidFill>
-                  <a:srgbClr val="94A3B8"/>
-                </a:solidFill>
-                <a:latin typeface="Calibri" pitchFamily="34" charset="0"/>
-                <a:ea typeface="Calibri" pitchFamily="34" charset="-122"/>
-                <a:cs typeface="Calibri" pitchFamily="34" charset="-120"/>
-              </a:rPr>
-              <a:t>/k/</a:t>
-            </a:r>
-            <a:endParaRPr lang="en-US" sz="750" dirty="0"/>
-          </a:p>
-        </p:txBody>
-      </p:sp>
-      <p:sp>
-        <p:nvSpPr>
-          <p:cNvPr id="58" name="Shape 56"/>
-          <p:cNvSpPr/>
-          <p:nvPr/>
-        </p:nvSpPr>
-        <p:spPr>
-          <a:xfrm>
-            <a:off x="3819579" y="4169664"/>
-            <a:ext cx="415399" cy="384048"/>
+          <p:cNvPr id="57" name="Shape 55"/>
+          <p:cNvSpPr/>
+          <p:nvPr/>
+        </p:nvSpPr>
+        <p:spPr>
+          <a:xfrm>
+            <a:off x="3695319" y="4169664"/>
+            <a:ext cx="384048" cy="475488"/>
           </a:xfrm>
           <a:prstGeom prst="rect">
             <a:avLst>
@@ -37601,14 +37541,14 @@
       </p:sp>
       <p:sp>
         <p:nvSpPr>
-          <p:cNvPr id="59" name="Text 57"/>
-          <p:cNvSpPr/>
-          <p:nvPr/>
-        </p:nvSpPr>
-        <p:spPr>
-          <a:xfrm>
-            <a:off x="3819579" y="4169664"/>
-            <a:ext cx="415399" cy="384048"/>
+          <p:cNvPr id="58" name="Text 56"/>
+          <p:cNvSpPr/>
+          <p:nvPr/>
+        </p:nvSpPr>
+        <p:spPr>
+          <a:xfrm>
+            <a:off x="3695319" y="4169664"/>
+            <a:ext cx="384048" cy="475488"/>
           </a:xfrm>
           <a:prstGeom prst="rect">
             <a:avLst/>
@@ -37640,14 +37580,14 @@
       </p:sp>
       <p:sp>
         <p:nvSpPr>
-          <p:cNvPr id="60" name="Shape 58"/>
-          <p:cNvSpPr/>
-          <p:nvPr/>
-        </p:nvSpPr>
-        <p:spPr>
-          <a:xfrm>
-            <a:off x="4286185" y="4169664"/>
-            <a:ext cx="415399" cy="384048"/>
+          <p:cNvPr id="59" name="Shape 57"/>
+          <p:cNvSpPr/>
+          <p:nvPr/>
+        </p:nvSpPr>
+        <p:spPr>
+          <a:xfrm>
+            <a:off x="4130802" y="4169664"/>
+            <a:ext cx="384048" cy="475488"/>
           </a:xfrm>
           <a:prstGeom prst="rect">
             <a:avLst>
@@ -37667,14 +37607,14 @@
       </p:sp>
       <p:sp>
         <p:nvSpPr>
-          <p:cNvPr id="61" name="Text 59"/>
-          <p:cNvSpPr/>
-          <p:nvPr/>
-        </p:nvSpPr>
-        <p:spPr>
-          <a:xfrm>
-            <a:off x="4286185" y="4169664"/>
-            <a:ext cx="415399" cy="384048"/>
+          <p:cNvPr id="60" name="Text 58"/>
+          <p:cNvSpPr/>
+          <p:nvPr/>
+        </p:nvSpPr>
+        <p:spPr>
+          <a:xfrm>
+            <a:off x="4130802" y="4169664"/>
+            <a:ext cx="384048" cy="475488"/>
           </a:xfrm>
           <a:prstGeom prst="rect">
             <a:avLst/>
@@ -37698,7 +37638,7 @@
                 <a:ea typeface="Trebuchet MS" pitchFamily="34" charset="-122"/>
                 <a:cs typeface="Trebuchet MS" pitchFamily="34" charset="-120"/>
               </a:rPr>
-              <a:t>m</a:t>
+              <a:t>mm</a:t>
             </a:r>
             <a:endParaRPr lang="en-US" sz="900" dirty="0"/>
           </a:p>
@@ -37706,14 +37646,14 @@
       </p:sp>
       <p:sp>
         <p:nvSpPr>
-          <p:cNvPr id="62" name="Shape 60"/>
-          <p:cNvSpPr/>
-          <p:nvPr/>
-        </p:nvSpPr>
-        <p:spPr>
-          <a:xfrm>
-            <a:off x="4752790" y="4169664"/>
-            <a:ext cx="415399" cy="384048"/>
+          <p:cNvPr id="61" name="Shape 59"/>
+          <p:cNvSpPr/>
+          <p:nvPr/>
+        </p:nvSpPr>
+        <p:spPr>
+          <a:xfrm>
+            <a:off x="4566285" y="4169664"/>
+            <a:ext cx="384048" cy="475488"/>
           </a:xfrm>
           <a:prstGeom prst="rect">
             <a:avLst>
@@ -37733,14 +37673,14 @@
       </p:sp>
       <p:sp>
         <p:nvSpPr>
-          <p:cNvPr id="63" name="Text 61"/>
-          <p:cNvSpPr/>
-          <p:nvPr/>
-        </p:nvSpPr>
-        <p:spPr>
-          <a:xfrm>
-            <a:off x="4752790" y="4169664"/>
-            <a:ext cx="415399" cy="384048"/>
+          <p:cNvPr id="62" name="Text 60"/>
+          <p:cNvSpPr/>
+          <p:nvPr/>
+        </p:nvSpPr>
+        <p:spPr>
+          <a:xfrm>
+            <a:off x="4566285" y="4169664"/>
+            <a:ext cx="384048" cy="475488"/>
           </a:xfrm>
           <a:prstGeom prst="rect">
             <a:avLst/>
@@ -37772,14 +37712,14 @@
       </p:sp>
       <p:sp>
         <p:nvSpPr>
-          <p:cNvPr id="64" name="Shape 62"/>
-          <p:cNvSpPr/>
-          <p:nvPr/>
-        </p:nvSpPr>
-        <p:spPr>
-          <a:xfrm>
-            <a:off x="5219395" y="4169664"/>
-            <a:ext cx="415399" cy="384048"/>
+          <p:cNvPr id="63" name="Shape 61"/>
+          <p:cNvSpPr/>
+          <p:nvPr/>
+        </p:nvSpPr>
+        <p:spPr>
+          <a:xfrm>
+            <a:off x="5001768" y="4169664"/>
+            <a:ext cx="384048" cy="475488"/>
           </a:xfrm>
           <a:prstGeom prst="rect">
             <a:avLst>
@@ -37799,14 +37739,14 @@
       </p:sp>
       <p:sp>
         <p:nvSpPr>
-          <p:cNvPr id="65" name="Text 63"/>
-          <p:cNvSpPr/>
-          <p:nvPr/>
-        </p:nvSpPr>
-        <p:spPr>
-          <a:xfrm>
-            <a:off x="5219395" y="4169664"/>
-            <a:ext cx="415399" cy="384048"/>
+          <p:cNvPr id="64" name="Text 62"/>
+          <p:cNvSpPr/>
+          <p:nvPr/>
+        </p:nvSpPr>
+        <p:spPr>
+          <a:xfrm>
+            <a:off x="5001768" y="4169664"/>
+            <a:ext cx="384048" cy="475488"/>
           </a:xfrm>
           <a:prstGeom prst="rect">
             <a:avLst/>
@@ -37838,14 +37778,14 @@
       </p:sp>
       <p:sp>
         <p:nvSpPr>
-          <p:cNvPr id="66" name="Shape 64"/>
-          <p:cNvSpPr/>
-          <p:nvPr/>
-        </p:nvSpPr>
-        <p:spPr>
-          <a:xfrm>
-            <a:off x="5686000" y="4169664"/>
-            <a:ext cx="415399" cy="384048"/>
+          <p:cNvPr id="65" name="Shape 63"/>
+          <p:cNvSpPr/>
+          <p:nvPr/>
+        </p:nvSpPr>
+        <p:spPr>
+          <a:xfrm>
+            <a:off x="5437251" y="4169664"/>
+            <a:ext cx="384048" cy="475488"/>
           </a:xfrm>
           <a:prstGeom prst="rect">
             <a:avLst>
@@ -37865,14 +37805,14 @@
       </p:sp>
       <p:sp>
         <p:nvSpPr>
-          <p:cNvPr id="67" name="Text 65"/>
-          <p:cNvSpPr/>
-          <p:nvPr/>
-        </p:nvSpPr>
-        <p:spPr>
-          <a:xfrm>
-            <a:off x="5686000" y="4169664"/>
-            <a:ext cx="415399" cy="384048"/>
+          <p:cNvPr id="66" name="Text 64"/>
+          <p:cNvSpPr/>
+          <p:nvPr/>
+        </p:nvSpPr>
+        <p:spPr>
+          <a:xfrm>
+            <a:off x="5437251" y="4169664"/>
+            <a:ext cx="384048" cy="475488"/>
           </a:xfrm>
           <a:prstGeom prst="rect">
             <a:avLst/>
@@ -37904,14 +37844,14 @@
       </p:sp>
       <p:sp>
         <p:nvSpPr>
-          <p:cNvPr id="68" name="Shape 66"/>
-          <p:cNvSpPr/>
-          <p:nvPr/>
-        </p:nvSpPr>
-        <p:spPr>
-          <a:xfrm>
-            <a:off x="6152606" y="4169664"/>
-            <a:ext cx="415399" cy="384048"/>
+          <p:cNvPr id="67" name="Shape 65"/>
+          <p:cNvSpPr/>
+          <p:nvPr/>
+        </p:nvSpPr>
+        <p:spPr>
+          <a:xfrm>
+            <a:off x="5872734" y="4169664"/>
+            <a:ext cx="384048" cy="475488"/>
           </a:xfrm>
           <a:prstGeom prst="rect">
             <a:avLst>
@@ -37931,14 +37871,14 @@
       </p:sp>
       <p:sp>
         <p:nvSpPr>
-          <p:cNvPr id="69" name="Text 67"/>
-          <p:cNvSpPr/>
-          <p:nvPr/>
-        </p:nvSpPr>
-        <p:spPr>
-          <a:xfrm>
-            <a:off x="6152606" y="4169664"/>
-            <a:ext cx="415399" cy="384048"/>
+          <p:cNvPr id="68" name="Text 66"/>
+          <p:cNvSpPr/>
+          <p:nvPr/>
+        </p:nvSpPr>
+        <p:spPr>
+          <a:xfrm>
+            <a:off x="5872734" y="4169664"/>
+            <a:ext cx="384048" cy="475488"/>
           </a:xfrm>
           <a:prstGeom prst="rect">
             <a:avLst/>
@@ -37970,53 +37910,14 @@
       </p:sp>
       <p:sp>
         <p:nvSpPr>
-          <p:cNvPr id="70" name="Text 68"/>
-          <p:cNvSpPr/>
-          <p:nvPr/>
-        </p:nvSpPr>
-        <p:spPr>
-          <a:xfrm>
-            <a:off x="6152606" y="4572000"/>
-            <a:ext cx="415399" cy="219456"/>
-          </a:xfrm>
-          <a:prstGeom prst="rect">
-            <a:avLst/>
-          </a:prstGeom>
-          <a:noFill/>
-          <a:ln/>
-        </p:spPr>
-        <p:txBody>
-          <a:bodyPr wrap="square" lIns="0" tIns="0" rIns="0" bIns="0" rtlCol="0" anchor="t"/>
-          <a:lstStyle/>
-          <a:p>
-            <a:pPr algn="ctr" indent="0" marL="0">
-              <a:buNone/>
-            </a:pPr>
-            <a:r>
-              <a:rPr lang="en-US" sz="750" i="1" dirty="0">
-                <a:solidFill>
-                  <a:srgbClr val="94A3B8"/>
-                </a:solidFill>
-                <a:latin typeface="Calibri" pitchFamily="34" charset="0"/>
-                <a:ea typeface="Calibri" pitchFamily="34" charset="-122"/>
-                <a:cs typeface="Calibri" pitchFamily="34" charset="-120"/>
-              </a:rPr>
-              <a:t>/k/</a:t>
-            </a:r>
-            <a:endParaRPr lang="en-US" sz="750" dirty="0"/>
-          </a:p>
-        </p:txBody>
-      </p:sp>
-      <p:sp>
-        <p:nvSpPr>
-          <p:cNvPr id="71" name="Shape 69"/>
-          <p:cNvSpPr/>
-          <p:nvPr/>
-        </p:nvSpPr>
-        <p:spPr>
-          <a:xfrm>
-            <a:off x="6619211" y="4169664"/>
-            <a:ext cx="415399" cy="384048"/>
+          <p:cNvPr id="69" name="Shape 67"/>
+          <p:cNvSpPr/>
+          <p:nvPr/>
+        </p:nvSpPr>
+        <p:spPr>
+          <a:xfrm>
+            <a:off x="6308217" y="4169664"/>
+            <a:ext cx="384048" cy="475488"/>
           </a:xfrm>
           <a:prstGeom prst="rect">
             <a:avLst>
@@ -38036,14 +37937,14 @@
       </p:sp>
       <p:sp>
         <p:nvSpPr>
-          <p:cNvPr id="72" name="Text 70"/>
-          <p:cNvSpPr/>
-          <p:nvPr/>
-        </p:nvSpPr>
-        <p:spPr>
-          <a:xfrm>
-            <a:off x="6619211" y="4169664"/>
-            <a:ext cx="415399" cy="384048"/>
+          <p:cNvPr id="70" name="Text 68"/>
+          <p:cNvSpPr/>
+          <p:nvPr/>
+        </p:nvSpPr>
+        <p:spPr>
+          <a:xfrm>
+            <a:off x="6308217" y="4169664"/>
+            <a:ext cx="384048" cy="475488"/>
           </a:xfrm>
           <a:prstGeom prst="rect">
             <a:avLst/>
@@ -38075,14 +37976,14 @@
       </p:sp>
       <p:sp>
         <p:nvSpPr>
-          <p:cNvPr id="73" name="Shape 71"/>
-          <p:cNvSpPr/>
-          <p:nvPr/>
-        </p:nvSpPr>
-        <p:spPr>
-          <a:xfrm>
-            <a:off x="7085816" y="4169664"/>
-            <a:ext cx="415399" cy="384048"/>
+          <p:cNvPr id="71" name="Shape 69"/>
+          <p:cNvSpPr/>
+          <p:nvPr/>
+        </p:nvSpPr>
+        <p:spPr>
+          <a:xfrm>
+            <a:off x="6743700" y="4169664"/>
+            <a:ext cx="384048" cy="475488"/>
           </a:xfrm>
           <a:prstGeom prst="rect">
             <a:avLst>
@@ -38102,14 +38003,14 @@
       </p:sp>
       <p:sp>
         <p:nvSpPr>
-          <p:cNvPr id="74" name="Text 72"/>
-          <p:cNvSpPr/>
-          <p:nvPr/>
-        </p:nvSpPr>
-        <p:spPr>
-          <a:xfrm>
-            <a:off x="7085816" y="4169664"/>
-            <a:ext cx="415399" cy="384048"/>
+          <p:cNvPr id="72" name="Text 70"/>
+          <p:cNvSpPr/>
+          <p:nvPr/>
+        </p:nvSpPr>
+        <p:spPr>
+          <a:xfrm>
+            <a:off x="6743700" y="4169664"/>
+            <a:ext cx="384048" cy="475488"/>
           </a:xfrm>
           <a:prstGeom prst="rect">
             <a:avLst/>
@@ -38141,14 +38042,14 @@
       </p:sp>
       <p:sp>
         <p:nvSpPr>
-          <p:cNvPr id="75" name="Shape 73"/>
-          <p:cNvSpPr/>
-          <p:nvPr/>
-        </p:nvSpPr>
-        <p:spPr>
-          <a:xfrm>
-            <a:off x="7552421" y="4169664"/>
-            <a:ext cx="415399" cy="384048"/>
+          <p:cNvPr id="73" name="Shape 71"/>
+          <p:cNvSpPr/>
+          <p:nvPr/>
+        </p:nvSpPr>
+        <p:spPr>
+          <a:xfrm>
+            <a:off x="7179183" y="4169664"/>
+            <a:ext cx="384048" cy="475488"/>
           </a:xfrm>
           <a:prstGeom prst="rect">
             <a:avLst>
@@ -38168,14 +38069,14 @@
       </p:sp>
       <p:sp>
         <p:nvSpPr>
-          <p:cNvPr id="76" name="Text 74"/>
-          <p:cNvSpPr/>
-          <p:nvPr/>
-        </p:nvSpPr>
-        <p:spPr>
-          <a:xfrm>
-            <a:off x="7552421" y="4169664"/>
-            <a:ext cx="415399" cy="384048"/>
+          <p:cNvPr id="74" name="Text 72"/>
+          <p:cNvSpPr/>
+          <p:nvPr/>
+        </p:nvSpPr>
+        <p:spPr>
+          <a:xfrm>
+            <a:off x="7179183" y="4169664"/>
+            <a:ext cx="384048" cy="475488"/>
           </a:xfrm>
           <a:prstGeom prst="rect">
             <a:avLst/>
@@ -38199,7 +38100,7 @@
                 <a:ea typeface="Trebuchet MS" pitchFamily="34" charset="-122"/>
                 <a:cs typeface="Trebuchet MS" pitchFamily="34" charset="-120"/>
               </a:rPr>
-              <a:t>io</a:t>
+              <a:t>i</a:t>
             </a:r>
             <a:endParaRPr lang="en-US" sz="900" dirty="0"/>
           </a:p>
@@ -38207,53 +38108,14 @@
       </p:sp>
       <p:sp>
         <p:nvSpPr>
-          <p:cNvPr id="77" name="Text 75"/>
-          <p:cNvSpPr/>
-          <p:nvPr/>
-        </p:nvSpPr>
-        <p:spPr>
-          <a:xfrm>
-            <a:off x="7552421" y="4572000"/>
-            <a:ext cx="415399" cy="219456"/>
-          </a:xfrm>
-          <a:prstGeom prst="rect">
-            <a:avLst/>
-          </a:prstGeom>
-          <a:noFill/>
-          <a:ln/>
-        </p:spPr>
-        <p:txBody>
-          <a:bodyPr wrap="square" lIns="0" tIns="0" rIns="0" bIns="0" rtlCol="0" anchor="t"/>
-          <a:lstStyle/>
-          <a:p>
-            <a:pPr algn="ctr" indent="0" marL="0">
-              <a:buNone/>
-            </a:pPr>
-            <a:r>
-              <a:rPr lang="en-US" sz="750" i="1" dirty="0">
-                <a:solidFill>
-                  <a:srgbClr val="94A3B8"/>
-                </a:solidFill>
-                <a:latin typeface="Calibri" pitchFamily="34" charset="0"/>
-                <a:ea typeface="Calibri" pitchFamily="34" charset="-122"/>
-                <a:cs typeface="Calibri" pitchFamily="34" charset="-120"/>
-              </a:rPr>
-              <a:t>/sh/</a:t>
-            </a:r>
-            <a:endParaRPr lang="en-US" sz="750" dirty="0"/>
-          </a:p>
-        </p:txBody>
-      </p:sp>
-      <p:sp>
-        <p:nvSpPr>
-          <p:cNvPr id="78" name="Shape 76"/>
-          <p:cNvSpPr/>
-          <p:nvPr/>
-        </p:nvSpPr>
-        <p:spPr>
-          <a:xfrm>
-            <a:off x="8019027" y="4169664"/>
-            <a:ext cx="415399" cy="384048"/>
+          <p:cNvPr id="75" name="Shape 73"/>
+          <p:cNvSpPr/>
+          <p:nvPr/>
+        </p:nvSpPr>
+        <p:spPr>
+          <a:xfrm>
+            <a:off x="7614666" y="4169664"/>
+            <a:ext cx="384048" cy="475488"/>
           </a:xfrm>
           <a:prstGeom prst="rect">
             <a:avLst>
@@ -38273,14 +38135,80 @@
       </p:sp>
       <p:sp>
         <p:nvSpPr>
-          <p:cNvPr id="79" name="Text 77"/>
-          <p:cNvSpPr/>
-          <p:nvPr/>
-        </p:nvSpPr>
-        <p:spPr>
-          <a:xfrm>
-            <a:off x="8019027" y="4169664"/>
-            <a:ext cx="415399" cy="384048"/>
+          <p:cNvPr id="76" name="Text 74"/>
+          <p:cNvSpPr/>
+          <p:nvPr/>
+        </p:nvSpPr>
+        <p:spPr>
+          <a:xfrm>
+            <a:off x="7614666" y="4169664"/>
+            <a:ext cx="384048" cy="475488"/>
+          </a:xfrm>
+          <a:prstGeom prst="rect">
+            <a:avLst/>
+          </a:prstGeom>
+          <a:noFill/>
+          <a:ln/>
+        </p:spPr>
+        <p:txBody>
+          <a:bodyPr wrap="square" lIns="0" tIns="0" rIns="0" bIns="0" rtlCol="0" anchor="ctr"/>
+          <a:lstStyle/>
+          <a:p>
+            <a:pPr algn="ctr" indent="0" marL="0">
+              <a:buNone/>
+            </a:pPr>
+            <a:r>
+              <a:rPr lang="en-US" sz="900" b="1" dirty="0">
+                <a:solidFill>
+                  <a:srgbClr val="9D174D"/>
+                </a:solidFill>
+                <a:latin typeface="Trebuchet MS" pitchFamily="34" charset="0"/>
+                <a:ea typeface="Trebuchet MS" pitchFamily="34" charset="-122"/>
+                <a:cs typeface="Trebuchet MS" pitchFamily="34" charset="-120"/>
+              </a:rPr>
+              <a:t>o</a:t>
+            </a:r>
+            <a:endParaRPr lang="en-US" sz="900" dirty="0"/>
+          </a:p>
+        </p:txBody>
+      </p:sp>
+      <p:sp>
+        <p:nvSpPr>
+          <p:cNvPr id="77" name="Shape 75"/>
+          <p:cNvSpPr/>
+          <p:nvPr/>
+        </p:nvSpPr>
+        <p:spPr>
+          <a:xfrm>
+            <a:off x="8050149" y="4169664"/>
+            <a:ext cx="384048" cy="475488"/>
+          </a:xfrm>
+          <a:prstGeom prst="rect">
+            <a:avLst>
+              <a:gd name="adj" fmla="val 9524"/>
+            </a:avLst>
+          </a:prstGeom>
+          <a:solidFill>
+            <a:srgbClr val="FFFFFF"/>
+          </a:solidFill>
+          <a:ln w="12700">
+            <a:solidFill>
+              <a:srgbClr val="DB2777"/>
+            </a:solidFill>
+            <a:prstDash val="solid"/>
+          </a:ln>
+        </p:spPr>
+      </p:sp>
+      <p:sp>
+        <p:nvSpPr>
+          <p:cNvPr id="78" name="Text 76"/>
+          <p:cNvSpPr/>
+          <p:nvPr/>
+        </p:nvSpPr>
+        <p:spPr>
+          <a:xfrm>
+            <a:off x="8050149" y="4169664"/>
+            <a:ext cx="384048" cy="475488"/>
           </a:xfrm>
           <a:prstGeom prst="rect">
             <a:avLst/>
@@ -42700,7 +42628,7 @@
                 <a:ea typeface="Calibri" pitchFamily="34" charset="-122"/>
                 <a:cs typeface="Calibri" pitchFamily="34" charset="-120"/>
               </a:rPr>
-              <a:t>2.  The word 'miscommunicate' means to share a message very clearly.</a:t>
+              <a:t>2.  A communicator is someone who shares information with others.</a:t>
             </a:r>
             <a:endParaRPr lang="en-US" sz="1300" dirty="0"/>
           </a:p>
@@ -42723,11 +42651,11 @@
             </a:avLst>
           </a:prstGeom>
           <a:solidFill>
-            <a:srgbClr val="FEE2E2"/>
-          </a:solidFill>
-          <a:ln w="12700">
-            <a:solidFill>
-              <a:srgbClr val="DC2626"/>
+            <a:srgbClr val="DCFCE7"/>
+          </a:solidFill>
+          <a:ln w="12700">
+            <a:solidFill>
+              <a:srgbClr val="16A34A"/>
             </a:solidFill>
             <a:prstDash val="solid"/>
           </a:ln>
@@ -42760,13 +42688,13 @@
             <a:r>
               <a:rPr lang="en-US" sz="1100" b="1" dirty="0">
                 <a:solidFill>
-                  <a:srgbClr val="DC2626"/>
-                </a:solidFill>
-                <a:latin typeface="Trebuchet MS" pitchFamily="34" charset="0"/>
-                <a:ea typeface="Trebuchet MS" pitchFamily="34" charset="-122"/>
-                <a:cs typeface="Trebuchet MS" pitchFamily="34" charset="-120"/>
-              </a:rPr>
-              <a:t>FALSE</a:t>
+                  <a:srgbClr val="16A34A"/>
+                </a:solidFill>
+                <a:latin typeface="Trebuchet MS" pitchFamily="34" charset="0"/>
+                <a:ea typeface="Trebuchet MS" pitchFamily="34" charset="-122"/>
+                <a:cs typeface="Trebuchet MS" pitchFamily="34" charset="-120"/>
+              </a:rPr>
+              <a:t>TRUE</a:t>
             </a:r>
             <a:endParaRPr lang="en-US" sz="1100" dirty="0"/>
           </a:p>
@@ -42839,7 +42767,7 @@
                 <a:ea typeface="Calibri" pitchFamily="34" charset="-122"/>
                 <a:cs typeface="Calibri" pitchFamily="34" charset="-120"/>
               </a:rPr>
-              <a:t>3.  The suffix '-ive' in 'communicative' turns the word into a noun.</a:t>
+              <a:t>3.  The word 'miscommunicate' means to share a message very clearly.</a:t>
             </a:r>
             <a:endParaRPr lang="en-US" sz="1300" dirty="0"/>
           </a:p>
@@ -43117,7 +43045,7 @@
                 <a:ea typeface="Calibri" pitchFamily="34" charset="-122"/>
                 <a:cs typeface="Calibri" pitchFamily="34" charset="-120"/>
               </a:rPr>
-              <a:t>5.  A communicator is someone who shares information with others.</a:t>
+              <a:t>5.  The suffix '-ive' in 'communicative' turns the word into a noun.</a:t>
             </a:r>
             <a:endParaRPr lang="en-US" sz="1300" dirty="0"/>
           </a:p>
@@ -43140,11 +43068,11 @@
             </a:avLst>
           </a:prstGeom>
           <a:solidFill>
-            <a:srgbClr val="DCFCE7"/>
-          </a:solidFill>
-          <a:ln w="12700">
-            <a:solidFill>
-              <a:srgbClr val="16A34A"/>
+            <a:srgbClr val="FEE2E2"/>
+          </a:solidFill>
+          <a:ln w="12700">
+            <a:solidFill>
+              <a:srgbClr val="DC2626"/>
             </a:solidFill>
             <a:prstDash val="solid"/>
           </a:ln>
@@ -43177,13 +43105,13 @@
             <a:r>
               <a:rPr lang="en-US" sz="1100" b="1" dirty="0">
                 <a:solidFill>
-                  <a:srgbClr val="16A34A"/>
-                </a:solidFill>
-                <a:latin typeface="Trebuchet MS" pitchFamily="34" charset="0"/>
-                <a:ea typeface="Trebuchet MS" pitchFamily="34" charset="-122"/>
-                <a:cs typeface="Trebuchet MS" pitchFamily="34" charset="-120"/>
-              </a:rPr>
-              <a:t>TRUE</a:t>
+                  <a:srgbClr val="DC2626"/>
+                </a:solidFill>
+                <a:latin typeface="Trebuchet MS" pitchFamily="34" charset="0"/>
+                <a:ea typeface="Trebuchet MS" pitchFamily="34" charset="-122"/>
+                <a:cs typeface="Trebuchet MS" pitchFamily="34" charset="-120"/>
+              </a:rPr>
+              <a:t>FALSE</a:t>
             </a:r>
             <a:endParaRPr lang="en-US" sz="1100" dirty="0"/>
           </a:p>
